--- a/Module7_Demo_v1.0/Module7_Structured_Outputs_Function_Calling_and_Tool_Use.pptx
+++ b/Module7_Demo_v1.0/Module7_Structured_Outputs_Function_Calling_and_Tool_Use.pptx
@@ -122,52 +122,6 @@
     </a:lvl9pPr>
   </p:defaultTextStyle>
   <p:extLst>
-    <p:ext uri="{521415D9-36F7-43E2-AB2F-B90AF26B5E84}">
-      <p14:sectionLst xmlns:p14="http://schemas.microsoft.com/office/powerpoint/2010/main">
-        <p14:section name="Introduction" id="{41412362-99ce-0cfe-a17c-14e4e36d88be}">
-          <p14:sldIdLst>
-            <p14:sldId id="256"/>
-            <p14:sldId id="257"/>
-          </p14:sldIdLst>
-        </p14:section>
-        <p14:section name="1. Structured Outputs" id="{2f71eb2e-bcb1-da90-b77e-fd887024beb9}">
-          <p14:sldIdLst>
-            <p14:sldId id="258"/>
-            <p14:sldId id="259"/>
-            <p14:sldId id="260"/>
-          </p14:sldIdLst>
-        </p14:section>
-        <p14:section name="2. Pydantic Validation" id="{d8951670-9f91-0a4a-7eaf-b46798d3f902}">
-          <p14:sldIdLst>
-            <p14:sldId id="261"/>
-            <p14:sldId id="262"/>
-          </p14:sldIdLst>
-        </p14:section>
-        <p14:section name="3. Function Calling &amp; Tool Use" id="{1de3609e-2bbb-365c-f89b-55207f91dcc4}">
-          <p14:sldIdLst>
-            <p14:sldId id="263"/>
-            <p14:sldId id="264"/>
-            <p14:sldId id="265"/>
-          </p14:sldIdLst>
-        </p14:section>
-        <p14:section name="4. Safe Design &amp; Error Handling" id="{b156c6eb-f06c-efae-1fec-bde3dd735d5f}">
-          <p14:sldIdLst>
-            <p14:sldId id="266"/>
-            <p14:sldId id="267"/>
-            <p14:sldId id="268"/>
-            <p14:sldId id="269"/>
-          </p14:sldIdLst>
-        </p14:section>
-        <p14:section name="Wrap-up" id="{59c6571c-7d50-a0ae-f479-88d5aca1b556}">
-          <p14:sldIdLst>
-            <p14:sldId id="270"/>
-            <p14:sldId id="271"/>
-            <p14:sldId id="272"/>
-            <p14:sldId id="273"/>
-          </p14:sldIdLst>
-        </p14:section>
-      </p14:sectionLst>
-    </p:ext>
     <p:ext uri="{EFAFB233-063F-42B5-8137-9DF3F51BA10A}">
       <p15:sldGuideLst xmlns:p15="http://schemas.microsoft.com/office/powerpoint/2012/main"/>
     </p:ext>

--- a/Module7_Demo_v1.0/Module7_Structured_Outputs_Function_Calling_and_Tool_Use.pptx
+++ b/Module7_Demo_v1.0/Module7_Structured_Outputs_Function_Calling_and_Tool_Use.pptx
@@ -4,30 +4,31 @@
   <p:sldMasterIdLst>
     <p:sldMasterId id="2147483648" r:id="rId1"/>
   </p:sldMasterIdLst>
+  <p:notesMasterIdLst>
+    <p:notesMasterId r:id="rId21"/>
+  </p:notesMasterIdLst>
   <p:sldIdLst>
     <p:sldId id="256" r:id="rId2"/>
     <p:sldId id="257" r:id="rId3"/>
-    <p:sldId id="258" r:id="rId4"/>
-    <p:sldId id="259" r:id="rId5"/>
-    <p:sldId id="260" r:id="rId6"/>
-    <p:sldId id="261" r:id="rId7"/>
-    <p:sldId id="262" r:id="rId8"/>
-    <p:sldId id="263" r:id="rId9"/>
-    <p:sldId id="264" r:id="rId10"/>
-    <p:sldId id="265" r:id="rId11"/>
-    <p:sldId id="266" r:id="rId12"/>
-    <p:sldId id="267" r:id="rId13"/>
-    <p:sldId id="268" r:id="rId14"/>
-    <p:sldId id="269" r:id="rId15"/>
-    <p:sldId id="270" r:id="rId16"/>
-    <p:sldId id="271" r:id="rId17"/>
-    <p:sldId id="272" r:id="rId18"/>
-    <p:sldId id="273" r:id="rId19"/>
+    <p:sldId id="274" r:id="rId4"/>
+    <p:sldId id="258" r:id="rId5"/>
+    <p:sldId id="259" r:id="rId6"/>
+    <p:sldId id="260" r:id="rId7"/>
+    <p:sldId id="261" r:id="rId8"/>
+    <p:sldId id="262" r:id="rId9"/>
+    <p:sldId id="263" r:id="rId10"/>
+    <p:sldId id="264" r:id="rId11"/>
+    <p:sldId id="265" r:id="rId12"/>
+    <p:sldId id="266" r:id="rId13"/>
+    <p:sldId id="267" r:id="rId14"/>
+    <p:sldId id="268" r:id="rId15"/>
+    <p:sldId id="269" r:id="rId16"/>
+    <p:sldId id="270" r:id="rId17"/>
+    <p:sldId id="271" r:id="rId18"/>
+    <p:sldId id="272" r:id="rId19"/>
+    <p:sldId id="273" r:id="rId20"/>
   </p:sldIdLst>
-  <p:notesMasterIdLst>
-    <p:notesMasterId r:id="rId20"/>
-  </p:notesMasterIdLst>
-  <p:sldSz cx="9144000" cy="5143500"/>
+  <p:sldSz cx="9144000" cy="5143500" type="screen16x9"/>
   <p:notesSz cx="5143500" cy="9144000"/>
   <p:defaultTextStyle>
     <a:lvl1pPr marL="0" algn="l" defTabSz="914400" rtl="0" eaLnBrk="1" latinLnBrk="0" hangingPunct="1">
@@ -151,234 +152,10 @@
           <a:chExt cx="0" cy="0"/>
         </a:xfrm>
       </p:grpSpPr>
-      <p:sp>
-        <p:nvSpPr>
-          <p:cNvPr id="2" name="Header Placeholder 1"/>
-          <p:cNvSpPr>
-            <a:spLocks noGrp="1"/>
-          </p:cNvSpPr>
-          <p:nvPr>
-            <p:ph type="hdr" sz="quarter"/>
-          </p:nvPr>
-        </p:nvSpPr>
-        <p:spPr>
-          <a:xfrm>
-            <a:off x="0" y="0"/>
-            <a:ext cx="2971800" cy="458788"/>
-          </a:xfrm>
-          <a:prstGeom prst="rect">
-            <a:avLst/>
-          </a:prstGeom>
-        </p:spPr>
-        <p:txBody>
-          <a:bodyPr vert="horz" lIns="91440" tIns="45720" rIns="91440" bIns="45720" rtlCol="0"/>
-          <a:lstStyle>
-            <a:lvl1pPr algn="l">
-              <a:defRPr sz="1200"/>
-            </a:lvl1pPr>
-          </a:lstStyle>
-          <a:p>
-            <a:endParaRPr lang="en-US"/>
-          </a:p>
-        </p:txBody>
-      </p:sp>
-      <p:sp>
-        <p:nvSpPr>
-          <p:cNvPr id="3" name="Date Placeholder 2"/>
-          <p:cNvSpPr>
-            <a:spLocks noGrp="1"/>
-          </p:cNvSpPr>
-          <p:nvPr>
-            <p:ph type="dt" idx="1"/>
-          </p:nvPr>
-        </p:nvSpPr>
-        <p:spPr>
-          <a:xfrm>
-            <a:off x="3884613" y="0"/>
-            <a:ext cx="2971800" cy="458788"/>
-          </a:xfrm>
-          <a:prstGeom prst="rect">
-            <a:avLst/>
-          </a:prstGeom>
-        </p:spPr>
-        <p:txBody>
-          <a:bodyPr vert="horz" lIns="91440" tIns="45720" rIns="91440" bIns="45720" rtlCol="0"/>
-          <a:lstStyle>
-            <a:lvl1pPr algn="r">
-              <a:defRPr sz="1200"/>
-            </a:lvl1pPr>
-          </a:lstStyle>
-          <a:p>
-            <a:fld id="{5282F153-3F37-0F45-9E97-73ACFA13230C}" type="datetimeFigureOut">
-              <a:rPr lang="en-US"/>
-              <a:t>7/23/19</a:t>
-            </a:fld>
-            <a:endParaRPr lang="en-US"/>
-          </a:p>
-        </p:txBody>
-      </p:sp>
-      <p:sp>
-        <p:nvSpPr>
-          <p:cNvPr id="4" name="Slide Image Placeholder 3"/>
-          <p:cNvSpPr>
-            <a:spLocks noGrp="1" noRot="1" noChangeAspect="1"/>
-          </p:cNvSpPr>
-          <p:nvPr>
-            <p:ph type="sldImg" idx="2"/>
-          </p:nvPr>
-        </p:nvSpPr>
-        <p:spPr>
-          <a:xfrm>
-            <a:off x="685800" y="1143000"/>
-            <a:ext cx="5486400" cy="3086100"/>
-          </a:xfrm>
-          <a:prstGeom prst="rect">
-            <a:avLst/>
-          </a:prstGeom>
-          <a:noFill/>
-          <a:ln w="12700">
-            <a:solidFill>
-              <a:prstClr val="black"/>
-            </a:solidFill>
-          </a:ln>
-        </p:spPr>
-        <p:txBody>
-          <a:bodyPr vert="horz" lIns="91440" tIns="45720" rIns="91440" bIns="45720" rtlCol="0" anchor="ctr"/>
-          <a:lstStyle/>
-          <a:p>
-            <a:endParaRPr lang="en-US"/>
-          </a:p>
-        </p:txBody>
-      </p:sp>
-      <p:sp>
-        <p:nvSpPr>
-          <p:cNvPr id="5" name="Notes Placeholder 4"/>
-          <p:cNvSpPr>
-            <a:spLocks noGrp="1"/>
-          </p:cNvSpPr>
-          <p:nvPr>
-            <p:ph type="body" sz="quarter" idx="3"/>
-          </p:nvPr>
-        </p:nvSpPr>
-        <p:spPr>
-          <a:xfrm>
-            <a:off x="685800" y="4400550"/>
-            <a:ext cx="5486400" cy="3600450"/>
-          </a:xfrm>
-          <a:prstGeom prst="rect">
-            <a:avLst/>
-          </a:prstGeom>
-        </p:spPr>
-        <p:txBody>
-          <a:bodyPr vert="horz" lIns="91440" tIns="45720" rIns="91440" bIns="45720" rtlCol="0"/>
-          <a:lstStyle/>
-          <a:p>
-            <a:pPr lvl="0"/>
-            <a:r>
-              <a:rPr lang="en-US"/>
-              <a:t>Click to edit Master text styles</a:t>
-            </a:r>
-          </a:p>
-          <a:p>
-            <a:pPr lvl="1"/>
-            <a:r>
-              <a:rPr lang="en-US"/>
-              <a:t>Second level</a:t>
-            </a:r>
-          </a:p>
-          <a:p>
-            <a:pPr lvl="2"/>
-            <a:r>
-              <a:rPr lang="en-US"/>
-              <a:t>Third level</a:t>
-            </a:r>
-          </a:p>
-          <a:p>
-            <a:pPr lvl="3"/>
-            <a:r>
-              <a:rPr lang="en-US"/>
-              <a:t>Fourth level</a:t>
-            </a:r>
-          </a:p>
-          <a:p>
-            <a:pPr lvl="4"/>
-            <a:r>
-              <a:rPr lang="en-US"/>
-              <a:t>Fifth level</a:t>
-            </a:r>
-          </a:p>
-        </p:txBody>
-      </p:sp>
-      <p:sp>
-        <p:nvSpPr>
-          <p:cNvPr id="6" name="Footer Placeholder 5"/>
-          <p:cNvSpPr>
-            <a:spLocks noGrp="1"/>
-          </p:cNvSpPr>
-          <p:nvPr>
-            <p:ph type="ftr" sz="quarter" idx="4"/>
-          </p:nvPr>
-        </p:nvSpPr>
-        <p:spPr>
-          <a:xfrm>
-            <a:off x="0" y="8685213"/>
-            <a:ext cx="2971800" cy="458787"/>
-          </a:xfrm>
-          <a:prstGeom prst="rect">
-            <a:avLst/>
-          </a:prstGeom>
-        </p:spPr>
-        <p:txBody>
-          <a:bodyPr vert="horz" lIns="91440" tIns="45720" rIns="91440" bIns="45720" rtlCol="0" anchor="b"/>
-          <a:lstStyle>
-            <a:lvl1pPr algn="l">
-              <a:defRPr sz="1200"/>
-            </a:lvl1pPr>
-          </a:lstStyle>
-          <a:p>
-            <a:endParaRPr lang="en-US"/>
-          </a:p>
-        </p:txBody>
-      </p:sp>
-      <p:sp>
-        <p:nvSpPr>
-          <p:cNvPr id="7" name="Slide Number Placeholder 6"/>
-          <p:cNvSpPr>
-            <a:spLocks noGrp="1"/>
-          </p:cNvSpPr>
-          <p:nvPr>
-            <p:ph type="sldNum" sz="quarter" idx="5"/>
-          </p:nvPr>
-        </p:nvSpPr>
-        <p:spPr>
-          <a:xfrm>
-            <a:off x="3884613" y="8685213"/>
-            <a:ext cx="2971800" cy="458787"/>
-          </a:xfrm>
-          <a:prstGeom prst="rect">
-            <a:avLst/>
-          </a:prstGeom>
-        </p:spPr>
-        <p:txBody>
-          <a:bodyPr vert="horz" lIns="91440" tIns="45720" rIns="91440" bIns="45720" rtlCol="0" anchor="b"/>
-          <a:lstStyle>
-            <a:lvl1pPr algn="r">
-              <a:defRPr sz="1200"/>
-            </a:lvl1pPr>
-          </a:lstStyle>
-          <a:p>
-            <a:fld id="{CE5E9CC1-C706-0F49-92D6-E571CC5EEA8F}" type="slidenum">
-              <a:rPr lang="en-US"/>
-              <a:t>‹#›</a:t>
-            </a:fld>
-            <a:endParaRPr lang="en-US"/>
-          </a:p>
-        </p:txBody>
-      </p:sp>
     </p:spTree>
     <p:extLst>
       <p:ext uri="{BB962C8B-B14F-4D97-AF65-F5344CB8AC3E}">
-        <p14:creationId xmlns:p14="http://schemas.microsoft.com/office/powerpoint/2010/main" val="1024086991"/>
+        <p14:creationId xmlns:p14="http://schemas.microsoft.com/office/powerpoint/2010/main" val="2994817153"/>
       </p:ext>
     </p:extLst>
   </p:cSld>
@@ -522,10 +299,6 @@
           <a:bodyPr/>
           <a:lstStyle/>
           <a:p>
-            <a:r>
-              <a:rPr lang="en-US" dirty="0"/>
-              <a:t/>
-            </a:r>
             <a:endParaRPr lang="en-US" dirty="0"/>
           </a:p>
         </p:txBody>
@@ -625,7 +398,6 @@
 Trade-off: routing ambiguity rises with tool count. Keep descriptions distinct and non-overlapping.
 Key point: surprises in tool choice are almost always a description problem, not a model problem.</a:t>
             </a:r>
-            <a:endParaRPr lang="en-US" dirty="0"/>
           </a:p>
         </p:txBody>
       </p:sp>
@@ -646,7 +418,7 @@
           <a:p>
             <a:fld id="{F7021451-1387-4CA6-816F-3879F97B5CBC}" type="slidenum">
               <a:rPr lang="en-US"/>
-              <a:t>10</a:t>
+              <a:t>11</a:t>
             </a:fld>
             <a:endParaRPr lang="en-US"/>
           </a:p>
@@ -719,7 +491,6 @@
 Trade-off: overly strict schemas make the model fail more often. Calibrate constraints to what the tool actually needs.
 Key point: the schema description tells the model what you expect; the validator enforces it. Both are required.</a:t>
             </a:r>
-            <a:endParaRPr lang="en-US" dirty="0"/>
           </a:p>
         </p:txBody>
       </p:sp>
@@ -740,7 +511,7 @@
           <a:p>
             <a:fld id="{F7021451-1387-4CA6-816F-3879F97B5CBC}" type="slidenum">
               <a:rPr lang="en-US"/>
-              <a:t>11</a:t>
+              <a:t>12</a:t>
             </a:fld>
             <a:endParaRPr lang="en-US"/>
           </a:p>
@@ -813,7 +584,6 @@
 Trade-off: confirmation steps add a round-trip. Reserve them for genuinely irreversible operations.
 Key point: the principle of least privilege applies to tools.</a:t>
             </a:r>
-            <a:endParaRPr lang="en-US" dirty="0"/>
           </a:p>
         </p:txBody>
       </p:sp>
@@ -834,7 +604,7 @@
           <a:p>
             <a:fld id="{F7021451-1387-4CA6-816F-3879F97B5CBC}" type="slidenum">
               <a:rPr lang="en-US"/>
-              <a:t>12</a:t>
+              <a:t>13</a:t>
             </a:fld>
             <a:endParaRPr lang="en-US"/>
           </a:p>
@@ -907,7 +677,6 @@
 Pattern from the original slide: parse_model_output(raw, schema, max_retries=2) loops: json.loads -&gt; schema.model_validate; on JSONDecodeError re-ask the model to fix the JSON; on ValidationError re-ask with the specific errors (e.errors()) until max_retries.
 Trade-off: retrying blindly on any error amplifies cost. Log failures, categorize them, and fix prompts before adding retry loops.</a:t>
             </a:r>
-            <a:endParaRPr lang="en-US" dirty="0"/>
           </a:p>
         </p:txBody>
       </p:sp>
@@ -928,7 +697,7 @@
           <a:p>
             <a:fld id="{F7021451-1387-4CA6-816F-3879F97B5CBC}" type="slidenum">
               <a:rPr lang="en-US"/>
-              <a:t>13</a:t>
+              <a:t>14</a:t>
             </a:fld>
             <a:endParaRPr lang="en-US"/>
           </a:p>
@@ -1001,7 +770,6 @@
 Trade-off: prompt-level retries cost tokens and add latency. Fix the root cause (prompt or schema) once you see a pattern.
 Key point: "what happens when parsing fails?" should be answered in design, not in production.</a:t>
             </a:r>
-            <a:endParaRPr lang="en-US" dirty="0"/>
           </a:p>
         </p:txBody>
       </p:sp>
@@ -1022,7 +790,7 @@
           <a:p>
             <a:fld id="{F7021451-1387-4CA6-816F-3879F97B5CBC}" type="slidenum">
               <a:rPr lang="en-US"/>
-              <a:t>14</a:t>
+              <a:t>15</a:t>
             </a:fld>
             <a:endParaRPr lang="en-US"/>
           </a:p>
@@ -1095,7 +863,6 @@
 PydanticOutputParser: parse and validate free text.
 RetryWithErrorOutputParser: auto-retry on parse failure.</a:t>
             </a:r>
-            <a:endParaRPr lang="en-US" dirty="0"/>
           </a:p>
         </p:txBody>
       </p:sp>
@@ -1116,7 +883,7 @@
           <a:p>
             <a:fld id="{F7021451-1387-4CA6-816F-3879F97B5CBC}" type="slidenum">
               <a:rPr lang="en-US"/>
-              <a:t>15</a:t>
+              <a:t>16</a:t>
             </a:fld>
             <a:endParaRPr lang="en-US"/>
           </a:p>
@@ -1196,7 +963,6 @@
 Trade-off: chaining too many retry layers makes debugging hard. Add one layer at a time and test each independently.
 Key point: instrument every layer so failures are diagnosable, not mysterious.</a:t>
             </a:r>
-            <a:endParaRPr lang="en-US" dirty="0"/>
           </a:p>
         </p:txBody>
       </p:sp>
@@ -1217,7 +983,7 @@
           <a:p>
             <a:fld id="{F7021451-1387-4CA6-816F-3879F97B5CBC}" type="slidenum">
               <a:rPr lang="en-US"/>
-              <a:t>16</a:t>
+              <a:t>17</a:t>
             </a:fld>
             <a:endParaRPr lang="en-US"/>
           </a:p>
@@ -1288,7 +1054,6 @@
 3. Model arguments trusted directly: never pass tool args straight to SQL, file paths, or shell commands. Validate with Pydantic, sanitize inputs, and scope the tool to the minimum access it needs.
 4. No retry, no fallback: a single parse failure crashes the whole flow. Wrap with RetryWithErrorOutputParser and add a hard fallback that returns a structured error instead of raising.</a:t>
             </a:r>
-            <a:endParaRPr lang="en-US" dirty="0"/>
           </a:p>
         </p:txBody>
       </p:sp>
@@ -1309,7 +1074,7 @@
           <a:p>
             <a:fld id="{F7021451-1387-4CA6-816F-3879F97B5CBC}" type="slidenum">
               <a:rPr lang="en-US"/>
-              <a:t>17</a:t>
+              <a:t>18</a:t>
             </a:fld>
             <a:endParaRPr lang="en-US"/>
           </a:p>
@@ -1378,7 +1143,6 @@
 Tools call, models choose: the model never executes code; it returns a choice. Your code runs the function, validates the arguments, and controls what the model can and cannot touch.
 Plan for failure from day one: models produce wrong types, missing fields, and truncated JSON. Build validation, retry, and fallback into the design, not as an afterthought.</a:t>
             </a:r>
-            <a:endParaRPr lang="en-US" dirty="0"/>
           </a:p>
         </p:txBody>
       </p:sp>
@@ -1399,7 +1163,7 @@
           <a:p>
             <a:fld id="{F7021451-1387-4CA6-816F-3879F97B5CBC}" type="slidenum">
               <a:rPr lang="en-US"/>
-              <a:t>18</a:t>
+              <a:t>19</a:t>
             </a:fld>
             <a:endParaRPr lang="en-US"/>
           </a:p>
@@ -1470,7 +1234,6 @@
 3. Function Calling &amp; Tool Use: defining tools, routing user intent, and building tool-enabled LangChain chains.
 4. Safe Design &amp; Error Handling: safe tool schemas, permissions, and handling malformed or partial model output.</a:t>
             </a:r>
-            <a:endParaRPr lang="en-US" dirty="0"/>
           </a:p>
         </p:txBody>
       </p:sp>
@@ -1564,7 +1327,6 @@
 Trade-off: JSON mode guarantees valid JSON, not correct JSON. The model can still produce the wrong keys or wrong types.
 Key point: always pair JSON mode with a schema or Pydantic validation to catch semantic errors, not just syntax errors.</a:t>
             </a:r>
-            <a:endParaRPr lang="en-US" dirty="0"/>
           </a:p>
         </p:txBody>
       </p:sp>
@@ -1585,7 +1347,7 @@
           <a:p>
             <a:fld id="{F7021451-1387-4CA6-816F-3879F97B5CBC}" type="slidenum">
               <a:rPr lang="en-US"/>
-              <a:t>3</a:t>
+              <a:t>4</a:t>
             </a:fld>
             <a:endParaRPr lang="en-US"/>
           </a:p>
@@ -1658,7 +1420,6 @@
 Trade-off: with_structured_output() requires the model to support function/tool calling, so it doesn't work with every provider.
 Key point: prefer this over raw JSON mode whenever you control the schema. It eliminates an entire class of parsing errors.</a:t>
             </a:r>
-            <a:endParaRPr lang="en-US" dirty="0"/>
           </a:p>
         </p:txBody>
       </p:sp>
@@ -1679,7 +1440,7 @@
           <a:p>
             <a:fld id="{F7021451-1387-4CA6-816F-3879F97B5CBC}" type="slidenum">
               <a:rPr lang="en-US"/>
-              <a:t>4</a:t>
+              <a:t>5</a:t>
             </a:fld>
             <a:endParaRPr lang="en-US"/>
           </a:p>
@@ -1753,7 +1514,6 @@
 Trade-off: extraction accuracy drops on noisy or ambiguous text.
 Key point: use Field(description=...) generously.</a:t>
             </a:r>
-            <a:endParaRPr lang="en-US" dirty="0"/>
           </a:p>
         </p:txBody>
       </p:sp>
@@ -1774,7 +1534,7 @@
           <a:p>
             <a:fld id="{F7021451-1387-4CA6-816F-3879F97B5CBC}" type="slidenum">
               <a:rPr lang="en-US"/>
-              <a:t>5</a:t>
+              <a:t>6</a:t>
             </a:fld>
             <a:endParaRPr lang="en-US"/>
           </a:p>
@@ -1844,7 +1604,6 @@
 Output validation: after the model responds, Pydantic validates the output against the schema, catching wrong types, missing required fields, and constraint violations before your application code ever sees the object.
 Runtime safety: Pydantic raises a ValidationError on bad output, giving you a structured exception to catch, inspect, and retry from, rather than a cryptic KeyError or AttributeError buried in application code.</a:t>
             </a:r>
-            <a:endParaRPr lang="en-US" dirty="0"/>
           </a:p>
         </p:txBody>
       </p:sp>
@@ -1865,7 +1624,7 @@
           <a:p>
             <a:fld id="{F7021451-1387-4CA6-816F-3879F97B5CBC}" type="slidenum">
               <a:rPr lang="en-US"/>
-              <a:t>6</a:t>
+              <a:t>7</a:t>
             </a:fld>
             <a:endParaRPr lang="en-US"/>
           </a:p>
@@ -1938,7 +1697,6 @@
 Trade-off: strict validators can make the model retry more often. Balance precision with practical tolerance for near-correct output.
 Key point: log ValidationError details. They tell you exactly which field failed and why, which helps you improve the prompt.</a:t>
             </a:r>
-            <a:endParaRPr lang="en-US" dirty="0"/>
           </a:p>
         </p:txBody>
       </p:sp>
@@ -1959,7 +1717,7 @@
           <a:p>
             <a:fld id="{F7021451-1387-4CA6-816F-3879F97B5CBC}" type="slidenum">
               <a:rPr lang="en-US"/>
-              <a:t>7</a:t>
+              <a:t>8</a:t>
             </a:fld>
             <a:endParaRPr lang="en-US"/>
           </a:p>
@@ -2033,7 +1791,6 @@
 Trade-off: the model only picks tools. Execution, errors, and timeouts are entirely your code's responsibility.
 Key point: the tool description is the most important part of the schema.</a:t>
             </a:r>
-            <a:endParaRPr lang="en-US" dirty="0"/>
           </a:p>
         </p:txBody>
       </p:sp>
@@ -2054,7 +1811,7 @@
           <a:p>
             <a:fld id="{F7021451-1387-4CA6-816F-3879F97B5CBC}" type="slidenum">
               <a:rPr lang="en-US"/>
-              <a:t>8</a:t>
+              <a:t>9</a:t>
             </a:fld>
             <a:endParaRPr lang="en-US"/>
           </a:p>
@@ -2127,7 +1884,6 @@
 Trade-off: docstrings drive discovery. A vague docstring means the model won't know when to call the tool.
 Key point: start with @tool for prototyping; graduate to BaseTool when the tool needs async, state, or retry logic.</a:t>
             </a:r>
-            <a:endParaRPr lang="en-US" dirty="0"/>
           </a:p>
         </p:txBody>
       </p:sp>
@@ -2148,7 +1904,7 @@
           <a:p>
             <a:fld id="{F7021451-1387-4CA6-816F-3879F97B5CBC}" type="slidenum">
               <a:rPr lang="en-US"/>
-              <a:t>9</a:t>
+              <a:t>10</a:t>
             </a:fld>
             <a:endParaRPr lang="en-US"/>
           </a:p>
@@ -2205,6 +1961,7 @@
         <a:solidFill>
           <a:srgbClr val="FFFFFF"/>
         </a:solidFill>
+        <a:effectLst/>
       </p:bgPr>
     </p:bg>
     <p:spTree>
@@ -2242,7 +1999,7 @@
           <a:bodyPr wrap="square" lIns="0" tIns="0" rIns="0" bIns="0" rtlCol="0" anchor="ctr"/>
           <a:lstStyle/>
           <a:p>
-            <a:pPr indent="0" marL="0">
+            <a:pPr marL="0" indent="0">
               <a:buNone/>
             </a:pPr>
             <a:r>
@@ -2260,9 +2017,11 @@
       <p:sp>
         <p:nvSpPr>
           <p:cNvPr id="3" name="Text 1"/>
-          <p:cNvSpPr/>
+          <p:cNvSpPr>
+            <a:spLocks noGrp="1"/>
+          </p:cNvSpPr>
           <p:nvPr>
-            <p:ph idx="101" type="title" hasCustomPrompt="1"/>
+            <p:ph type="title" idx="101" hasCustomPrompt="1"/>
           </p:nvPr>
         </p:nvSpPr>
         <p:spPr>
@@ -2279,7 +2038,7 @@
         <p:txBody>
           <a:bodyPr wrap="square" rtlCol="0"/>
           <a:lstStyle>
-            <a:lvl1pPr algn="l" indent="0" marL="0">
+            <a:lvl1pPr marL="0" indent="0" algn="l">
               <a:buNone/>
               <a:defRPr lang="en-US" sz="2800" b="1" dirty="0">
                 <a:solidFill>
@@ -2289,7 +2048,7 @@
             </a:lvl1pPr>
           </a:lstStyle>
           <a:p>
-            <a:pPr algn="l" indent="0" marL="0">
+            <a:pPr marL="0" indent="0" algn="l">
               <a:buNone/>
             </a:pPr>
             <a:endParaRPr lang="en-US" sz="2800" dirty="0"/>
@@ -2316,7 +2075,7 @@
           </a:prstGeom>
           <a:extLst>
             <a:ext uri="{C572A759-6A51-4108-AA02-DFA0A04FC94B}">
-              <ma14:wrappingTextBoxFlag xmlns:ma14="http://schemas.microsoft.com/office/mac/drawingml/2011/main" val="0"/>
+              <ma14:wrappingTextBoxFlag xmlns:ma14="http://schemas.microsoft.com/office/mac/drawingml/2011/main" xmlns="" val="0"/>
             </a:ext>
           </a:extLst>
         </p:spPr>
@@ -2334,8 +2093,8 @@
           <a:p>
             <a:pPr algn="r"/>
             <a:fld id="{F7021451-1387-4CA6-816F-3879F97B5CBC}" type="slidenum">
-              <a:rPr b="0" lang="en-US"/>
-              <a:t>1002</a:t>
+              <a:rPr lang="en-US" b="0"/>
+              <a:t>‹#›</a:t>
             </a:fld>
             <a:endParaRPr lang="en-US"/>
           </a:p>
@@ -2357,6 +2116,7 @@
         <a:solidFill>
           <a:srgbClr val="1B2A4A"/>
         </a:solidFill>
+        <a:effectLst/>
       </p:bgPr>
     </p:bg>
     <p:spTree>
@@ -2384,6 +2144,11 @@
 <file path=ppt/slideMasters/slideMaster1.xml><?xml version="1.0" encoding="utf-8"?>
 <p:sldMaster xmlns:a="http://schemas.openxmlformats.org/drawingml/2006/main" xmlns:r="http://schemas.openxmlformats.org/officeDocument/2006/relationships" xmlns:p="http://schemas.openxmlformats.org/presentationml/2006/main">
   <p:cSld>
+    <p:bg>
+      <p:bgRef idx="1001">
+        <a:schemeClr val="bg1"/>
+      </p:bgRef>
+    </p:bg>
     <p:spTree>
       <p:nvGrpSpPr>
         <p:cNvPr id="1" name=""/>
@@ -2418,7 +2183,7 @@
           </a:prstGeom>
           <a:extLst>
             <a:ext uri="{C572A759-6A51-4108-AA02-DFA0A04FC94B}">
-              <ma14:wrappingTextBoxFlag xmlns:ma14="http://schemas.microsoft.com/office/mac/drawingml/2011/main" val="0"/>
+              <ma14:wrappingTextBoxFlag xmlns:ma14="http://schemas.microsoft.com/office/mac/drawingml/2011/main" xmlns="" val="0"/>
             </a:ext>
           </a:extLst>
         </p:spPr>
@@ -2436,8 +2201,8 @@
           <a:p>
             <a:pPr algn="r"/>
             <a:fld id="{F7021451-1387-4CA6-816F-3879F97B5CBC}" type="slidenum">
-              <a:rPr b="0" lang="en-US"/>
-              <a:t>null</a:t>
+              <a:rPr lang="en-US" b="0"/>
+              <a:t>‹#›</a:t>
             </a:fld>
             <a:endParaRPr lang="en-US"/>
           </a:p>
@@ -2793,11 +2558,11 @@
           <a:bodyPr wrap="square" lIns="0" tIns="0" rIns="0" bIns="0" rtlCol="0" anchor="ctr"/>
           <a:lstStyle/>
           <a:p>
-            <a:pPr indent="0" marL="0">
-              <a:buNone/>
-            </a:pPr>
-            <a:r>
-              <a:rPr lang="en-US" sz="1300" b="1" spc="400" kern="0" dirty="0">
+            <a:pPr marL="0" indent="0">
+              <a:buNone/>
+            </a:pPr>
+            <a:r>
+              <a:rPr lang="en-US" sz="1300" b="1" kern="0" spc="400" dirty="0">
                 <a:solidFill>
                   <a:srgbClr val="D4824A"/>
                 </a:solidFill>
@@ -2829,7 +2594,7 @@
           <a:bodyPr wrap="square" lIns="0" tIns="0" rIns="0" bIns="0" rtlCol="0" anchor="t"/>
           <a:lstStyle/>
           <a:p>
-            <a:pPr indent="0" marL="0">
+            <a:pPr marL="0" indent="0">
               <a:buNone/>
             </a:pPr>
             <a:r>
@@ -2843,7 +2608,7 @@
             <a:endParaRPr lang="en-US" sz="4000" dirty="0"/>
           </a:p>
           <a:p>
-            <a:pPr indent="0" marL="0">
+            <a:pPr marL="0" indent="0">
               <a:buNone/>
             </a:pPr>
             <a:r>
@@ -2857,7 +2622,7 @@
             <a:endParaRPr lang="en-US" sz="4000" dirty="0"/>
           </a:p>
           <a:p>
-            <a:pPr indent="0" marL="0">
+            <a:pPr marL="0" indent="0">
               <a:buNone/>
             </a:pPr>
             <a:r>
@@ -2893,7 +2658,7 @@
           <a:bodyPr wrap="square" lIns="0" tIns="0" rIns="0" bIns="0" rtlCol="0" anchor="ctr"/>
           <a:lstStyle/>
           <a:p>
-            <a:pPr indent="0" marL="0">
+            <a:pPr marL="0" indent="0">
               <a:buNone/>
             </a:pPr>
             <a:r>
@@ -2911,7 +2676,7 @@
       <p:sp>
         <p:nvSpPr>
           <p:cNvPr id="7" name="Text 5">
-            <a:hlinkClick r:id="rId1" tooltip=""/>
+            <a:hlinkClick r:id="rId3"/>
           </p:cNvPr>
           <p:cNvSpPr txBox="1"/>
           <p:nvPr/>
@@ -2931,7 +2696,7 @@
           <a:bodyPr wrap="square" lIns="0" tIns="0" rIns="0" bIns="0" rtlCol="0" anchor="ctr"/>
           <a:lstStyle/>
           <a:p>
-            <a:pPr indent="0" marL="0">
+            <a:pPr marL="0" indent="0">
               <a:buNone/>
             </a:pPr>
             <a:r>
@@ -2939,7 +2704,7 @@
                 <a:solidFill>
                   <a:srgbClr val="D4824A"/>
                 </a:solidFill>
-                <a:hlinkClick r:id="rId1" invalidUrl="" action="" tgtFrame="" tooltip="" history="1" highlightClick="0" endSnd="0">
+                <a:hlinkClick r:id="rId3">
                   <a:extLst>
                     <a:ext uri="{A12FA001-AC4F-418D-AE19-62706E023703}">
                       <ahyp:hlinkClr xmlns:ahyp="http://schemas.microsoft.com/office/drawing/2018/hyperlinkcolor" val="tx"/>
@@ -2962,6 +2727,1042 @@
 </file>
 
 <file path=ppt/slides/slide10.xml><?xml version="1.0" encoding="utf-8"?>
+<p:sld xmlns:a="http://schemas.openxmlformats.org/drawingml/2006/main" xmlns:r="http://schemas.openxmlformats.org/officeDocument/2006/relationships" xmlns:p="http://schemas.openxmlformats.org/presentationml/2006/main">
+  <p:cSld name="Slide 9">
+    <p:spTree>
+      <p:nvGrpSpPr>
+        <p:cNvPr id="1" name=""/>
+        <p:cNvGrpSpPr/>
+        <p:nvPr/>
+      </p:nvGrpSpPr>
+      <p:grpSpPr>
+        <a:xfrm>
+          <a:off x="0" y="0"/>
+          <a:ext cx="0" cy="0"/>
+          <a:chOff x="0" y="0"/>
+          <a:chExt cx="0" cy="0"/>
+        </a:xfrm>
+      </p:grpSpPr>
+      <p:sp>
+        <p:nvSpPr>
+          <p:cNvPr id="2" name="Text 0"/>
+          <p:cNvSpPr txBox="1"/>
+          <p:nvPr/>
+        </p:nvSpPr>
+        <p:spPr>
+          <a:xfrm>
+            <a:off x="502920" y="201168"/>
+            <a:ext cx="8138160" cy="256032"/>
+          </a:xfrm>
+          <a:prstGeom prst="rect">
+            <a:avLst/>
+          </a:prstGeom>
+          <a:noFill/>
+          <a:ln/>
+        </p:spPr>
+        <p:txBody>
+          <a:bodyPr wrap="square" lIns="0" tIns="0" rIns="0" bIns="0" rtlCol="0" anchor="ctr"/>
+          <a:lstStyle/>
+          <a:p>
+            <a:pPr marL="0" indent="0">
+              <a:buNone/>
+            </a:pPr>
+            <a:r>
+              <a:rPr lang="en-US" sz="1000" b="1" kern="0" spc="300" dirty="0">
+                <a:solidFill>
+                  <a:srgbClr val="D4824A"/>
+                </a:solidFill>
+              </a:rPr>
+              <a:t>FUNCTION CALLING &amp; TOOL USE  ·  2 OF 3</a:t>
+            </a:r>
+            <a:endParaRPr lang="en-US" sz="1000" dirty="0"/>
+          </a:p>
+        </p:txBody>
+      </p:sp>
+      <p:sp>
+        <p:nvSpPr>
+          <p:cNvPr id="3" name="Text 1"/>
+          <p:cNvSpPr>
+            <a:spLocks noGrp="1"/>
+          </p:cNvSpPr>
+          <p:nvPr>
+            <p:ph type="title" idx="101" hasCustomPrompt="1"/>
+          </p:nvPr>
+        </p:nvSpPr>
+        <p:spPr>
+          <a:xfrm>
+            <a:off x="502920" y="457200"/>
+            <a:ext cx="8138160" cy="594360"/>
+          </a:xfrm>
+          <a:prstGeom prst="rect">
+            <a:avLst/>
+          </a:prstGeom>
+          <a:noFill/>
+          <a:ln/>
+        </p:spPr>
+        <p:txBody>
+          <a:bodyPr wrap="square" lIns="0" tIns="0" rIns="0" bIns="0" rtlCol="0" anchor="ctr"/>
+          <a:lstStyle/>
+          <a:p>
+            <a:pPr marL="0" indent="0" algn="l">
+              <a:buNone/>
+            </a:pPr>
+            <a:r>
+              <a:rPr lang="en-US" sz="2800" b="1" dirty="0">
+                <a:solidFill>
+                  <a:srgbClr val="1B2A4A"/>
+                </a:solidFill>
+              </a:rPr>
+              <a:t>Defining Tools in LangChain</a:t>
+            </a:r>
+            <a:endParaRPr lang="en-US" sz="2800" dirty="0"/>
+          </a:p>
+        </p:txBody>
+      </p:sp>
+      <p:sp>
+        <p:nvSpPr>
+          <p:cNvPr id="4" name="Shape 2"/>
+          <p:cNvSpPr/>
+          <p:nvPr/>
+        </p:nvSpPr>
+        <p:spPr>
+          <a:xfrm>
+            <a:off x="502920" y="1298448"/>
+            <a:ext cx="329184" cy="329184"/>
+          </a:xfrm>
+          <a:prstGeom prst="ellipse">
+            <a:avLst/>
+          </a:prstGeom>
+          <a:solidFill>
+            <a:srgbClr val="1B2A4A"/>
+          </a:solidFill>
+          <a:ln w="12700">
+            <a:solidFill>
+              <a:srgbClr val="1B2A4A"/>
+            </a:solidFill>
+            <a:prstDash val="solid"/>
+          </a:ln>
+        </p:spPr>
+      </p:sp>
+      <p:sp>
+        <p:nvSpPr>
+          <p:cNvPr id="5" name="Text 3"/>
+          <p:cNvSpPr txBox="1"/>
+          <p:nvPr/>
+        </p:nvSpPr>
+        <p:spPr>
+          <a:xfrm>
+            <a:off x="502920" y="1298448"/>
+            <a:ext cx="329184" cy="329184"/>
+          </a:xfrm>
+          <a:prstGeom prst="rect">
+            <a:avLst/>
+          </a:prstGeom>
+          <a:noFill/>
+          <a:ln/>
+        </p:spPr>
+        <p:txBody>
+          <a:bodyPr wrap="square" lIns="0" tIns="0" rIns="0" bIns="0" rtlCol="0" anchor="ctr"/>
+          <a:lstStyle/>
+          <a:p>
+            <a:pPr marL="0" indent="0" algn="ctr">
+              <a:buNone/>
+            </a:pPr>
+            <a:r>
+              <a:rPr lang="en-US" sz="1300" b="1" dirty="0">
+                <a:solidFill>
+                  <a:srgbClr val="FFFFFF"/>
+                </a:solidFill>
+              </a:rPr>
+              <a:t>1</a:t>
+            </a:r>
+            <a:endParaRPr lang="en-US" sz="1300" dirty="0"/>
+          </a:p>
+        </p:txBody>
+      </p:sp>
+      <p:sp>
+        <p:nvSpPr>
+          <p:cNvPr id="6" name="Text 4"/>
+          <p:cNvSpPr txBox="1"/>
+          <p:nvPr/>
+        </p:nvSpPr>
+        <p:spPr>
+          <a:xfrm>
+            <a:off x="978408" y="1243584"/>
+            <a:ext cx="3364992" cy="621792"/>
+          </a:xfrm>
+          <a:prstGeom prst="rect">
+            <a:avLst/>
+          </a:prstGeom>
+          <a:noFill/>
+          <a:ln/>
+        </p:spPr>
+        <p:txBody>
+          <a:bodyPr wrap="square" lIns="0" tIns="0" rIns="0" bIns="0" rtlCol="0" anchor="t"/>
+          <a:lstStyle/>
+          <a:p>
+            <a:pPr marL="0" indent="0">
+              <a:spcAft>
+                <a:spcPts val="200"/>
+              </a:spcAft>
+              <a:buNone/>
+            </a:pPr>
+            <a:r>
+              <a:rPr lang="en-US" sz="1500" b="1" dirty="0">
+                <a:solidFill>
+                  <a:srgbClr val="1B2A4A"/>
+                </a:solidFill>
+              </a:rPr>
+              <a:t>@tool decorator</a:t>
+            </a:r>
+            <a:endParaRPr lang="en-US" sz="1500" dirty="0"/>
+          </a:p>
+          <a:p>
+            <a:pPr marL="0" indent="0">
+              <a:spcAft>
+                <a:spcPts val="200"/>
+              </a:spcAft>
+              <a:buNone/>
+            </a:pPr>
+            <a:r>
+              <a:rPr lang="en-US" sz="1200" dirty="0">
+                <a:solidFill>
+                  <a:srgbClr val="5F6F80"/>
+                </a:solidFill>
+              </a:rPr>
+              <a:t>Simplest: docstring + type hints</a:t>
+            </a:r>
+            <a:endParaRPr lang="en-US" sz="1500" dirty="0"/>
+          </a:p>
+        </p:txBody>
+      </p:sp>
+      <p:sp>
+        <p:nvSpPr>
+          <p:cNvPr id="7" name="Shape 5"/>
+          <p:cNvSpPr/>
+          <p:nvPr/>
+        </p:nvSpPr>
+        <p:spPr>
+          <a:xfrm>
+            <a:off x="502920" y="1920240"/>
+            <a:ext cx="329184" cy="329184"/>
+          </a:xfrm>
+          <a:prstGeom prst="ellipse">
+            <a:avLst/>
+          </a:prstGeom>
+          <a:solidFill>
+            <a:srgbClr val="1B2A4A"/>
+          </a:solidFill>
+          <a:ln w="12700">
+            <a:solidFill>
+              <a:srgbClr val="1B2A4A"/>
+            </a:solidFill>
+            <a:prstDash val="solid"/>
+          </a:ln>
+        </p:spPr>
+      </p:sp>
+      <p:sp>
+        <p:nvSpPr>
+          <p:cNvPr id="8" name="Text 6"/>
+          <p:cNvSpPr txBox="1"/>
+          <p:nvPr/>
+        </p:nvSpPr>
+        <p:spPr>
+          <a:xfrm>
+            <a:off x="502920" y="1920240"/>
+            <a:ext cx="329184" cy="329184"/>
+          </a:xfrm>
+          <a:prstGeom prst="rect">
+            <a:avLst/>
+          </a:prstGeom>
+          <a:noFill/>
+          <a:ln/>
+        </p:spPr>
+        <p:txBody>
+          <a:bodyPr wrap="square" lIns="0" tIns="0" rIns="0" bIns="0" rtlCol="0" anchor="ctr"/>
+          <a:lstStyle/>
+          <a:p>
+            <a:pPr marL="0" indent="0" algn="ctr">
+              <a:buNone/>
+            </a:pPr>
+            <a:r>
+              <a:rPr lang="en-US" sz="1300" b="1" dirty="0">
+                <a:solidFill>
+                  <a:srgbClr val="FFFFFF"/>
+                </a:solidFill>
+              </a:rPr>
+              <a:t>2</a:t>
+            </a:r>
+            <a:endParaRPr lang="en-US" sz="1300" dirty="0"/>
+          </a:p>
+        </p:txBody>
+      </p:sp>
+      <p:sp>
+        <p:nvSpPr>
+          <p:cNvPr id="9" name="Text 7"/>
+          <p:cNvSpPr txBox="1"/>
+          <p:nvPr/>
+        </p:nvSpPr>
+        <p:spPr>
+          <a:xfrm>
+            <a:off x="978408" y="1865376"/>
+            <a:ext cx="3364992" cy="621792"/>
+          </a:xfrm>
+          <a:prstGeom prst="rect">
+            <a:avLst/>
+          </a:prstGeom>
+          <a:noFill/>
+          <a:ln/>
+        </p:spPr>
+        <p:txBody>
+          <a:bodyPr wrap="square" lIns="0" tIns="0" rIns="0" bIns="0" rtlCol="0" anchor="t"/>
+          <a:lstStyle/>
+          <a:p>
+            <a:pPr marL="0" indent="0">
+              <a:spcAft>
+                <a:spcPts val="200"/>
+              </a:spcAft>
+              <a:buNone/>
+            </a:pPr>
+            <a:r>
+              <a:rPr lang="en-US" sz="1500" b="1" dirty="0">
+                <a:solidFill>
+                  <a:srgbClr val="1B2A4A"/>
+                </a:solidFill>
+              </a:rPr>
+              <a:t>StructuredTool.from_function()</a:t>
+            </a:r>
+            <a:endParaRPr lang="en-US" sz="1500" dirty="0"/>
+          </a:p>
+          <a:p>
+            <a:pPr marL="0" indent="0">
+              <a:spcAft>
+                <a:spcPts val="200"/>
+              </a:spcAft>
+              <a:buNone/>
+            </a:pPr>
+            <a:r>
+              <a:rPr lang="en-US" sz="1200" dirty="0">
+                <a:solidFill>
+                  <a:srgbClr val="5F6F80"/>
+                </a:solidFill>
+              </a:rPr>
+              <a:t>Wrap a function, explicit schema</a:t>
+            </a:r>
+            <a:endParaRPr lang="en-US" sz="1500" dirty="0"/>
+          </a:p>
+        </p:txBody>
+      </p:sp>
+      <p:sp>
+        <p:nvSpPr>
+          <p:cNvPr id="10" name="Shape 8"/>
+          <p:cNvSpPr/>
+          <p:nvPr/>
+        </p:nvSpPr>
+        <p:spPr>
+          <a:xfrm>
+            <a:off x="502920" y="2542032"/>
+            <a:ext cx="329184" cy="329184"/>
+          </a:xfrm>
+          <a:prstGeom prst="ellipse">
+            <a:avLst/>
+          </a:prstGeom>
+          <a:solidFill>
+            <a:srgbClr val="1B2A4A"/>
+          </a:solidFill>
+          <a:ln w="12700">
+            <a:solidFill>
+              <a:srgbClr val="1B2A4A"/>
+            </a:solidFill>
+            <a:prstDash val="solid"/>
+          </a:ln>
+        </p:spPr>
+      </p:sp>
+      <p:sp>
+        <p:nvSpPr>
+          <p:cNvPr id="11" name="Text 9"/>
+          <p:cNvSpPr txBox="1"/>
+          <p:nvPr/>
+        </p:nvSpPr>
+        <p:spPr>
+          <a:xfrm>
+            <a:off x="502920" y="2542032"/>
+            <a:ext cx="329184" cy="329184"/>
+          </a:xfrm>
+          <a:prstGeom prst="rect">
+            <a:avLst/>
+          </a:prstGeom>
+          <a:noFill/>
+          <a:ln/>
+        </p:spPr>
+        <p:txBody>
+          <a:bodyPr wrap="square" lIns="0" tIns="0" rIns="0" bIns="0" rtlCol="0" anchor="ctr"/>
+          <a:lstStyle/>
+          <a:p>
+            <a:pPr marL="0" indent="0" algn="ctr">
+              <a:buNone/>
+            </a:pPr>
+            <a:r>
+              <a:rPr lang="en-US" sz="1300" b="1" dirty="0">
+                <a:solidFill>
+                  <a:srgbClr val="FFFFFF"/>
+                </a:solidFill>
+              </a:rPr>
+              <a:t>3</a:t>
+            </a:r>
+            <a:endParaRPr lang="en-US" sz="1300" dirty="0"/>
+          </a:p>
+        </p:txBody>
+      </p:sp>
+      <p:sp>
+        <p:nvSpPr>
+          <p:cNvPr id="12" name="Text 10"/>
+          <p:cNvSpPr txBox="1"/>
+          <p:nvPr/>
+        </p:nvSpPr>
+        <p:spPr>
+          <a:xfrm>
+            <a:off x="978408" y="2487168"/>
+            <a:ext cx="3364992" cy="621792"/>
+          </a:xfrm>
+          <a:prstGeom prst="rect">
+            <a:avLst/>
+          </a:prstGeom>
+          <a:noFill/>
+          <a:ln/>
+        </p:spPr>
+        <p:txBody>
+          <a:bodyPr wrap="square" lIns="0" tIns="0" rIns="0" bIns="0" rtlCol="0" anchor="t"/>
+          <a:lstStyle/>
+          <a:p>
+            <a:pPr marL="0" indent="0">
+              <a:spcAft>
+                <a:spcPts val="200"/>
+              </a:spcAft>
+              <a:buNone/>
+            </a:pPr>
+            <a:r>
+              <a:rPr lang="en-US" sz="1500" b="1" dirty="0">
+                <a:solidFill>
+                  <a:srgbClr val="1B2A4A"/>
+                </a:solidFill>
+              </a:rPr>
+              <a:t>BaseTool subclass</a:t>
+            </a:r>
+            <a:endParaRPr lang="en-US" sz="1500" dirty="0"/>
+          </a:p>
+          <a:p>
+            <a:pPr marL="0" indent="0">
+              <a:spcAft>
+                <a:spcPts val="200"/>
+              </a:spcAft>
+              <a:buNone/>
+            </a:pPr>
+            <a:r>
+              <a:rPr lang="en-US" sz="1200" dirty="0">
+                <a:solidFill>
+                  <a:srgbClr val="5F6F80"/>
+                </a:solidFill>
+              </a:rPr>
+              <a:t>For state, clients, async</a:t>
+            </a:r>
+            <a:endParaRPr lang="en-US" sz="1500" dirty="0"/>
+          </a:p>
+        </p:txBody>
+      </p:sp>
+      <p:sp>
+        <p:nvSpPr>
+          <p:cNvPr id="13" name="Shape 11"/>
+          <p:cNvSpPr/>
+          <p:nvPr/>
+        </p:nvSpPr>
+        <p:spPr>
+          <a:xfrm>
+            <a:off x="502920" y="3163824"/>
+            <a:ext cx="329184" cy="329184"/>
+          </a:xfrm>
+          <a:prstGeom prst="ellipse">
+            <a:avLst/>
+          </a:prstGeom>
+          <a:solidFill>
+            <a:srgbClr val="1B2A4A"/>
+          </a:solidFill>
+          <a:ln w="12700">
+            <a:solidFill>
+              <a:srgbClr val="1B2A4A"/>
+            </a:solidFill>
+            <a:prstDash val="solid"/>
+          </a:ln>
+        </p:spPr>
+      </p:sp>
+      <p:sp>
+        <p:nvSpPr>
+          <p:cNvPr id="14" name="Text 12"/>
+          <p:cNvSpPr txBox="1"/>
+          <p:nvPr/>
+        </p:nvSpPr>
+        <p:spPr>
+          <a:xfrm>
+            <a:off x="502920" y="3163824"/>
+            <a:ext cx="329184" cy="329184"/>
+          </a:xfrm>
+          <a:prstGeom prst="rect">
+            <a:avLst/>
+          </a:prstGeom>
+          <a:noFill/>
+          <a:ln/>
+        </p:spPr>
+        <p:txBody>
+          <a:bodyPr wrap="square" lIns="0" tIns="0" rIns="0" bIns="0" rtlCol="0" anchor="ctr"/>
+          <a:lstStyle/>
+          <a:p>
+            <a:pPr marL="0" indent="0" algn="ctr">
+              <a:buNone/>
+            </a:pPr>
+            <a:r>
+              <a:rPr lang="en-US" sz="1300" b="1" dirty="0">
+                <a:solidFill>
+                  <a:srgbClr val="FFFFFF"/>
+                </a:solidFill>
+              </a:rPr>
+              <a:t>4</a:t>
+            </a:r>
+            <a:endParaRPr lang="en-US" sz="1300" dirty="0"/>
+          </a:p>
+        </p:txBody>
+      </p:sp>
+      <p:sp>
+        <p:nvSpPr>
+          <p:cNvPr id="15" name="Text 13"/>
+          <p:cNvSpPr txBox="1"/>
+          <p:nvPr/>
+        </p:nvSpPr>
+        <p:spPr>
+          <a:xfrm>
+            <a:off x="978408" y="3108960"/>
+            <a:ext cx="3364992" cy="621792"/>
+          </a:xfrm>
+          <a:prstGeom prst="rect">
+            <a:avLst/>
+          </a:prstGeom>
+          <a:noFill/>
+          <a:ln/>
+        </p:spPr>
+        <p:txBody>
+          <a:bodyPr wrap="square" lIns="0" tIns="0" rIns="0" bIns="0" rtlCol="0" anchor="t"/>
+          <a:lstStyle/>
+          <a:p>
+            <a:pPr marL="0" indent="0">
+              <a:spcAft>
+                <a:spcPts val="200"/>
+              </a:spcAft>
+              <a:buNone/>
+            </a:pPr>
+            <a:r>
+              <a:rPr lang="en-US" sz="1500" b="1" dirty="0">
+                <a:solidFill>
+                  <a:srgbClr val="1B2A4A"/>
+                </a:solidFill>
+              </a:rPr>
+              <a:t>llm.bind_tools([...])</a:t>
+            </a:r>
+            <a:endParaRPr lang="en-US" sz="1500" dirty="0"/>
+          </a:p>
+          <a:p>
+            <a:pPr marL="0" indent="0">
+              <a:spcAft>
+                <a:spcPts val="200"/>
+              </a:spcAft>
+              <a:buNone/>
+            </a:pPr>
+            <a:r>
+              <a:rPr lang="en-US" sz="1200" dirty="0">
+                <a:solidFill>
+                  <a:srgbClr val="5F6F80"/>
+                </a:solidFill>
+              </a:rPr>
+              <a:t>Hand the tools to the model</a:t>
+            </a:r>
+            <a:endParaRPr lang="en-US" sz="1500" dirty="0"/>
+          </a:p>
+        </p:txBody>
+      </p:sp>
+      <p:sp>
+        <p:nvSpPr>
+          <p:cNvPr id="16" name="Shape 14"/>
+          <p:cNvSpPr/>
+          <p:nvPr/>
+        </p:nvSpPr>
+        <p:spPr>
+          <a:xfrm>
+            <a:off x="502920" y="3913632"/>
+            <a:ext cx="3840480" cy="658368"/>
+          </a:xfrm>
+          <a:prstGeom prst="roundRect">
+            <a:avLst>
+              <a:gd name="adj" fmla="val 11111"/>
+            </a:avLst>
+          </a:prstGeom>
+          <a:solidFill>
+            <a:srgbClr val="FBEFE6"/>
+          </a:solidFill>
+          <a:ln w="12700">
+            <a:solidFill>
+              <a:srgbClr val="FBEFE6"/>
+            </a:solidFill>
+            <a:prstDash val="solid"/>
+          </a:ln>
+        </p:spPr>
+      </p:sp>
+      <p:sp>
+        <p:nvSpPr>
+          <p:cNvPr id="17" name="Text 15"/>
+          <p:cNvSpPr txBox="1"/>
+          <p:nvPr/>
+        </p:nvSpPr>
+        <p:spPr>
+          <a:xfrm>
+            <a:off x="667512" y="3913632"/>
+            <a:ext cx="3511296" cy="658368"/>
+          </a:xfrm>
+          <a:prstGeom prst="rect">
+            <a:avLst/>
+          </a:prstGeom>
+          <a:noFill/>
+          <a:ln/>
+        </p:spPr>
+        <p:txBody>
+          <a:bodyPr wrap="square" lIns="0" tIns="0" rIns="0" bIns="0" rtlCol="0" anchor="ctr"/>
+          <a:lstStyle/>
+          <a:p>
+            <a:pPr marL="0" indent="0">
+              <a:buNone/>
+            </a:pPr>
+            <a:r>
+              <a:rPr lang="en-US" sz="1000" b="1" kern="0" spc="200" dirty="0">
+                <a:solidFill>
+                  <a:srgbClr val="D4824A"/>
+                </a:solidFill>
+              </a:rPr>
+              <a:t>KEY POINT  </a:t>
+            </a:r>
+            <a:r>
+              <a:rPr lang="en-US" sz="1300" dirty="0">
+                <a:solidFill>
+                  <a:srgbClr val="1B2A4A"/>
+                </a:solidFill>
+              </a:rPr>
+              <a:t>Start with @tool. The docstring is how the model knows when to use it.</a:t>
+            </a:r>
+            <a:endParaRPr lang="en-US" sz="1000" dirty="0"/>
+          </a:p>
+        </p:txBody>
+      </p:sp>
+      <p:sp>
+        <p:nvSpPr>
+          <p:cNvPr id="18" name="Shape 16"/>
+          <p:cNvSpPr/>
+          <p:nvPr/>
+        </p:nvSpPr>
+        <p:spPr>
+          <a:xfrm>
+            <a:off x="4572000" y="1188720"/>
+            <a:ext cx="4069080" cy="3383280"/>
+          </a:xfrm>
+          <a:prstGeom prst="roundRect">
+            <a:avLst>
+              <a:gd name="adj" fmla="val 2162"/>
+            </a:avLst>
+          </a:prstGeom>
+          <a:solidFill>
+            <a:srgbClr val="1B2A4A"/>
+          </a:solidFill>
+          <a:ln w="12700">
+            <a:solidFill>
+              <a:srgbClr val="1B2A4A"/>
+            </a:solidFill>
+            <a:prstDash val="solid"/>
+          </a:ln>
+        </p:spPr>
+      </p:sp>
+      <p:sp>
+        <p:nvSpPr>
+          <p:cNvPr id="19" name="Text 17"/>
+          <p:cNvSpPr txBox="1"/>
+          <p:nvPr/>
+        </p:nvSpPr>
+        <p:spPr>
+          <a:xfrm>
+            <a:off x="4773168" y="1316736"/>
+            <a:ext cx="3666744" cy="292608"/>
+          </a:xfrm>
+          <a:prstGeom prst="rect">
+            <a:avLst/>
+          </a:prstGeom>
+          <a:noFill/>
+          <a:ln/>
+        </p:spPr>
+        <p:txBody>
+          <a:bodyPr wrap="square" lIns="0" tIns="0" rIns="0" bIns="0" rtlCol="0" anchor="ctr"/>
+          <a:lstStyle/>
+          <a:p>
+            <a:pPr marL="0" indent="0">
+              <a:buNone/>
+            </a:pPr>
+            <a:r>
+              <a:rPr lang="en-US" sz="900" b="1" kern="0" spc="200" dirty="0">
+                <a:solidFill>
+                  <a:srgbClr val="D4824A"/>
+                </a:solidFill>
+              </a:rPr>
+              <a:t>EXAMPLE  </a:t>
+            </a:r>
+            <a:r>
+              <a:rPr lang="en-US" sz="1200" b="1" dirty="0">
+                <a:solidFill>
+                  <a:srgbClr val="FFFFFF"/>
+                </a:solidFill>
+              </a:rPr>
+              <a:t>Defining tools (demo 07)</a:t>
+            </a:r>
+            <a:endParaRPr lang="en-US" sz="900" dirty="0"/>
+          </a:p>
+        </p:txBody>
+      </p:sp>
+      <p:sp>
+        <p:nvSpPr>
+          <p:cNvPr id="20" name="Text 18"/>
+          <p:cNvSpPr txBox="1"/>
+          <p:nvPr/>
+        </p:nvSpPr>
+        <p:spPr>
+          <a:xfrm>
+            <a:off x="4773168" y="1700784"/>
+            <a:ext cx="3703320" cy="2743200"/>
+          </a:xfrm>
+          <a:prstGeom prst="rect">
+            <a:avLst/>
+          </a:prstGeom>
+          <a:noFill/>
+          <a:ln/>
+        </p:spPr>
+        <p:txBody>
+          <a:bodyPr wrap="square" lIns="0" tIns="0" rIns="0" bIns="0" rtlCol="0" anchor="t"/>
+          <a:lstStyle/>
+          <a:p>
+            <a:pPr marL="0" indent="0">
+              <a:lnSpc>
+                <a:spcPct val="100000"/>
+              </a:lnSpc>
+              <a:buNone/>
+            </a:pPr>
+            <a:r>
+              <a:rPr lang="en-US" sz="1050" dirty="0">
+                <a:solidFill>
+                  <a:srgbClr val="E6EDF5"/>
+                </a:solidFill>
+                <a:latin typeface="Consolas" pitchFamily="34" charset="0"/>
+                <a:ea typeface="Consolas" pitchFamily="34" charset="-122"/>
+                <a:cs typeface="Consolas" pitchFamily="34" charset="-120"/>
+              </a:rPr>
+              <a:t># 1. @tool decorator</a:t>
+            </a:r>
+            <a:endParaRPr lang="en-US" sz="1050" dirty="0"/>
+          </a:p>
+          <a:p>
+            <a:pPr marL="0" indent="0">
+              <a:lnSpc>
+                <a:spcPct val="100000"/>
+              </a:lnSpc>
+              <a:buNone/>
+            </a:pPr>
+            <a:r>
+              <a:rPr lang="en-US" sz="1050" dirty="0">
+                <a:solidFill>
+                  <a:srgbClr val="E6EDF5"/>
+                </a:solidFill>
+                <a:latin typeface="Consolas" pitchFamily="34" charset="0"/>
+                <a:ea typeface="Consolas" pitchFamily="34" charset="-122"/>
+                <a:cs typeface="Consolas" pitchFamily="34" charset="-120"/>
+              </a:rPr>
+              <a:t>@tool</a:t>
+            </a:r>
+            <a:endParaRPr lang="en-US" sz="1050" dirty="0"/>
+          </a:p>
+          <a:p>
+            <a:pPr marL="0" indent="0">
+              <a:lnSpc>
+                <a:spcPct val="100000"/>
+              </a:lnSpc>
+              <a:buNone/>
+            </a:pPr>
+            <a:r>
+              <a:rPr lang="en-US" sz="1050" dirty="0">
+                <a:solidFill>
+                  <a:srgbClr val="E6EDF5"/>
+                </a:solidFill>
+                <a:latin typeface="Consolas" pitchFamily="34" charset="0"/>
+                <a:ea typeface="Consolas" pitchFamily="34" charset="-122"/>
+                <a:cs typeface="Consolas" pitchFamily="34" charset="-120"/>
+              </a:rPr>
+              <a:t>def get_stock_price(ticker: str) -&gt; str:</a:t>
+            </a:r>
+            <a:endParaRPr lang="en-US" sz="1050" dirty="0"/>
+          </a:p>
+          <a:p>
+            <a:pPr marL="0" indent="0">
+              <a:lnSpc>
+                <a:spcPct val="100000"/>
+              </a:lnSpc>
+              <a:buNone/>
+            </a:pPr>
+            <a:r>
+              <a:rPr lang="en-US" sz="1050" dirty="0">
+                <a:solidFill>
+                  <a:srgbClr val="E6EDF5"/>
+                </a:solidFill>
+                <a:latin typeface="Consolas" pitchFamily="34" charset="0"/>
+                <a:ea typeface="Consolas" pitchFamily="34" charset="-122"/>
+                <a:cs typeface="Consolas" pitchFamily="34" charset="-120"/>
+              </a:rPr>
+              <a:t>    """Price for a ticker like AAPL."""</a:t>
+            </a:r>
+            <a:endParaRPr lang="en-US" sz="1050" dirty="0"/>
+          </a:p>
+          <a:p>
+            <a:pPr marL="0" indent="0">
+              <a:lnSpc>
+                <a:spcPct val="100000"/>
+              </a:lnSpc>
+              <a:buNone/>
+            </a:pPr>
+            <a:r>
+              <a:rPr lang="en-US" sz="1050" dirty="0">
+                <a:solidFill>
+                  <a:srgbClr val="E6EDF5"/>
+                </a:solidFill>
+                <a:latin typeface="Consolas" pitchFamily="34" charset="0"/>
+                <a:ea typeface="Consolas" pitchFamily="34" charset="-122"/>
+                <a:cs typeface="Consolas" pitchFamily="34" charset="-120"/>
+              </a:rPr>
+              <a:t>    return fetch_price(ticker)</a:t>
+            </a:r>
+            <a:endParaRPr lang="en-US" sz="1050" dirty="0"/>
+          </a:p>
+          <a:p>
+            <a:pPr marL="0" indent="0">
+              <a:lnSpc>
+                <a:spcPct val="100000"/>
+              </a:lnSpc>
+              <a:buNone/>
+            </a:pPr>
+            <a:endParaRPr lang="en-US" sz="1050" dirty="0"/>
+          </a:p>
+          <a:p>
+            <a:pPr marL="0" indent="0">
+              <a:lnSpc>
+                <a:spcPct val="100000"/>
+              </a:lnSpc>
+              <a:buNone/>
+            </a:pPr>
+            <a:r>
+              <a:rPr lang="en-US" sz="1050" dirty="0">
+                <a:solidFill>
+                  <a:srgbClr val="E6EDF5"/>
+                </a:solidFill>
+                <a:latin typeface="Consolas" pitchFamily="34" charset="0"/>
+                <a:ea typeface="Consolas" pitchFamily="34" charset="-122"/>
+                <a:cs typeface="Consolas" pitchFamily="34" charset="-120"/>
+              </a:rPr>
+              <a:t># 2. StructuredTool: explicit schema</a:t>
+            </a:r>
+            <a:endParaRPr lang="en-US" sz="1050" dirty="0"/>
+          </a:p>
+          <a:p>
+            <a:pPr marL="0" indent="0">
+              <a:lnSpc>
+                <a:spcPct val="100000"/>
+              </a:lnSpc>
+              <a:buNone/>
+            </a:pPr>
+            <a:r>
+              <a:rPr lang="en-US" sz="1050" dirty="0">
+                <a:solidFill>
+                  <a:srgbClr val="E6EDF5"/>
+                </a:solidFill>
+                <a:latin typeface="Consolas" pitchFamily="34" charset="0"/>
+                <a:ea typeface="Consolas" pitchFamily="34" charset="-122"/>
+                <a:cs typeface="Consolas" pitchFamily="34" charset="-120"/>
+              </a:rPr>
+              <a:t>search = StructuredTool.from_function(</a:t>
+            </a:r>
+            <a:endParaRPr lang="en-US" sz="1050" dirty="0"/>
+          </a:p>
+          <a:p>
+            <a:pPr marL="0" indent="0">
+              <a:lnSpc>
+                <a:spcPct val="100000"/>
+              </a:lnSpc>
+              <a:buNone/>
+            </a:pPr>
+            <a:r>
+              <a:rPr lang="en-US" sz="1050" dirty="0">
+                <a:solidFill>
+                  <a:srgbClr val="E6EDF5"/>
+                </a:solidFill>
+                <a:latin typeface="Consolas" pitchFamily="34" charset="0"/>
+                <a:ea typeface="Consolas" pitchFamily="34" charset="-122"/>
+                <a:cs typeface="Consolas" pitchFamily="34" charset="-120"/>
+              </a:rPr>
+              <a:t>    func=run_search, name="web_search",</a:t>
+            </a:r>
+            <a:endParaRPr lang="en-US" sz="1050" dirty="0"/>
+          </a:p>
+          <a:p>
+            <a:pPr marL="0" indent="0">
+              <a:lnSpc>
+                <a:spcPct val="100000"/>
+              </a:lnSpc>
+              <a:buNone/>
+            </a:pPr>
+            <a:r>
+              <a:rPr lang="en-US" sz="1050" dirty="0">
+                <a:solidFill>
+                  <a:srgbClr val="E6EDF5"/>
+                </a:solidFill>
+                <a:latin typeface="Consolas" pitchFamily="34" charset="0"/>
+                <a:ea typeface="Consolas" pitchFamily="34" charset="-122"/>
+                <a:cs typeface="Consolas" pitchFamily="34" charset="-120"/>
+              </a:rPr>
+              <a:t>    args_schema=SearchArgs)</a:t>
+            </a:r>
+            <a:endParaRPr lang="en-US" sz="1050" dirty="0"/>
+          </a:p>
+          <a:p>
+            <a:pPr marL="0" indent="0">
+              <a:lnSpc>
+                <a:spcPct val="100000"/>
+              </a:lnSpc>
+              <a:buNone/>
+            </a:pPr>
+            <a:endParaRPr lang="en-US" sz="1050" dirty="0"/>
+          </a:p>
+          <a:p>
+            <a:pPr marL="0" indent="0">
+              <a:lnSpc>
+                <a:spcPct val="100000"/>
+              </a:lnSpc>
+              <a:buNone/>
+            </a:pPr>
+            <a:r>
+              <a:rPr lang="en-US" sz="1050" dirty="0">
+                <a:solidFill>
+                  <a:srgbClr val="E6EDF5"/>
+                </a:solidFill>
+                <a:latin typeface="Consolas" pitchFamily="34" charset="0"/>
+                <a:ea typeface="Consolas" pitchFamily="34" charset="-122"/>
+                <a:cs typeface="Consolas" pitchFamily="34" charset="-120"/>
+              </a:rPr>
+              <a:t># Bind tools to the model</a:t>
+            </a:r>
+            <a:endParaRPr lang="en-US" sz="1050" dirty="0"/>
+          </a:p>
+          <a:p>
+            <a:pPr marL="0" indent="0">
+              <a:lnSpc>
+                <a:spcPct val="100000"/>
+              </a:lnSpc>
+              <a:buNone/>
+            </a:pPr>
+            <a:r>
+              <a:rPr lang="en-US" sz="1050" dirty="0">
+                <a:solidFill>
+                  <a:srgbClr val="E6EDF5"/>
+                </a:solidFill>
+                <a:latin typeface="Consolas" pitchFamily="34" charset="0"/>
+                <a:ea typeface="Consolas" pitchFamily="34" charset="-122"/>
+                <a:cs typeface="Consolas" pitchFamily="34" charset="-120"/>
+              </a:rPr>
+              <a:t>llm_tools = llm.bind_tools(</a:t>
+            </a:r>
+            <a:endParaRPr lang="en-US" sz="1050" dirty="0"/>
+          </a:p>
+          <a:p>
+            <a:pPr marL="0" indent="0">
+              <a:lnSpc>
+                <a:spcPct val="100000"/>
+              </a:lnSpc>
+              <a:buNone/>
+            </a:pPr>
+            <a:r>
+              <a:rPr lang="en-US" sz="1050" dirty="0">
+                <a:solidFill>
+                  <a:srgbClr val="E6EDF5"/>
+                </a:solidFill>
+                <a:latin typeface="Consolas" pitchFamily="34" charset="0"/>
+                <a:ea typeface="Consolas" pitchFamily="34" charset="-122"/>
+                <a:cs typeface="Consolas" pitchFamily="34" charset="-120"/>
+              </a:rPr>
+              <a:t>    [get_stock_price, search])</a:t>
+            </a:r>
+            <a:endParaRPr lang="en-US" sz="1050" dirty="0"/>
+          </a:p>
+        </p:txBody>
+      </p:sp>
+      <p:sp>
+        <p:nvSpPr>
+          <p:cNvPr id="25" name="Slide Number Placeholder 0"/>
+          <p:cNvSpPr>
+            <a:spLocks noGrp="1"/>
+          </p:cNvSpPr>
+          <p:nvPr>
+            <p:ph type="sldNum" sz="quarter" idx="4294967295"/>
+          </p:nvPr>
+        </p:nvSpPr>
+        <p:spPr>
+          <a:xfrm>
+            <a:off x="8229600" y="4800600"/>
+            <a:ext cx="411480" cy="228600"/>
+          </a:xfrm>
+          <a:prstGeom prst="rect">
+            <a:avLst/>
+          </a:prstGeom>
+          <a:extLst>
+            <a:ext uri="{C572A759-6A51-4108-AA02-DFA0A04FC94B}">
+              <ma14:wrappingTextBoxFlag xmlns:ma14="http://schemas.microsoft.com/office/mac/drawingml/2011/main" xmlns="" val="0"/>
+            </a:ext>
+          </a:extLst>
+        </p:spPr>
+        <p:txBody>
+          <a:bodyPr/>
+          <a:lstStyle>
+            <a:lvl1pPr>
+              <a:defRPr sz="900">
+                <a:solidFill>
+                  <a:srgbClr val="A0B0C0"/>
+                </a:solidFill>
+              </a:defRPr>
+            </a:lvl1pPr>
+          </a:lstStyle>
+          <a:p>
+            <a:pPr algn="r"/>
+            <a:fld id="{F7021451-1387-4CA6-816F-3879F97B5CBC}" type="slidenum">
+              <a:rPr lang="en-US" b="0"/>
+              <a:t>10</a:t>
+            </a:fld>
+            <a:endParaRPr lang="en-US"/>
+          </a:p>
+        </p:txBody>
+      </p:sp>
+    </p:spTree>
+  </p:cSld>
+  <p:clrMapOvr>
+    <a:masterClrMapping/>
+  </p:clrMapOvr>
+</p:sld>
+</file>
+
+<file path=ppt/slides/slide11.xml><?xml version="1.0" encoding="utf-8"?>
 <p:sld xmlns:a="http://schemas.openxmlformats.org/drawingml/2006/main" xmlns:r="http://schemas.openxmlformats.org/officeDocument/2006/relationships" xmlns:p="http://schemas.openxmlformats.org/presentationml/2006/main">
   <p:cSld name="Slide 10">
     <p:spTree>
@@ -2999,11 +3800,11 @@
           <a:bodyPr wrap="square" lIns="0" tIns="0" rIns="0" bIns="0" rtlCol="0" anchor="ctr"/>
           <a:lstStyle/>
           <a:p>
-            <a:pPr indent="0" marL="0">
-              <a:buNone/>
-            </a:pPr>
-            <a:r>
-              <a:rPr lang="en-US" sz="1000" b="1" spc="300" kern="0" dirty="0">
+            <a:pPr marL="0" indent="0">
+              <a:buNone/>
+            </a:pPr>
+            <a:r>
+              <a:rPr lang="en-US" sz="1000" b="1" kern="0" spc="300" dirty="0">
                 <a:solidFill>
                   <a:srgbClr val="D4824A"/>
                 </a:solidFill>
@@ -3017,9 +3818,11 @@
       <p:sp>
         <p:nvSpPr>
           <p:cNvPr id="3" name="Text 1"/>
-          <p:cNvSpPr/>
+          <p:cNvSpPr>
+            <a:spLocks noGrp="1"/>
+          </p:cNvSpPr>
           <p:nvPr>
-            <p:ph idx="101" type="title" hasCustomPrompt="1"/>
+            <p:ph type="title" idx="101" hasCustomPrompt="1"/>
           </p:nvPr>
         </p:nvSpPr>
         <p:spPr>
@@ -3037,7 +3840,7 @@
           <a:bodyPr wrap="square" lIns="0" tIns="0" rIns="0" bIns="0" rtlCol="0" anchor="ctr"/>
           <a:lstStyle/>
           <a:p>
-            <a:pPr algn="l" indent="0" marL="0">
+            <a:pPr marL="0" indent="0" algn="l">
               <a:buNone/>
             </a:pPr>
             <a:r>
@@ -3098,7 +3901,7 @@
           <a:bodyPr wrap="square" lIns="0" tIns="0" rIns="0" bIns="0" rtlCol="0" anchor="ctr"/>
           <a:lstStyle/>
           <a:p>
-            <a:pPr algn="ctr" indent="0" marL="0">
+            <a:pPr marL="0" indent="0" algn="ctr">
               <a:buNone/>
             </a:pPr>
             <a:r>
@@ -3134,7 +3937,7 @@
           <a:bodyPr wrap="square" lIns="0" tIns="0" rIns="0" bIns="0" rtlCol="0" anchor="t"/>
           <a:lstStyle/>
           <a:p>
-            <a:pPr indent="0" marL="0">
+            <a:pPr marL="0" indent="0">
               <a:spcAft>
                 <a:spcPts val="200"/>
               </a:spcAft>
@@ -3151,7 +3954,7 @@
             <a:endParaRPr lang="en-US" sz="1500" dirty="0"/>
           </a:p>
           <a:p>
-            <a:pPr indent="0" marL="0">
+            <a:pPr marL="0" indent="0">
               <a:spcAft>
                 <a:spcPts val="200"/>
               </a:spcAft>
@@ -3215,7 +4018,7 @@
           <a:bodyPr wrap="square" lIns="0" tIns="0" rIns="0" bIns="0" rtlCol="0" anchor="ctr"/>
           <a:lstStyle/>
           <a:p>
-            <a:pPr algn="ctr" indent="0" marL="0">
+            <a:pPr marL="0" indent="0" algn="ctr">
               <a:buNone/>
             </a:pPr>
             <a:r>
@@ -3251,7 +4054,7 @@
           <a:bodyPr wrap="square" lIns="0" tIns="0" rIns="0" bIns="0" rtlCol="0" anchor="t"/>
           <a:lstStyle/>
           <a:p>
-            <a:pPr indent="0" marL="0">
+            <a:pPr marL="0" indent="0">
               <a:spcAft>
                 <a:spcPts val="200"/>
               </a:spcAft>
@@ -3268,7 +4071,7 @@
             <a:endParaRPr lang="en-US" sz="1500" dirty="0"/>
           </a:p>
           <a:p>
-            <a:pPr indent="0" marL="0">
+            <a:pPr marL="0" indent="0">
               <a:spcAft>
                 <a:spcPts val="200"/>
               </a:spcAft>
@@ -3332,7 +4135,7 @@
           <a:bodyPr wrap="square" lIns="0" tIns="0" rIns="0" bIns="0" rtlCol="0" anchor="ctr"/>
           <a:lstStyle/>
           <a:p>
-            <a:pPr algn="ctr" indent="0" marL="0">
+            <a:pPr marL="0" indent="0" algn="ctr">
               <a:buNone/>
             </a:pPr>
             <a:r>
@@ -3368,7 +4171,7 @@
           <a:bodyPr wrap="square" lIns="0" tIns="0" rIns="0" bIns="0" rtlCol="0" anchor="t"/>
           <a:lstStyle/>
           <a:p>
-            <a:pPr indent="0" marL="0">
+            <a:pPr marL="0" indent="0">
               <a:spcAft>
                 <a:spcPts val="200"/>
               </a:spcAft>
@@ -3385,7 +4188,7 @@
             <a:endParaRPr lang="en-US" sz="1500" dirty="0"/>
           </a:p>
           <a:p>
-            <a:pPr indent="0" marL="0">
+            <a:pPr marL="0" indent="0">
               <a:spcAft>
                 <a:spcPts val="200"/>
               </a:spcAft>
@@ -3449,7 +4252,7 @@
           <a:bodyPr wrap="square" lIns="0" tIns="0" rIns="0" bIns="0" rtlCol="0" anchor="ctr"/>
           <a:lstStyle/>
           <a:p>
-            <a:pPr algn="ctr" indent="0" marL="0">
+            <a:pPr marL="0" indent="0" algn="ctr">
               <a:buNone/>
             </a:pPr>
             <a:r>
@@ -3485,7 +4288,7 @@
           <a:bodyPr wrap="square" lIns="0" tIns="0" rIns="0" bIns="0" rtlCol="0" anchor="t"/>
           <a:lstStyle/>
           <a:p>
-            <a:pPr indent="0" marL="0">
+            <a:pPr marL="0" indent="0">
               <a:spcAft>
                 <a:spcPts val="200"/>
               </a:spcAft>
@@ -3502,7 +4305,7 @@
             <a:endParaRPr lang="en-US" sz="1500" dirty="0"/>
           </a:p>
           <a:p>
-            <a:pPr indent="0" marL="0">
+            <a:pPr marL="0" indent="0">
               <a:spcAft>
                 <a:spcPts val="200"/>
               </a:spcAft>
@@ -3568,20 +4371,17 @@
           <a:bodyPr wrap="square" lIns="0" tIns="0" rIns="0" bIns="0" rtlCol="0" anchor="ctr"/>
           <a:lstStyle/>
           <a:p>
-            <a:pPr indent="0" marL="0">
-              <a:buNone/>
-            </a:pPr>
-            <a:r>
-              <a:rPr lang="en-US" sz="1000" b="1" spc="200" kern="0" dirty="0">
+            <a:pPr marL="0" indent="0">
+              <a:buNone/>
+            </a:pPr>
+            <a:r>
+              <a:rPr lang="en-US" sz="1000" b="1" kern="0" spc="200" dirty="0">
                 <a:solidFill>
                   <a:srgbClr val="D4824A"/>
                 </a:solidFill>
               </a:rPr>
               <a:t>KEY POINT  </a:t>
             </a:r>
-            <a:pPr indent="0" marL="0">
-              <a:buNone/>
-            </a:pPr>
             <a:r>
               <a:rPr lang="en-US" sz="1300" dirty="0">
                 <a:solidFill>
@@ -3642,7 +4442,7 @@
           <a:bodyPr wrap="square" lIns="0" tIns="0" rIns="0" bIns="0" rtlCol="0" anchor="ctr"/>
           <a:lstStyle/>
           <a:p>
-            <a:pPr algn="ctr" indent="0" marL="0">
+            <a:pPr marL="0" indent="0" algn="ctr">
               <a:spcAft>
                 <a:spcPts val="400"/>
               </a:spcAft>
@@ -3732,7 +4532,7 @@
           <a:bodyPr wrap="square" lIns="0" tIns="0" rIns="0" bIns="0" rtlCol="0" anchor="ctr"/>
           <a:lstStyle/>
           <a:p>
-            <a:pPr algn="ctr" indent="0" marL="0">
+            <a:pPr marL="0" indent="0" algn="ctr">
               <a:spcAft>
                 <a:spcPts val="400"/>
               </a:spcAft>
@@ -3822,7 +4622,7 @@
           <a:bodyPr wrap="square" lIns="0" tIns="0" rIns="0" bIns="0" rtlCol="0" anchor="ctr"/>
           <a:lstStyle/>
           <a:p>
-            <a:pPr algn="ctr" indent="0" marL="0">
+            <a:pPr marL="0" indent="0" algn="ctr">
               <a:spcAft>
                 <a:spcPts val="400"/>
               </a:spcAft>
@@ -3839,7 +4639,7 @@
             <a:endParaRPr lang="en-US" sz="1400" dirty="0"/>
           </a:p>
           <a:p>
-            <a:pPr algn="ctr" indent="0" marL="0">
+            <a:pPr marL="0" indent="0" algn="ctr">
               <a:spcAft>
                 <a:spcPts val="400"/>
               </a:spcAft>
@@ -3929,7 +4729,7 @@
           <a:bodyPr wrap="square" lIns="0" tIns="0" rIns="0" bIns="0" rtlCol="0" anchor="ctr"/>
           <a:lstStyle/>
           <a:p>
-            <a:pPr algn="ctr" indent="0" marL="0">
+            <a:pPr marL="0" indent="0" algn="ctr">
               <a:spcAft>
                 <a:spcPts val="400"/>
               </a:spcAft>
@@ -3946,7 +4746,7 @@
             <a:endParaRPr lang="en-US" sz="1400" dirty="0"/>
           </a:p>
           <a:p>
-            <a:pPr algn="ctr" indent="0" marL="0">
+            <a:pPr marL="0" indent="0" algn="ctr">
               <a:spcAft>
                 <a:spcPts val="400"/>
               </a:spcAft>
@@ -4036,7 +4836,7 @@
           <a:bodyPr wrap="square" lIns="0" tIns="0" rIns="0" bIns="0" rtlCol="0" anchor="ctr"/>
           <a:lstStyle/>
           <a:p>
-            <a:pPr algn="ctr" indent="0" marL="0">
+            <a:pPr marL="0" indent="0" algn="ctr">
               <a:spcAft>
                 <a:spcPts val="400"/>
               </a:spcAft>
@@ -4053,7 +4853,7 @@
             <a:endParaRPr lang="en-US" sz="1400" dirty="0"/>
           </a:p>
           <a:p>
-            <a:pPr algn="ctr" indent="0" marL="0">
+            <a:pPr marL="0" indent="0" algn="ctr">
               <a:spcAft>
                 <a:spcPts val="400"/>
               </a:spcAft>
@@ -4092,7 +4892,7 @@
           <a:bodyPr wrap="square" lIns="0" tIns="0" rIns="0" bIns="0" rtlCol="0" anchor="ctr"/>
           <a:lstStyle/>
           <a:p>
-            <a:pPr algn="ctr" indent="0" marL="0">
+            <a:pPr marL="0" indent="0" algn="ctr">
               <a:buNone/>
             </a:pPr>
             <a:r>
@@ -4109,7 +4909,7 @@
       </p:sp>
       <p:sp>
         <p:nvSpPr>
-          <p:cNvPr id="25" name="Slide Number Placeholder 0"/>
+          <p:cNvPr id="33" name="Slide Number Placeholder 0"/>
           <p:cNvSpPr>
             <a:spLocks noGrp="1"/>
           </p:cNvSpPr>
@@ -4127,7 +4927,7 @@
           </a:prstGeom>
           <a:extLst>
             <a:ext uri="{C572A759-6A51-4108-AA02-DFA0A04FC94B}">
-              <ma14:wrappingTextBoxFlag xmlns:ma14="http://schemas.microsoft.com/office/mac/drawingml/2011/main" val="0"/>
+              <ma14:wrappingTextBoxFlag xmlns:ma14="http://schemas.microsoft.com/office/mac/drawingml/2011/main" xmlns="" val="0"/>
             </a:ext>
           </a:extLst>
         </p:spPr>
@@ -4145,8 +4945,8 @@
           <a:p>
             <a:pPr algn="r"/>
             <a:fld id="{F7021451-1387-4CA6-816F-3879F97B5CBC}" type="slidenum">
-              <a:rPr b="0" lang="en-US"/>
-              <a:t>10</a:t>
+              <a:rPr lang="en-US" b="0"/>
+              <a:t>11</a:t>
             </a:fld>
             <a:endParaRPr lang="en-US"/>
           </a:p>
@@ -4160,7 +4960,7 @@
 </p:sld>
 </file>
 
-<file path=ppt/slides/slide11.xml><?xml version="1.0" encoding="utf-8"?>
+<file path=ppt/slides/slide12.xml><?xml version="1.0" encoding="utf-8"?>
 <p:sld xmlns:a="http://schemas.openxmlformats.org/drawingml/2006/main" xmlns:r="http://schemas.openxmlformats.org/officeDocument/2006/relationships" xmlns:p="http://schemas.openxmlformats.org/presentationml/2006/main">
   <p:cSld name="Slide 11">
     <p:spTree>
@@ -4198,11 +4998,11 @@
           <a:bodyPr wrap="square" lIns="0" tIns="0" rIns="0" bIns="0" rtlCol="0" anchor="ctr"/>
           <a:lstStyle/>
           <a:p>
-            <a:pPr indent="0" marL="0">
-              <a:buNone/>
-            </a:pPr>
-            <a:r>
-              <a:rPr lang="en-US" sz="1000" b="1" spc="300" kern="0" dirty="0">
+            <a:pPr marL="0" indent="0">
+              <a:buNone/>
+            </a:pPr>
+            <a:r>
+              <a:rPr lang="en-US" sz="1000" b="1" kern="0" spc="300" dirty="0">
                 <a:solidFill>
                   <a:srgbClr val="D4824A"/>
                 </a:solidFill>
@@ -4216,9 +5016,11 @@
       <p:sp>
         <p:nvSpPr>
           <p:cNvPr id="3" name="Text 1"/>
-          <p:cNvSpPr/>
+          <p:cNvSpPr>
+            <a:spLocks noGrp="1"/>
+          </p:cNvSpPr>
           <p:nvPr>
-            <p:ph idx="101" type="title" hasCustomPrompt="1"/>
+            <p:ph type="title" idx="101" hasCustomPrompt="1"/>
           </p:nvPr>
         </p:nvSpPr>
         <p:spPr>
@@ -4236,7 +5038,7 @@
           <a:bodyPr wrap="square" lIns="0" tIns="0" rIns="0" bIns="0" rtlCol="0" anchor="ctr"/>
           <a:lstStyle/>
           <a:p>
-            <a:pPr algn="l" indent="0" marL="0">
+            <a:pPr marL="0" indent="0" algn="l">
               <a:buNone/>
             </a:pPr>
             <a:r>
@@ -4297,7 +5099,7 @@
           <a:bodyPr wrap="square" lIns="0" tIns="0" rIns="0" bIns="0" rtlCol="0" anchor="ctr"/>
           <a:lstStyle/>
           <a:p>
-            <a:pPr algn="ctr" indent="0" marL="0">
+            <a:pPr marL="0" indent="0" algn="ctr">
               <a:buNone/>
             </a:pPr>
             <a:r>
@@ -4333,7 +5135,7 @@
           <a:bodyPr wrap="square" lIns="0" tIns="0" rIns="0" bIns="0" rtlCol="0" anchor="t"/>
           <a:lstStyle/>
           <a:p>
-            <a:pPr indent="0" marL="0">
+            <a:pPr marL="0" indent="0">
               <a:spcAft>
                 <a:spcPts val="200"/>
               </a:spcAft>
@@ -4350,7 +5152,7 @@
             <a:endParaRPr lang="en-US" sz="1500" dirty="0"/>
           </a:p>
           <a:p>
-            <a:pPr indent="0" marL="0">
+            <a:pPr marL="0" indent="0">
               <a:spcAft>
                 <a:spcPts val="200"/>
               </a:spcAft>
@@ -4414,7 +5216,7 @@
           <a:bodyPr wrap="square" lIns="0" tIns="0" rIns="0" bIns="0" rtlCol="0" anchor="ctr"/>
           <a:lstStyle/>
           <a:p>
-            <a:pPr algn="ctr" indent="0" marL="0">
+            <a:pPr marL="0" indent="0" algn="ctr">
               <a:buNone/>
             </a:pPr>
             <a:r>
@@ -4450,7 +5252,7 @@
           <a:bodyPr wrap="square" lIns="0" tIns="0" rIns="0" bIns="0" rtlCol="0" anchor="t"/>
           <a:lstStyle/>
           <a:p>
-            <a:pPr indent="0" marL="0">
+            <a:pPr marL="0" indent="0">
               <a:spcAft>
                 <a:spcPts val="200"/>
               </a:spcAft>
@@ -4467,7 +5269,7 @@
             <a:endParaRPr lang="en-US" sz="1500" dirty="0"/>
           </a:p>
           <a:p>
-            <a:pPr indent="0" marL="0">
+            <a:pPr marL="0" indent="0">
               <a:spcAft>
                 <a:spcPts val="200"/>
               </a:spcAft>
@@ -4531,7 +5333,7 @@
           <a:bodyPr wrap="square" lIns="0" tIns="0" rIns="0" bIns="0" rtlCol="0" anchor="ctr"/>
           <a:lstStyle/>
           <a:p>
-            <a:pPr algn="ctr" indent="0" marL="0">
+            <a:pPr marL="0" indent="0" algn="ctr">
               <a:buNone/>
             </a:pPr>
             <a:r>
@@ -4567,7 +5369,7 @@
           <a:bodyPr wrap="square" lIns="0" tIns="0" rIns="0" bIns="0" rtlCol="0" anchor="t"/>
           <a:lstStyle/>
           <a:p>
-            <a:pPr indent="0" marL="0">
+            <a:pPr marL="0" indent="0">
               <a:spcAft>
                 <a:spcPts val="200"/>
               </a:spcAft>
@@ -4584,7 +5386,7 @@
             <a:endParaRPr lang="en-US" sz="1500" dirty="0"/>
           </a:p>
           <a:p>
-            <a:pPr indent="0" marL="0">
+            <a:pPr marL="0" indent="0">
               <a:spcAft>
                 <a:spcPts val="200"/>
               </a:spcAft>
@@ -4648,7 +5450,7 @@
           <a:bodyPr wrap="square" lIns="0" tIns="0" rIns="0" bIns="0" rtlCol="0" anchor="ctr"/>
           <a:lstStyle/>
           <a:p>
-            <a:pPr algn="ctr" indent="0" marL="0">
+            <a:pPr marL="0" indent="0" algn="ctr">
               <a:buNone/>
             </a:pPr>
             <a:r>
@@ -4684,7 +5486,7 @@
           <a:bodyPr wrap="square" lIns="0" tIns="0" rIns="0" bIns="0" rtlCol="0" anchor="t"/>
           <a:lstStyle/>
           <a:p>
-            <a:pPr indent="0" marL="0">
+            <a:pPr marL="0" indent="0">
               <a:spcAft>
                 <a:spcPts val="200"/>
               </a:spcAft>
@@ -4701,7 +5503,7 @@
             <a:endParaRPr lang="en-US" sz="1500" dirty="0"/>
           </a:p>
           <a:p>
-            <a:pPr indent="0" marL="0">
+            <a:pPr marL="0" indent="0">
               <a:spcAft>
                 <a:spcPts val="200"/>
               </a:spcAft>
@@ -4767,20 +5569,17 @@
           <a:bodyPr wrap="square" lIns="0" tIns="0" rIns="0" bIns="0" rtlCol="0" anchor="ctr"/>
           <a:lstStyle/>
           <a:p>
-            <a:pPr indent="0" marL="0">
-              <a:buNone/>
-            </a:pPr>
-            <a:r>
-              <a:rPr lang="en-US" sz="1000" b="1" spc="200" kern="0" dirty="0">
+            <a:pPr marL="0" indent="0">
+              <a:buNone/>
+            </a:pPr>
+            <a:r>
+              <a:rPr lang="en-US" sz="1000" b="1" kern="0" spc="200" dirty="0">
                 <a:solidFill>
                   <a:srgbClr val="D4824A"/>
                 </a:solidFill>
               </a:rPr>
               <a:t>KEY POINT  </a:t>
             </a:r>
-            <a:pPr indent="0" marL="0">
-              <a:buNone/>
-            </a:pPr>
             <a:r>
               <a:rPr lang="en-US" sz="1300" dirty="0">
                 <a:solidFill>
@@ -4841,20 +5640,17 @@
           <a:bodyPr wrap="square" lIns="0" tIns="0" rIns="0" bIns="0" rtlCol="0" anchor="ctr"/>
           <a:lstStyle/>
           <a:p>
-            <a:pPr indent="0" marL="0">
-              <a:buNone/>
-            </a:pPr>
-            <a:r>
-              <a:rPr lang="en-US" sz="900" b="1" spc="200" kern="0" dirty="0">
+            <a:pPr marL="0" indent="0">
+              <a:buNone/>
+            </a:pPr>
+            <a:r>
+              <a:rPr lang="en-US" sz="900" b="1" kern="0" spc="200" dirty="0">
                 <a:solidFill>
                   <a:srgbClr val="D4824A"/>
                 </a:solidFill>
               </a:rPr>
               <a:t>EXAMPLE  </a:t>
             </a:r>
-            <a:pPr indent="0" marL="0">
-              <a:buNone/>
-            </a:pPr>
             <a:r>
               <a:rPr lang="en-US" sz="1200" b="1" dirty="0">
                 <a:solidFill>
@@ -4888,7 +5684,7 @@
           <a:bodyPr wrap="square" lIns="0" tIns="0" rIns="0" bIns="0" rtlCol="0" anchor="t"/>
           <a:lstStyle/>
           <a:p>
-            <a:pPr indent="0" marL="0">
+            <a:pPr marL="0" indent="0">
               <a:lnSpc>
                 <a:spcPct val="100000"/>
               </a:lnSpc>
@@ -4908,7 +5704,7 @@
             <a:endParaRPr lang="en-US" sz="1050" dirty="0"/>
           </a:p>
           <a:p>
-            <a:pPr indent="0" marL="0">
+            <a:pPr marL="0" indent="0">
               <a:lnSpc>
                 <a:spcPct val="100000"/>
               </a:lnSpc>
@@ -4928,7 +5724,7 @@
             <a:endParaRPr lang="en-US" sz="1050" dirty="0"/>
           </a:p>
           <a:p>
-            <a:pPr indent="0" marL="0">
+            <a:pPr marL="0" indent="0">
               <a:lnSpc>
                 <a:spcPct val="100000"/>
               </a:lnSpc>
@@ -4948,7 +5744,7 @@
             <a:endParaRPr lang="en-US" sz="1050" dirty="0"/>
           </a:p>
           <a:p>
-            <a:pPr indent="0" marL="0">
+            <a:pPr marL="0" indent="0">
               <a:lnSpc>
                 <a:spcPct val="100000"/>
               </a:lnSpc>
@@ -4968,7 +5764,7 @@
             <a:endParaRPr lang="en-US" sz="1050" dirty="0"/>
           </a:p>
           <a:p>
-            <a:pPr indent="0" marL="0">
+            <a:pPr marL="0" indent="0">
               <a:lnSpc>
                 <a:spcPct val="100000"/>
               </a:lnSpc>
@@ -4988,7 +5784,7 @@
             <a:endParaRPr lang="en-US" sz="1050" dirty="0"/>
           </a:p>
           <a:p>
-            <a:pPr indent="0" marL="0">
+            <a:pPr marL="0" indent="0">
               <a:lnSpc>
                 <a:spcPct val="100000"/>
               </a:lnSpc>
@@ -5008,7 +5804,7 @@
             <a:endParaRPr lang="en-US" sz="1050" dirty="0"/>
           </a:p>
           <a:p>
-            <a:pPr indent="0" marL="0">
+            <a:pPr marL="0" indent="0">
               <a:lnSpc>
                 <a:spcPct val="100000"/>
               </a:lnSpc>
@@ -5028,7 +5824,7 @@
             <a:endParaRPr lang="en-US" sz="1050" dirty="0"/>
           </a:p>
           <a:p>
-            <a:pPr indent="0" marL="0">
+            <a:pPr marL="0" indent="0">
               <a:lnSpc>
                 <a:spcPct val="100000"/>
               </a:lnSpc>
@@ -5037,7 +5833,7 @@
             <a:endParaRPr lang="en-US" sz="1050" dirty="0"/>
           </a:p>
           <a:p>
-            <a:pPr indent="0" marL="0">
+            <a:pPr marL="0" indent="0">
               <a:lnSpc>
                 <a:spcPct val="100000"/>
               </a:lnSpc>
@@ -5057,7 +5853,7 @@
             <a:endParaRPr lang="en-US" sz="1050" dirty="0"/>
           </a:p>
           <a:p>
-            <a:pPr indent="0" marL="0">
+            <a:pPr marL="0" indent="0">
               <a:lnSpc>
                 <a:spcPct val="100000"/>
               </a:lnSpc>
@@ -5077,7 +5873,7 @@
             <a:endParaRPr lang="en-US" sz="1050" dirty="0"/>
           </a:p>
           <a:p>
-            <a:pPr indent="0" marL="0">
+            <a:pPr marL="0" indent="0">
               <a:lnSpc>
                 <a:spcPct val="100000"/>
               </a:lnSpc>
@@ -5097,7 +5893,7 @@
             <a:endParaRPr lang="en-US" sz="1050" dirty="0"/>
           </a:p>
           <a:p>
-            <a:pPr indent="0" marL="0">
+            <a:pPr marL="0" indent="0">
               <a:lnSpc>
                 <a:spcPct val="100000"/>
               </a:lnSpc>
@@ -5117,7 +5913,7 @@
             <a:endParaRPr lang="en-US" sz="1050" dirty="0"/>
           </a:p>
           <a:p>
-            <a:pPr indent="0" marL="0">
+            <a:pPr marL="0" indent="0">
               <a:lnSpc>
                 <a:spcPct val="100000"/>
               </a:lnSpc>
@@ -5137,7 +5933,7 @@
             <a:endParaRPr lang="en-US" sz="1050" dirty="0"/>
           </a:p>
           <a:p>
-            <a:pPr indent="0" marL="0">
+            <a:pPr marL="0" indent="0">
               <a:lnSpc>
                 <a:spcPct val="100000"/>
               </a:lnSpc>
@@ -5178,7 +5974,7 @@
           </a:prstGeom>
           <a:extLst>
             <a:ext uri="{C572A759-6A51-4108-AA02-DFA0A04FC94B}">
-              <ma14:wrappingTextBoxFlag xmlns:ma14="http://schemas.microsoft.com/office/mac/drawingml/2011/main" val="0"/>
+              <ma14:wrappingTextBoxFlag xmlns:ma14="http://schemas.microsoft.com/office/mac/drawingml/2011/main" xmlns="" val="0"/>
             </a:ext>
           </a:extLst>
         </p:spPr>
@@ -5196,8 +5992,8 @@
           <a:p>
             <a:pPr algn="r"/>
             <a:fld id="{F7021451-1387-4CA6-816F-3879F97B5CBC}" type="slidenum">
-              <a:rPr b="0" lang="en-US"/>
-              <a:t>11</a:t>
+              <a:rPr lang="en-US" b="0"/>
+              <a:t>12</a:t>
             </a:fld>
             <a:endParaRPr lang="en-US"/>
           </a:p>
@@ -5211,7 +6007,7 @@
 </p:sld>
 </file>
 
-<file path=ppt/slides/slide12.xml><?xml version="1.0" encoding="utf-8"?>
+<file path=ppt/slides/slide13.xml><?xml version="1.0" encoding="utf-8"?>
 <p:sld xmlns:a="http://schemas.openxmlformats.org/drawingml/2006/main" xmlns:r="http://schemas.openxmlformats.org/officeDocument/2006/relationships" xmlns:p="http://schemas.openxmlformats.org/presentationml/2006/main">
   <p:cSld name="Slide 12">
     <p:spTree>
@@ -5249,11 +6045,11 @@
           <a:bodyPr wrap="square" lIns="0" tIns="0" rIns="0" bIns="0" rtlCol="0" anchor="ctr"/>
           <a:lstStyle/>
           <a:p>
-            <a:pPr indent="0" marL="0">
-              <a:buNone/>
-            </a:pPr>
-            <a:r>
-              <a:rPr lang="en-US" sz="1000" b="1" spc="300" kern="0" dirty="0">
+            <a:pPr marL="0" indent="0">
+              <a:buNone/>
+            </a:pPr>
+            <a:r>
+              <a:rPr lang="en-US" sz="1000" b="1" kern="0" spc="300" dirty="0">
                 <a:solidFill>
                   <a:srgbClr val="D4824A"/>
                 </a:solidFill>
@@ -5267,9 +6063,11 @@
       <p:sp>
         <p:nvSpPr>
           <p:cNvPr id="3" name="Text 1"/>
-          <p:cNvSpPr/>
+          <p:cNvSpPr>
+            <a:spLocks noGrp="1"/>
+          </p:cNvSpPr>
           <p:nvPr>
-            <p:ph idx="101" type="title" hasCustomPrompt="1"/>
+            <p:ph type="title" idx="101" hasCustomPrompt="1"/>
           </p:nvPr>
         </p:nvSpPr>
         <p:spPr>
@@ -5287,7 +6085,7 @@
           <a:bodyPr wrap="square" lIns="0" tIns="0" rIns="0" bIns="0" rtlCol="0" anchor="ctr"/>
           <a:lstStyle/>
           <a:p>
-            <a:pPr algn="l" indent="0" marL="0">
+            <a:pPr marL="0" indent="0" algn="l">
               <a:buNone/>
             </a:pPr>
             <a:r>
@@ -5348,7 +6146,7 @@
           <a:bodyPr wrap="square" lIns="0" tIns="0" rIns="0" bIns="0" rtlCol="0" anchor="ctr"/>
           <a:lstStyle/>
           <a:p>
-            <a:pPr algn="ctr" indent="0" marL="0">
+            <a:pPr marL="0" indent="0" algn="ctr">
               <a:buNone/>
             </a:pPr>
             <a:r>
@@ -5384,7 +6182,7 @@
           <a:bodyPr wrap="square" lIns="0" tIns="0" rIns="0" bIns="0" rtlCol="0" anchor="t"/>
           <a:lstStyle/>
           <a:p>
-            <a:pPr indent="0" marL="0">
+            <a:pPr marL="0" indent="0">
               <a:spcAft>
                 <a:spcPts val="200"/>
               </a:spcAft>
@@ -5401,7 +6199,7 @@
             <a:endParaRPr lang="en-US" sz="1500" dirty="0"/>
           </a:p>
           <a:p>
-            <a:pPr indent="0" marL="0">
+            <a:pPr marL="0" indent="0">
               <a:spcAft>
                 <a:spcPts val="200"/>
               </a:spcAft>
@@ -5465,7 +6263,7 @@
           <a:bodyPr wrap="square" lIns="0" tIns="0" rIns="0" bIns="0" rtlCol="0" anchor="ctr"/>
           <a:lstStyle/>
           <a:p>
-            <a:pPr algn="ctr" indent="0" marL="0">
+            <a:pPr marL="0" indent="0" algn="ctr">
               <a:buNone/>
             </a:pPr>
             <a:r>
@@ -5501,7 +6299,7 @@
           <a:bodyPr wrap="square" lIns="0" tIns="0" rIns="0" bIns="0" rtlCol="0" anchor="t"/>
           <a:lstStyle/>
           <a:p>
-            <a:pPr indent="0" marL="0">
+            <a:pPr marL="0" indent="0">
               <a:spcAft>
                 <a:spcPts val="200"/>
               </a:spcAft>
@@ -5518,7 +6316,7 @@
             <a:endParaRPr lang="en-US" sz="1500" dirty="0"/>
           </a:p>
           <a:p>
-            <a:pPr indent="0" marL="0">
+            <a:pPr marL="0" indent="0">
               <a:spcAft>
                 <a:spcPts val="200"/>
               </a:spcAft>
@@ -5582,7 +6380,7 @@
           <a:bodyPr wrap="square" lIns="0" tIns="0" rIns="0" bIns="0" rtlCol="0" anchor="ctr"/>
           <a:lstStyle/>
           <a:p>
-            <a:pPr algn="ctr" indent="0" marL="0">
+            <a:pPr marL="0" indent="0" algn="ctr">
               <a:buNone/>
             </a:pPr>
             <a:r>
@@ -5618,7 +6416,7 @@
           <a:bodyPr wrap="square" lIns="0" tIns="0" rIns="0" bIns="0" rtlCol="0" anchor="t"/>
           <a:lstStyle/>
           <a:p>
-            <a:pPr indent="0" marL="0">
+            <a:pPr marL="0" indent="0">
               <a:spcAft>
                 <a:spcPts val="200"/>
               </a:spcAft>
@@ -5635,7 +6433,7 @@
             <a:endParaRPr lang="en-US" sz="1500" dirty="0"/>
           </a:p>
           <a:p>
-            <a:pPr indent="0" marL="0">
+            <a:pPr marL="0" indent="0">
               <a:spcAft>
                 <a:spcPts val="200"/>
               </a:spcAft>
@@ -5699,7 +6497,7 @@
           <a:bodyPr wrap="square" lIns="0" tIns="0" rIns="0" bIns="0" rtlCol="0" anchor="ctr"/>
           <a:lstStyle/>
           <a:p>
-            <a:pPr algn="ctr" indent="0" marL="0">
+            <a:pPr marL="0" indent="0" algn="ctr">
               <a:buNone/>
             </a:pPr>
             <a:r>
@@ -5735,7 +6533,7 @@
           <a:bodyPr wrap="square" lIns="0" tIns="0" rIns="0" bIns="0" rtlCol="0" anchor="t"/>
           <a:lstStyle/>
           <a:p>
-            <a:pPr indent="0" marL="0">
+            <a:pPr marL="0" indent="0">
               <a:spcAft>
                 <a:spcPts val="200"/>
               </a:spcAft>
@@ -5752,7 +6550,7 @@
             <a:endParaRPr lang="en-US" sz="1500" dirty="0"/>
           </a:p>
           <a:p>
-            <a:pPr indent="0" marL="0">
+            <a:pPr marL="0" indent="0">
               <a:spcAft>
                 <a:spcPts val="200"/>
               </a:spcAft>
@@ -5818,20 +6616,17 @@
           <a:bodyPr wrap="square" lIns="0" tIns="0" rIns="0" bIns="0" rtlCol="0" anchor="ctr"/>
           <a:lstStyle/>
           <a:p>
-            <a:pPr indent="0" marL="0">
-              <a:buNone/>
-            </a:pPr>
-            <a:r>
-              <a:rPr lang="en-US" sz="1000" b="1" spc="200" kern="0" dirty="0">
+            <a:pPr marL="0" indent="0">
+              <a:buNone/>
+            </a:pPr>
+            <a:r>
+              <a:rPr lang="en-US" sz="1000" b="1" kern="0" spc="200" dirty="0">
                 <a:solidFill>
                   <a:srgbClr val="D4824A"/>
                 </a:solidFill>
               </a:rPr>
               <a:t>KEY POINT  </a:t>
             </a:r>
-            <a:pPr indent="0" marL="0">
-              <a:buNone/>
-            </a:pPr>
             <a:r>
               <a:rPr lang="en-US" sz="1300" dirty="0">
                 <a:solidFill>
@@ -5892,20 +6687,17 @@
           <a:bodyPr wrap="square" lIns="0" tIns="0" rIns="0" bIns="0" rtlCol="0" anchor="ctr"/>
           <a:lstStyle/>
           <a:p>
-            <a:pPr indent="0" marL="0">
-              <a:buNone/>
-            </a:pPr>
-            <a:r>
-              <a:rPr lang="en-US" sz="900" b="1" spc="200" kern="0" dirty="0">
+            <a:pPr marL="0" indent="0">
+              <a:buNone/>
+            </a:pPr>
+            <a:r>
+              <a:rPr lang="en-US" sz="900" b="1" kern="0" spc="200" dirty="0">
                 <a:solidFill>
                   <a:srgbClr val="D4824A"/>
                 </a:solidFill>
               </a:rPr>
               <a:t>EXAMPLE  </a:t>
             </a:r>
-            <a:pPr indent="0" marL="0">
-              <a:buNone/>
-            </a:pPr>
             <a:r>
               <a:rPr lang="en-US" sz="1200" b="1" dirty="0">
                 <a:solidFill>
@@ -5939,7 +6731,7 @@
           <a:bodyPr wrap="square" lIns="0" tIns="0" rIns="0" bIns="0" rtlCol="0" anchor="t"/>
           <a:lstStyle/>
           <a:p>
-            <a:pPr indent="0" marL="0">
+            <a:pPr marL="0" indent="0">
               <a:lnSpc>
                 <a:spcPct val="100000"/>
               </a:lnSpc>
@@ -5959,7 +6751,7 @@
             <a:endParaRPr lang="en-US" sz="1050" dirty="0"/>
           </a:p>
           <a:p>
-            <a:pPr indent="0" marL="0">
+            <a:pPr marL="0" indent="0">
               <a:lnSpc>
                 <a:spcPct val="100000"/>
               </a:lnSpc>
@@ -5979,7 +6771,7 @@
             <a:endParaRPr lang="en-US" sz="1050" dirty="0"/>
           </a:p>
           <a:p>
-            <a:pPr indent="0" marL="0">
+            <a:pPr marL="0" indent="0">
               <a:lnSpc>
                 <a:spcPct val="100000"/>
               </a:lnSpc>
@@ -5999,7 +6791,7 @@
             <a:endParaRPr lang="en-US" sz="1050" dirty="0"/>
           </a:p>
           <a:p>
-            <a:pPr indent="0" marL="0">
+            <a:pPr marL="0" indent="0">
               <a:lnSpc>
                 <a:spcPct val="100000"/>
               </a:lnSpc>
@@ -6008,7 +6800,7 @@
             <a:endParaRPr lang="en-US" sz="1050" dirty="0"/>
           </a:p>
           <a:p>
-            <a:pPr indent="0" marL="0">
+            <a:pPr marL="0" indent="0">
               <a:lnSpc>
                 <a:spcPct val="100000"/>
               </a:lnSpc>
@@ -6028,7 +6820,7 @@
             <a:endParaRPr lang="en-US" sz="1050" dirty="0"/>
           </a:p>
           <a:p>
-            <a:pPr indent="0" marL="0">
+            <a:pPr marL="0" indent="0">
               <a:lnSpc>
                 <a:spcPct val="100000"/>
               </a:lnSpc>
@@ -6048,7 +6840,7 @@
             <a:endParaRPr lang="en-US" sz="1050" dirty="0"/>
           </a:p>
           <a:p>
-            <a:pPr indent="0" marL="0">
+            <a:pPr marL="0" indent="0">
               <a:lnSpc>
                 <a:spcPct val="100000"/>
               </a:lnSpc>
@@ -6068,7 +6860,7 @@
             <a:endParaRPr lang="en-US" sz="1050" dirty="0"/>
           </a:p>
           <a:p>
-            <a:pPr indent="0" marL="0">
+            <a:pPr marL="0" indent="0">
               <a:lnSpc>
                 <a:spcPct val="100000"/>
               </a:lnSpc>
@@ -6088,7 +6880,7 @@
             <a:endParaRPr lang="en-US" sz="1050" dirty="0"/>
           </a:p>
           <a:p>
-            <a:pPr indent="0" marL="0">
+            <a:pPr marL="0" indent="0">
               <a:lnSpc>
                 <a:spcPct val="100000"/>
               </a:lnSpc>
@@ -6108,7 +6900,7 @@
             <a:endParaRPr lang="en-US" sz="1050" dirty="0"/>
           </a:p>
           <a:p>
-            <a:pPr indent="0" marL="0">
+            <a:pPr marL="0" indent="0">
               <a:lnSpc>
                 <a:spcPct val="100000"/>
               </a:lnSpc>
@@ -6128,7 +6920,7 @@
             <a:endParaRPr lang="en-US" sz="1050" dirty="0"/>
           </a:p>
           <a:p>
-            <a:pPr indent="0" marL="0">
+            <a:pPr marL="0" indent="0">
               <a:lnSpc>
                 <a:spcPct val="100000"/>
               </a:lnSpc>
@@ -6148,7 +6940,7 @@
             <a:endParaRPr lang="en-US" sz="1050" dirty="0"/>
           </a:p>
           <a:p>
-            <a:pPr indent="0" marL="0">
+            <a:pPr marL="0" indent="0">
               <a:lnSpc>
                 <a:spcPct val="100000"/>
               </a:lnSpc>
@@ -6157,7 +6949,7 @@
             <a:endParaRPr lang="en-US" sz="1050" dirty="0"/>
           </a:p>
           <a:p>
-            <a:pPr indent="0" marL="0">
+            <a:pPr marL="0" indent="0">
               <a:lnSpc>
                 <a:spcPct val="100000"/>
               </a:lnSpc>
@@ -6198,7 +6990,7 @@
           </a:prstGeom>
           <a:extLst>
             <a:ext uri="{C572A759-6A51-4108-AA02-DFA0A04FC94B}">
-              <ma14:wrappingTextBoxFlag xmlns:ma14="http://schemas.microsoft.com/office/mac/drawingml/2011/main" val="0"/>
+              <ma14:wrappingTextBoxFlag xmlns:ma14="http://schemas.microsoft.com/office/mac/drawingml/2011/main" xmlns="" val="0"/>
             </a:ext>
           </a:extLst>
         </p:spPr>
@@ -6216,8 +7008,8 @@
           <a:p>
             <a:pPr algn="r"/>
             <a:fld id="{F7021451-1387-4CA6-816F-3879F97B5CBC}" type="slidenum">
-              <a:rPr b="0" lang="en-US"/>
-              <a:t>12</a:t>
+              <a:rPr lang="en-US" b="0"/>
+              <a:t>13</a:t>
             </a:fld>
             <a:endParaRPr lang="en-US"/>
           </a:p>
@@ -6231,7 +7023,7 @@
 </p:sld>
 </file>
 
-<file path=ppt/slides/slide13.xml><?xml version="1.0" encoding="utf-8"?>
+<file path=ppt/slides/slide14.xml><?xml version="1.0" encoding="utf-8"?>
 <p:sld xmlns:a="http://schemas.openxmlformats.org/drawingml/2006/main" xmlns:r="http://schemas.openxmlformats.org/officeDocument/2006/relationships" xmlns:p="http://schemas.openxmlformats.org/presentationml/2006/main">
   <p:cSld name="Slide 13">
     <p:spTree>
@@ -6269,11 +7061,11 @@
           <a:bodyPr wrap="square" lIns="0" tIns="0" rIns="0" bIns="0" rtlCol="0" anchor="ctr"/>
           <a:lstStyle/>
           <a:p>
-            <a:pPr indent="0" marL="0">
-              <a:buNone/>
-            </a:pPr>
-            <a:r>
-              <a:rPr lang="en-US" sz="1000" b="1" spc="300" kern="0" dirty="0">
+            <a:pPr marL="0" indent="0">
+              <a:buNone/>
+            </a:pPr>
+            <a:r>
+              <a:rPr lang="en-US" sz="1000" b="1" kern="0" spc="300" dirty="0">
                 <a:solidFill>
                   <a:srgbClr val="D4824A"/>
                 </a:solidFill>
@@ -6287,9 +7079,11 @@
       <p:sp>
         <p:nvSpPr>
           <p:cNvPr id="3" name="Text 1"/>
-          <p:cNvSpPr/>
+          <p:cNvSpPr>
+            <a:spLocks noGrp="1"/>
+          </p:cNvSpPr>
           <p:nvPr>
-            <p:ph idx="101" type="title" hasCustomPrompt="1"/>
+            <p:ph type="title" idx="101" hasCustomPrompt="1"/>
           </p:nvPr>
         </p:nvSpPr>
         <p:spPr>
@@ -6307,7 +7101,7 @@
           <a:bodyPr wrap="square" lIns="0" tIns="0" rIns="0" bIns="0" rtlCol="0" anchor="ctr"/>
           <a:lstStyle/>
           <a:p>
-            <a:pPr algn="l" indent="0" marL="0">
+            <a:pPr marL="0" indent="0" algn="l">
               <a:buNone/>
             </a:pPr>
             <a:r>
@@ -6345,8 +7139,20 @@
             <a:tbl>
               <a:tblPr/>
               <a:tblGrid>
-                <a:gridCol w="2926080"/>
-                <a:gridCol w="5212080"/>
+                <a:gridCol w="2926080">
+                  <a:extLst>
+                    <a:ext uri="{9D8B030D-6E8A-4147-A177-3AD203B41FA5}">
+                      <a16:colId xmlns:a16="http://schemas.microsoft.com/office/drawing/2014/main" val="20000"/>
+                    </a:ext>
+                  </a:extLst>
+                </a:gridCol>
+                <a:gridCol w="5212080">
+                  <a:extLst>
+                    <a:ext uri="{9D8B030D-6E8A-4147-A177-3AD203B41FA5}">
+                      <a16:colId xmlns:a16="http://schemas.microsoft.com/office/drawing/2014/main" val="20001"/>
+                    </a:ext>
+                  </a:extLst>
+                </a:gridCol>
               </a:tblGrid>
               <a:tr h="457200">
                 <a:tc>
@@ -6354,11 +7160,11 @@
                     <a:bodyPr/>
                     <a:lstStyle/>
                     <a:p>
-                      <a:pPr indent="0" marL="0">
+                      <a:pPr marL="0" indent="0">
                         <a:buNone/>
                       </a:pPr>
                       <a:r>
-                        <a:rPr lang="en-US" sz="1200" b="1" spc="100" kern="0" dirty="0">
+                        <a:rPr lang="en-US" sz="1200" b="1" kern="0" spc="100" dirty="0">
                           <a:solidFill>
                             <a:srgbClr val="FFFFFF"/>
                           </a:solidFill>
@@ -6391,11 +7197,11 @@
                     <a:bodyPr/>
                     <a:lstStyle/>
                     <a:p>
-                      <a:pPr indent="0" marL="0">
+                      <a:pPr marL="0" indent="0">
                         <a:buNone/>
                       </a:pPr>
                       <a:r>
-                        <a:rPr lang="en-US" sz="1200" b="1" spc="100" kern="0" dirty="0">
+                        <a:rPr lang="en-US" sz="1200" b="1" kern="0" spc="100" dirty="0">
                           <a:solidFill>
                             <a:srgbClr val="FFFFFF"/>
                           </a:solidFill>
@@ -6423,6 +7229,11 @@
                     </a:solidFill>
                   </a:tcPr>
                 </a:tc>
+                <a:extLst>
+                  <a:ext uri="{0D108BD9-81ED-4DB2-BD59-A6C34878D82A}">
+                    <a16:rowId xmlns:a16="http://schemas.microsoft.com/office/drawing/2014/main" val="10000"/>
+                  </a:ext>
+                </a:extLst>
               </a:tr>
               <a:tr h="457200">
                 <a:tc>
@@ -6430,7 +7241,7 @@
                     <a:bodyPr/>
                     <a:lstStyle/>
                     <a:p>
-                      <a:pPr indent="0" marL="0">
+                      <a:pPr marL="0" indent="0">
                         <a:buNone/>
                       </a:pPr>
                       <a:r>
@@ -6467,7 +7278,7 @@
                     <a:bodyPr/>
                     <a:lstStyle/>
                     <a:p>
-                      <a:pPr indent="0" marL="0">
+                      <a:pPr marL="0" indent="0">
                         <a:buNone/>
                       </a:pPr>
                       <a:r>
@@ -6499,6 +7310,11 @@
                     </a:solidFill>
                   </a:tcPr>
                 </a:tc>
+                <a:extLst>
+                  <a:ext uri="{0D108BD9-81ED-4DB2-BD59-A6C34878D82A}">
+                    <a16:rowId xmlns:a16="http://schemas.microsoft.com/office/drawing/2014/main" val="10001"/>
+                  </a:ext>
+                </a:extLst>
               </a:tr>
               <a:tr h="457200">
                 <a:tc>
@@ -6506,7 +7322,7 @@
                     <a:bodyPr/>
                     <a:lstStyle/>
                     <a:p>
-                      <a:pPr indent="0" marL="0">
+                      <a:pPr marL="0" indent="0">
                         <a:buNone/>
                       </a:pPr>
                       <a:r>
@@ -6543,7 +7359,7 @@
                     <a:bodyPr/>
                     <a:lstStyle/>
                     <a:p>
-                      <a:pPr indent="0" marL="0">
+                      <a:pPr marL="0" indent="0">
                         <a:buNone/>
                       </a:pPr>
                       <a:r>
@@ -6575,6 +7391,11 @@
                     </a:solidFill>
                   </a:tcPr>
                 </a:tc>
+                <a:extLst>
+                  <a:ext uri="{0D108BD9-81ED-4DB2-BD59-A6C34878D82A}">
+                    <a16:rowId xmlns:a16="http://schemas.microsoft.com/office/drawing/2014/main" val="10002"/>
+                  </a:ext>
+                </a:extLst>
               </a:tr>
               <a:tr h="457200">
                 <a:tc>
@@ -6582,7 +7403,7 @@
                     <a:bodyPr/>
                     <a:lstStyle/>
                     <a:p>
-                      <a:pPr indent="0" marL="0">
+                      <a:pPr marL="0" indent="0">
                         <a:buNone/>
                       </a:pPr>
                       <a:r>
@@ -6619,7 +7440,7 @@
                     <a:bodyPr/>
                     <a:lstStyle/>
                     <a:p>
-                      <a:pPr indent="0" marL="0">
+                      <a:pPr marL="0" indent="0">
                         <a:buNone/>
                       </a:pPr>
                       <a:r>
@@ -6651,6 +7472,11 @@
                     </a:solidFill>
                   </a:tcPr>
                 </a:tc>
+                <a:extLst>
+                  <a:ext uri="{0D108BD9-81ED-4DB2-BD59-A6C34878D82A}">
+                    <a16:rowId xmlns:a16="http://schemas.microsoft.com/office/drawing/2014/main" val="10003"/>
+                  </a:ext>
+                </a:extLst>
               </a:tr>
               <a:tr h="457200">
                 <a:tc>
@@ -6658,7 +7484,7 @@
                     <a:bodyPr/>
                     <a:lstStyle/>
                     <a:p>
-                      <a:pPr indent="0" marL="0">
+                      <a:pPr marL="0" indent="0">
                         <a:buNone/>
                       </a:pPr>
                       <a:r>
@@ -6695,7 +7521,7 @@
                     <a:bodyPr/>
                     <a:lstStyle/>
                     <a:p>
-                      <a:pPr indent="0" marL="0">
+                      <a:pPr marL="0" indent="0">
                         <a:buNone/>
                       </a:pPr>
                       <a:r>
@@ -6727,6 +7553,11 @@
                     </a:solidFill>
                   </a:tcPr>
                 </a:tc>
+                <a:extLst>
+                  <a:ext uri="{0D108BD9-81ED-4DB2-BD59-A6C34878D82A}">
+                    <a16:rowId xmlns:a16="http://schemas.microsoft.com/office/drawing/2014/main" val="10004"/>
+                  </a:ext>
+                </a:extLst>
               </a:tr>
             </a:tbl>
           </a:graphicData>
@@ -6780,20 +7611,17 @@
           <a:bodyPr wrap="square" lIns="0" tIns="0" rIns="0" bIns="0" rtlCol="0" anchor="ctr"/>
           <a:lstStyle/>
           <a:p>
-            <a:pPr indent="0" marL="0">
-              <a:buNone/>
-            </a:pPr>
-            <a:r>
-              <a:rPr lang="en-US" sz="1000" b="1" spc="200" kern="0" dirty="0">
+            <a:pPr marL="0" indent="0">
+              <a:buNone/>
+            </a:pPr>
+            <a:r>
+              <a:rPr lang="en-US" sz="1000" b="1" kern="0" spc="200" dirty="0">
                 <a:solidFill>
                   <a:srgbClr val="D4824A"/>
                 </a:solidFill>
               </a:rPr>
               <a:t>KEY POINT  </a:t>
             </a:r>
-            <a:pPr indent="0" marL="0">
-              <a:buNone/>
-            </a:pPr>
             <a:r>
               <a:rPr lang="en-US" sz="1300" dirty="0">
                 <a:solidFill>
@@ -6826,7 +7654,7 @@
           </a:prstGeom>
           <a:extLst>
             <a:ext uri="{C572A759-6A51-4108-AA02-DFA0A04FC94B}">
-              <ma14:wrappingTextBoxFlag xmlns:ma14="http://schemas.microsoft.com/office/mac/drawingml/2011/main" val="0"/>
+              <ma14:wrappingTextBoxFlag xmlns:ma14="http://schemas.microsoft.com/office/mac/drawingml/2011/main" xmlns="" val="0"/>
             </a:ext>
           </a:extLst>
         </p:spPr>
@@ -6844,8 +7672,8 @@
           <a:p>
             <a:pPr algn="r"/>
             <a:fld id="{F7021451-1387-4CA6-816F-3879F97B5CBC}" type="slidenum">
-              <a:rPr b="0" lang="en-US"/>
-              <a:t>13</a:t>
+              <a:rPr lang="en-US" b="0"/>
+              <a:t>14</a:t>
             </a:fld>
             <a:endParaRPr lang="en-US"/>
           </a:p>
@@ -6859,7 +7687,7 @@
 </p:sld>
 </file>
 
-<file path=ppt/slides/slide14.xml><?xml version="1.0" encoding="utf-8"?>
+<file path=ppt/slides/slide15.xml><?xml version="1.0" encoding="utf-8"?>
 <p:sld xmlns:a="http://schemas.openxmlformats.org/drawingml/2006/main" xmlns:r="http://schemas.openxmlformats.org/officeDocument/2006/relationships" xmlns:p="http://schemas.openxmlformats.org/presentationml/2006/main">
   <p:cSld name="Slide 14">
     <p:spTree>
@@ -6897,11 +7725,11 @@
           <a:bodyPr wrap="square" lIns="0" tIns="0" rIns="0" bIns="0" rtlCol="0" anchor="ctr"/>
           <a:lstStyle/>
           <a:p>
-            <a:pPr indent="0" marL="0">
-              <a:buNone/>
-            </a:pPr>
-            <a:r>
-              <a:rPr lang="en-US" sz="1000" b="1" spc="300" kern="0" dirty="0">
+            <a:pPr marL="0" indent="0">
+              <a:buNone/>
+            </a:pPr>
+            <a:r>
+              <a:rPr lang="en-US" sz="1000" b="1" kern="0" spc="300" dirty="0">
                 <a:solidFill>
                   <a:srgbClr val="D4824A"/>
                 </a:solidFill>
@@ -6915,9 +7743,11 @@
       <p:sp>
         <p:nvSpPr>
           <p:cNvPr id="3" name="Text 1"/>
-          <p:cNvSpPr/>
+          <p:cNvSpPr>
+            <a:spLocks noGrp="1"/>
+          </p:cNvSpPr>
           <p:nvPr>
-            <p:ph idx="101" type="title" hasCustomPrompt="1"/>
+            <p:ph type="title" idx="101" hasCustomPrompt="1"/>
           </p:nvPr>
         </p:nvSpPr>
         <p:spPr>
@@ -6935,7 +7765,7 @@
           <a:bodyPr wrap="square" lIns="0" tIns="0" rIns="0" bIns="0" rtlCol="0" anchor="ctr"/>
           <a:lstStyle/>
           <a:p>
-            <a:pPr algn="l" indent="0" marL="0">
+            <a:pPr marL="0" indent="0" algn="l">
               <a:buNone/>
             </a:pPr>
             <a:r>
@@ -7023,7 +7853,7 @@
           <a:bodyPr wrap="square" lIns="0" tIns="0" rIns="0" bIns="0" rtlCol="0" anchor="ctr"/>
           <a:lstStyle/>
           <a:p>
-            <a:pPr algn="ctr" indent="0" marL="0">
+            <a:pPr marL="0" indent="0" algn="ctr">
               <a:buNone/>
             </a:pPr>
             <a:r>
@@ -7059,7 +7889,7 @@
           <a:bodyPr wrap="square" lIns="0" tIns="0" rIns="0" bIns="0" rtlCol="0" anchor="ctr"/>
           <a:lstStyle/>
           <a:p>
-            <a:pPr indent="0" marL="0">
+            <a:pPr marL="0" indent="0">
               <a:buNone/>
             </a:pPr>
             <a:r>
@@ -7070,9 +7900,6 @@
               </a:rPr>
               <a:t>Retry with the error   </a:t>
             </a:r>
-            <a:pPr indent="0" marL="0">
-              <a:buNone/>
-            </a:pPr>
             <a:r>
               <a:rPr lang="en-US" sz="1150" dirty="0">
                 <a:solidFill>
@@ -7158,7 +7985,7 @@
           <a:bodyPr wrap="square" lIns="0" tIns="0" rIns="0" bIns="0" rtlCol="0" anchor="ctr"/>
           <a:lstStyle/>
           <a:p>
-            <a:pPr algn="ctr" indent="0" marL="0">
+            <a:pPr marL="0" indent="0" algn="ctr">
               <a:buNone/>
             </a:pPr>
             <a:r>
@@ -7194,7 +8021,7 @@
           <a:bodyPr wrap="square" lIns="0" tIns="0" rIns="0" bIns="0" rtlCol="0" anchor="ctr"/>
           <a:lstStyle/>
           <a:p>
-            <a:pPr indent="0" marL="0">
+            <a:pPr marL="0" indent="0">
               <a:buNone/>
             </a:pPr>
             <a:r>
@@ -7205,9 +8032,6 @@
               </a:rPr>
               <a:t>Simplify the schema   </a:t>
             </a:r>
-            <a:pPr indent="0" marL="0">
-              <a:buNone/>
-            </a:pPr>
             <a:r>
               <a:rPr lang="en-US" sz="1150" dirty="0">
                 <a:solidFill>
@@ -7293,7 +8117,7 @@
           <a:bodyPr wrap="square" lIns="0" tIns="0" rIns="0" bIns="0" rtlCol="0" anchor="ctr"/>
           <a:lstStyle/>
           <a:p>
-            <a:pPr algn="ctr" indent="0" marL="0">
+            <a:pPr marL="0" indent="0" algn="ctr">
               <a:buNone/>
             </a:pPr>
             <a:r>
@@ -7329,7 +8153,7 @@
           <a:bodyPr wrap="square" lIns="0" tIns="0" rIns="0" bIns="0" rtlCol="0" anchor="ctr"/>
           <a:lstStyle/>
           <a:p>
-            <a:pPr indent="0" marL="0">
+            <a:pPr marL="0" indent="0">
               <a:buNone/>
             </a:pPr>
             <a:r>
@@ -7340,9 +8164,6 @@
               </a:rPr>
               <a:t>Coerce types   </a:t>
             </a:r>
-            <a:pPr indent="0" marL="0">
-              <a:buNone/>
-            </a:pPr>
             <a:r>
               <a:rPr lang="en-US" sz="1150" dirty="0">
                 <a:solidFill>
@@ -7428,7 +8249,7 @@
           <a:bodyPr wrap="square" lIns="0" tIns="0" rIns="0" bIns="0" rtlCol="0" anchor="ctr"/>
           <a:lstStyle/>
           <a:p>
-            <a:pPr algn="ctr" indent="0" marL="0">
+            <a:pPr marL="0" indent="0" algn="ctr">
               <a:buNone/>
             </a:pPr>
             <a:r>
@@ -7464,7 +8285,7 @@
           <a:bodyPr wrap="square" lIns="0" tIns="0" rIns="0" bIns="0" rtlCol="0" anchor="ctr"/>
           <a:lstStyle/>
           <a:p>
-            <a:pPr indent="0" marL="0">
+            <a:pPr marL="0" indent="0">
               <a:buNone/>
             </a:pPr>
             <a:r>
@@ -7475,9 +8296,6 @@
               </a:rPr>
               <a:t>Safe default   </a:t>
             </a:r>
-            <a:pPr indent="0" marL="0">
-              <a:buNone/>
-            </a:pPr>
             <a:r>
               <a:rPr lang="en-US" sz="1150" dirty="0">
                 <a:solidFill>
@@ -7511,7 +8329,7 @@
           <a:bodyPr wrap="square" lIns="0" tIns="0" rIns="0" bIns="0" rtlCol="0" anchor="ctr"/>
           <a:lstStyle/>
           <a:p>
-            <a:pPr indent="0" marL="0">
+            <a:pPr marL="0" indent="0">
               <a:buNone/>
             </a:pPr>
             <a:r>
@@ -7574,20 +8392,17 @@
           <a:bodyPr wrap="square" lIns="0" tIns="0" rIns="0" bIns="0" rtlCol="0" anchor="ctr"/>
           <a:lstStyle/>
           <a:p>
-            <a:pPr indent="0" marL="0">
-              <a:buNone/>
-            </a:pPr>
-            <a:r>
-              <a:rPr lang="en-US" sz="900" b="1" spc="200" kern="0" dirty="0">
+            <a:pPr marL="0" indent="0">
+              <a:buNone/>
+            </a:pPr>
+            <a:r>
+              <a:rPr lang="en-US" sz="900" b="1" kern="0" spc="200" dirty="0">
                 <a:solidFill>
                   <a:srgbClr val="D4824A"/>
                 </a:solidFill>
               </a:rPr>
               <a:t>EXAMPLE  </a:t>
             </a:r>
-            <a:pPr indent="0" marL="0">
-              <a:buNone/>
-            </a:pPr>
             <a:r>
               <a:rPr lang="en-US" sz="1200" b="1" dirty="0">
                 <a:solidFill>
@@ -7621,7 +8436,7 @@
           <a:bodyPr wrap="square" lIns="0" tIns="0" rIns="0" bIns="0" rtlCol="0" anchor="t"/>
           <a:lstStyle/>
           <a:p>
-            <a:pPr indent="0" marL="0">
+            <a:pPr marL="0" indent="0">
               <a:lnSpc>
                 <a:spcPct val="100000"/>
               </a:lnSpc>
@@ -7641,7 +8456,7 @@
             <a:endParaRPr lang="en-US" sz="1000" dirty="0"/>
           </a:p>
           <a:p>
-            <a:pPr indent="0" marL="0">
+            <a:pPr marL="0" indent="0">
               <a:lnSpc>
                 <a:spcPct val="100000"/>
               </a:lnSpc>
@@ -7661,7 +8476,7 @@
             <a:endParaRPr lang="en-US" sz="1000" dirty="0"/>
           </a:p>
           <a:p>
-            <a:pPr indent="0" marL="0">
+            <a:pPr marL="0" indent="0">
               <a:lnSpc>
                 <a:spcPct val="100000"/>
               </a:lnSpc>
@@ -7681,7 +8496,7 @@
             <a:endParaRPr lang="en-US" sz="1000" dirty="0"/>
           </a:p>
           <a:p>
-            <a:pPr indent="0" marL="0">
+            <a:pPr marL="0" indent="0">
               <a:lnSpc>
                 <a:spcPct val="100000"/>
               </a:lnSpc>
@@ -7701,7 +8516,7 @@
             <a:endParaRPr lang="en-US" sz="1000" dirty="0"/>
           </a:p>
           <a:p>
-            <a:pPr indent="0" marL="0">
+            <a:pPr marL="0" indent="0">
               <a:lnSpc>
                 <a:spcPct val="100000"/>
               </a:lnSpc>
@@ -7710,7 +8525,7 @@
             <a:endParaRPr lang="en-US" sz="1000" dirty="0"/>
           </a:p>
           <a:p>
-            <a:pPr indent="0" marL="0">
+            <a:pPr marL="0" indent="0">
               <a:lnSpc>
                 <a:spcPct val="100000"/>
               </a:lnSpc>
@@ -7730,7 +8545,7 @@
             <a:endParaRPr lang="en-US" sz="1000" dirty="0"/>
           </a:p>
           <a:p>
-            <a:pPr indent="0" marL="0">
+            <a:pPr marL="0" indent="0">
               <a:lnSpc>
                 <a:spcPct val="100000"/>
               </a:lnSpc>
@@ -7750,7 +8565,7 @@
             <a:endParaRPr lang="en-US" sz="1000" dirty="0"/>
           </a:p>
           <a:p>
-            <a:pPr indent="0" marL="0">
+            <a:pPr marL="0" indent="0">
               <a:lnSpc>
                 <a:spcPct val="100000"/>
               </a:lnSpc>
@@ -7770,7 +8585,7 @@
             <a:endParaRPr lang="en-US" sz="1000" dirty="0"/>
           </a:p>
           <a:p>
-            <a:pPr indent="0" marL="0">
+            <a:pPr marL="0" indent="0">
               <a:lnSpc>
                 <a:spcPct val="100000"/>
               </a:lnSpc>
@@ -7790,7 +8605,7 @@
             <a:endParaRPr lang="en-US" sz="1000" dirty="0"/>
           </a:p>
           <a:p>
-            <a:pPr indent="0" marL="0">
+            <a:pPr marL="0" indent="0">
               <a:lnSpc>
                 <a:spcPct val="100000"/>
               </a:lnSpc>
@@ -7810,7 +8625,7 @@
             <a:endParaRPr lang="en-US" sz="1000" dirty="0"/>
           </a:p>
           <a:p>
-            <a:pPr indent="0" marL="0">
+            <a:pPr marL="0" indent="0">
               <a:lnSpc>
                 <a:spcPct val="100000"/>
               </a:lnSpc>
@@ -7830,7 +8645,7 @@
             <a:endParaRPr lang="en-US" sz="1000" dirty="0"/>
           </a:p>
           <a:p>
-            <a:pPr indent="0" marL="0">
+            <a:pPr marL="0" indent="0">
               <a:lnSpc>
                 <a:spcPct val="100000"/>
               </a:lnSpc>
@@ -7871,7 +8686,7 @@
           </a:prstGeom>
           <a:extLst>
             <a:ext uri="{C572A759-6A51-4108-AA02-DFA0A04FC94B}">
-              <ma14:wrappingTextBoxFlag xmlns:ma14="http://schemas.microsoft.com/office/mac/drawingml/2011/main" val="0"/>
+              <ma14:wrappingTextBoxFlag xmlns:ma14="http://schemas.microsoft.com/office/mac/drawingml/2011/main" xmlns="" val="0"/>
             </a:ext>
           </a:extLst>
         </p:spPr>
@@ -7889,8 +8704,8 @@
           <a:p>
             <a:pPr algn="r"/>
             <a:fld id="{F7021451-1387-4CA6-816F-3879F97B5CBC}" type="slidenum">
-              <a:rPr b="0" lang="en-US"/>
-              <a:t>14</a:t>
+              <a:rPr lang="en-US" b="0"/>
+              <a:t>15</a:t>
             </a:fld>
             <a:endParaRPr lang="en-US"/>
           </a:p>
@@ -7904,7 +8719,7 @@
 </p:sld>
 </file>
 
-<file path=ppt/slides/slide15.xml><?xml version="1.0" encoding="utf-8"?>
+<file path=ppt/slides/slide16.xml><?xml version="1.0" encoding="utf-8"?>
 <p:sld xmlns:a="http://schemas.openxmlformats.org/drawingml/2006/main" xmlns:r="http://schemas.openxmlformats.org/officeDocument/2006/relationships" xmlns:p="http://schemas.openxmlformats.org/presentationml/2006/main">
   <p:cSld name="Slide 15">
     <p:spTree>
@@ -7942,11 +8757,11 @@
           <a:bodyPr wrap="square" lIns="0" tIns="0" rIns="0" bIns="0" rtlCol="0" anchor="ctr"/>
           <a:lstStyle/>
           <a:p>
-            <a:pPr indent="0" marL="0">
-              <a:buNone/>
-            </a:pPr>
-            <a:r>
-              <a:rPr lang="en-US" sz="1000" b="1" spc="300" kern="0" dirty="0">
+            <a:pPr marL="0" indent="0">
+              <a:buNone/>
+            </a:pPr>
+            <a:r>
+              <a:rPr lang="en-US" sz="1000" b="1" kern="0" spc="300" dirty="0">
                 <a:solidFill>
                   <a:srgbClr val="D4824A"/>
                 </a:solidFill>
@@ -7960,9 +8775,11 @@
       <p:sp>
         <p:nvSpPr>
           <p:cNvPr id="3" name="Text 1"/>
-          <p:cNvSpPr/>
+          <p:cNvSpPr>
+            <a:spLocks noGrp="1"/>
+          </p:cNvSpPr>
           <p:nvPr>
-            <p:ph idx="101" type="title" hasCustomPrompt="1"/>
+            <p:ph type="title" idx="101" hasCustomPrompt="1"/>
           </p:nvPr>
         </p:nvSpPr>
         <p:spPr>
@@ -7980,7 +8797,7 @@
           <a:bodyPr wrap="square" lIns="0" tIns="0" rIns="0" bIns="0" rtlCol="0" anchor="ctr"/>
           <a:lstStyle/>
           <a:p>
-            <a:pPr algn="l" indent="0" marL="0">
+            <a:pPr marL="0" indent="0" algn="l">
               <a:buNone/>
             </a:pPr>
             <a:r>
@@ -8018,9 +8835,27 @@
             <a:tbl>
               <a:tblPr/>
               <a:tblGrid>
-                <a:gridCol w="2423160"/>
-                <a:gridCol w="2240280"/>
-                <a:gridCol w="3474720"/>
+                <a:gridCol w="2423160">
+                  <a:extLst>
+                    <a:ext uri="{9D8B030D-6E8A-4147-A177-3AD203B41FA5}">
+                      <a16:colId xmlns:a16="http://schemas.microsoft.com/office/drawing/2014/main" val="20000"/>
+                    </a:ext>
+                  </a:extLst>
+                </a:gridCol>
+                <a:gridCol w="2240280">
+                  <a:extLst>
+                    <a:ext uri="{9D8B030D-6E8A-4147-A177-3AD203B41FA5}">
+                      <a16:colId xmlns:a16="http://schemas.microsoft.com/office/drawing/2014/main" val="20001"/>
+                    </a:ext>
+                  </a:extLst>
+                </a:gridCol>
+                <a:gridCol w="3474720">
+                  <a:extLst>
+                    <a:ext uri="{9D8B030D-6E8A-4147-A177-3AD203B41FA5}">
+                      <a16:colId xmlns:a16="http://schemas.microsoft.com/office/drawing/2014/main" val="20002"/>
+                    </a:ext>
+                  </a:extLst>
+                </a:gridCol>
               </a:tblGrid>
               <a:tr h="420624">
                 <a:tc>
@@ -8028,11 +8863,11 @@
                     <a:bodyPr/>
                     <a:lstStyle/>
                     <a:p>
-                      <a:pPr indent="0" marL="0">
+                      <a:pPr marL="0" indent="0">
                         <a:buNone/>
                       </a:pPr>
                       <a:r>
-                        <a:rPr lang="en-US" sz="1150" b="1" spc="100" kern="0" dirty="0">
+                        <a:rPr lang="en-US" sz="1150" b="1" kern="0" spc="100" dirty="0">
                           <a:solidFill>
                             <a:srgbClr val="FFFFFF"/>
                           </a:solidFill>
@@ -8065,11 +8900,11 @@
                     <a:bodyPr/>
                     <a:lstStyle/>
                     <a:p>
-                      <a:pPr indent="0" marL="0">
+                      <a:pPr marL="0" indent="0">
                         <a:buNone/>
                       </a:pPr>
                       <a:r>
-                        <a:rPr lang="en-US" sz="1150" b="1" spc="100" kern="0" dirty="0">
+                        <a:rPr lang="en-US" sz="1150" b="1" kern="0" spc="100" dirty="0">
                           <a:solidFill>
                             <a:srgbClr val="FFFFFF"/>
                           </a:solidFill>
@@ -8102,11 +8937,11 @@
                     <a:bodyPr/>
                     <a:lstStyle/>
                     <a:p>
-                      <a:pPr indent="0" marL="0">
+                      <a:pPr marL="0" indent="0">
                         <a:buNone/>
                       </a:pPr>
                       <a:r>
-                        <a:rPr lang="en-US" sz="1150" b="1" spc="100" kern="0" dirty="0">
+                        <a:rPr lang="en-US" sz="1150" b="1" kern="0" spc="100" dirty="0">
                           <a:solidFill>
                             <a:srgbClr val="FFFFFF"/>
                           </a:solidFill>
@@ -8134,6 +8969,11 @@
                     </a:solidFill>
                   </a:tcPr>
                 </a:tc>
+                <a:extLst>
+                  <a:ext uri="{0D108BD9-81ED-4DB2-BD59-A6C34878D82A}">
+                    <a16:rowId xmlns:a16="http://schemas.microsoft.com/office/drawing/2014/main" val="10000"/>
+                  </a:ext>
+                </a:extLst>
               </a:tr>
               <a:tr h="420624">
                 <a:tc>
@@ -8141,7 +8981,7 @@
                     <a:bodyPr/>
                     <a:lstStyle/>
                     <a:p>
-                      <a:pPr indent="0" marL="0">
+                      <a:pPr marL="0" indent="0">
                         <a:buNone/>
                       </a:pPr>
                       <a:r>
@@ -8178,7 +9018,7 @@
                     <a:bodyPr/>
                     <a:lstStyle/>
                     <a:p>
-                      <a:pPr indent="0" marL="0">
+                      <a:pPr marL="0" indent="0">
                         <a:buNone/>
                       </a:pPr>
                       <a:r>
@@ -8215,7 +9055,7 @@
                     <a:bodyPr/>
                     <a:lstStyle/>
                     <a:p>
-                      <a:pPr indent="0" marL="0">
+                      <a:pPr marL="0" indent="0">
                         <a:buNone/>
                       </a:pPr>
                       <a:r>
@@ -8254,6 +9094,11 @@
                     </a:solidFill>
                   </a:tcPr>
                 </a:tc>
+                <a:extLst>
+                  <a:ext uri="{0D108BD9-81ED-4DB2-BD59-A6C34878D82A}">
+                    <a16:rowId xmlns:a16="http://schemas.microsoft.com/office/drawing/2014/main" val="10001"/>
+                  </a:ext>
+                </a:extLst>
               </a:tr>
               <a:tr h="420624">
                 <a:tc>
@@ -8261,7 +9106,7 @@
                     <a:bodyPr/>
                     <a:lstStyle/>
                     <a:p>
-                      <a:pPr indent="0" marL="0">
+                      <a:pPr marL="0" indent="0">
                         <a:buNone/>
                       </a:pPr>
                       <a:r>
@@ -8298,7 +9143,7 @@
                     <a:bodyPr/>
                     <a:lstStyle/>
                     <a:p>
-                      <a:pPr indent="0" marL="0">
+                      <a:pPr marL="0" indent="0">
                         <a:buNone/>
                       </a:pPr>
                       <a:r>
@@ -8335,7 +9180,7 @@
                     <a:bodyPr/>
                     <a:lstStyle/>
                     <a:p>
-                      <a:pPr indent="0" marL="0">
+                      <a:pPr marL="0" indent="0">
                         <a:buNone/>
                       </a:pPr>
                       <a:r>
@@ -8374,6 +9219,11 @@
                     </a:solidFill>
                   </a:tcPr>
                 </a:tc>
+                <a:extLst>
+                  <a:ext uri="{0D108BD9-81ED-4DB2-BD59-A6C34878D82A}">
+                    <a16:rowId xmlns:a16="http://schemas.microsoft.com/office/drawing/2014/main" val="10002"/>
+                  </a:ext>
+                </a:extLst>
               </a:tr>
               <a:tr h="420624">
                 <a:tc>
@@ -8381,7 +9231,7 @@
                     <a:bodyPr/>
                     <a:lstStyle/>
                     <a:p>
-                      <a:pPr indent="0" marL="0">
+                      <a:pPr marL="0" indent="0">
                         <a:buNone/>
                       </a:pPr>
                       <a:r>
@@ -8418,7 +9268,7 @@
                     <a:bodyPr/>
                     <a:lstStyle/>
                     <a:p>
-                      <a:pPr indent="0" marL="0">
+                      <a:pPr marL="0" indent="0">
                         <a:buNone/>
                       </a:pPr>
                       <a:r>
@@ -8455,7 +9305,7 @@
                     <a:bodyPr/>
                     <a:lstStyle/>
                     <a:p>
-                      <a:pPr indent="0" marL="0">
+                      <a:pPr marL="0" indent="0">
                         <a:buNone/>
                       </a:pPr>
                       <a:r>
@@ -8494,6 +9344,11 @@
                     </a:solidFill>
                   </a:tcPr>
                 </a:tc>
+                <a:extLst>
+                  <a:ext uri="{0D108BD9-81ED-4DB2-BD59-A6C34878D82A}">
+                    <a16:rowId xmlns:a16="http://schemas.microsoft.com/office/drawing/2014/main" val="10003"/>
+                  </a:ext>
+                </a:extLst>
               </a:tr>
               <a:tr h="420624">
                 <a:tc>
@@ -8501,7 +9356,7 @@
                     <a:bodyPr/>
                     <a:lstStyle/>
                     <a:p>
-                      <a:pPr indent="0" marL="0">
+                      <a:pPr marL="0" indent="0">
                         <a:buNone/>
                       </a:pPr>
                       <a:r>
@@ -8538,7 +9393,7 @@
                     <a:bodyPr/>
                     <a:lstStyle/>
                     <a:p>
-                      <a:pPr indent="0" marL="0">
+                      <a:pPr marL="0" indent="0">
                         <a:buNone/>
                       </a:pPr>
                       <a:r>
@@ -8575,7 +9430,7 @@
                     <a:bodyPr/>
                     <a:lstStyle/>
                     <a:p>
-                      <a:pPr indent="0" marL="0">
+                      <a:pPr marL="0" indent="0">
                         <a:buNone/>
                       </a:pPr>
                       <a:r>
@@ -8614,6 +9469,11 @@
                     </a:solidFill>
                   </a:tcPr>
                 </a:tc>
+                <a:extLst>
+                  <a:ext uri="{0D108BD9-81ED-4DB2-BD59-A6C34878D82A}">
+                    <a16:rowId xmlns:a16="http://schemas.microsoft.com/office/drawing/2014/main" val="10004"/>
+                  </a:ext>
+                </a:extLst>
               </a:tr>
               <a:tr h="420624">
                 <a:tc>
@@ -8621,7 +9481,7 @@
                     <a:bodyPr/>
                     <a:lstStyle/>
                     <a:p>
-                      <a:pPr indent="0" marL="0">
+                      <a:pPr marL="0" indent="0">
                         <a:buNone/>
                       </a:pPr>
                       <a:r>
@@ -8658,7 +9518,7 @@
                     <a:bodyPr/>
                     <a:lstStyle/>
                     <a:p>
-                      <a:pPr indent="0" marL="0">
+                      <a:pPr marL="0" indent="0">
                         <a:buNone/>
                       </a:pPr>
                       <a:r>
@@ -8695,7 +9555,7 @@
                     <a:bodyPr/>
                     <a:lstStyle/>
                     <a:p>
-                      <a:pPr indent="0" marL="0">
+                      <a:pPr marL="0" indent="0">
                         <a:buNone/>
                       </a:pPr>
                       <a:r>
@@ -8734,6 +9594,11 @@
                     </a:solidFill>
                   </a:tcPr>
                 </a:tc>
+                <a:extLst>
+                  <a:ext uri="{0D108BD9-81ED-4DB2-BD59-A6C34878D82A}">
+                    <a16:rowId xmlns:a16="http://schemas.microsoft.com/office/drawing/2014/main" val="10005"/>
+                  </a:ext>
+                </a:extLst>
               </a:tr>
               <a:tr h="420624">
                 <a:tc>
@@ -8741,7 +9606,7 @@
                     <a:bodyPr/>
                     <a:lstStyle/>
                     <a:p>
-                      <a:pPr indent="0" marL="0">
+                      <a:pPr marL="0" indent="0">
                         <a:buNone/>
                       </a:pPr>
                       <a:r>
@@ -8778,7 +9643,7 @@
                     <a:bodyPr/>
                     <a:lstStyle/>
                     <a:p>
-                      <a:pPr indent="0" marL="0">
+                      <a:pPr marL="0" indent="0">
                         <a:buNone/>
                       </a:pPr>
                       <a:r>
@@ -8815,7 +9680,7 @@
                     <a:bodyPr/>
                     <a:lstStyle/>
                     <a:p>
-                      <a:pPr indent="0" marL="0">
+                      <a:pPr marL="0" indent="0">
                         <a:buNone/>
                       </a:pPr>
                       <a:r>
@@ -8854,6 +9719,11 @@
                     </a:solidFill>
                   </a:tcPr>
                 </a:tc>
+                <a:extLst>
+                  <a:ext uri="{0D108BD9-81ED-4DB2-BD59-A6C34878D82A}">
+                    <a16:rowId xmlns:a16="http://schemas.microsoft.com/office/drawing/2014/main" val="10006"/>
+                  </a:ext>
+                </a:extLst>
               </a:tr>
             </a:tbl>
           </a:graphicData>
@@ -8879,7 +9749,7 @@
           </a:prstGeom>
           <a:extLst>
             <a:ext uri="{C572A759-6A51-4108-AA02-DFA0A04FC94B}">
-              <ma14:wrappingTextBoxFlag xmlns:ma14="http://schemas.microsoft.com/office/mac/drawingml/2011/main" val="0"/>
+              <ma14:wrappingTextBoxFlag xmlns:ma14="http://schemas.microsoft.com/office/mac/drawingml/2011/main" xmlns="" val="0"/>
             </a:ext>
           </a:extLst>
         </p:spPr>
@@ -8897,8 +9767,8 @@
           <a:p>
             <a:pPr algn="r"/>
             <a:fld id="{F7021451-1387-4CA6-816F-3879F97B5CBC}" type="slidenum">
-              <a:rPr b="0" lang="en-US"/>
-              <a:t>15</a:t>
+              <a:rPr lang="en-US" b="0"/>
+              <a:t>16</a:t>
             </a:fld>
             <a:endParaRPr lang="en-US"/>
           </a:p>
@@ -8912,7 +9782,7 @@
 </p:sld>
 </file>
 
-<file path=ppt/slides/slide16.xml><?xml version="1.0" encoding="utf-8"?>
+<file path=ppt/slides/slide17.xml><?xml version="1.0" encoding="utf-8"?>
 <p:sld xmlns:a="http://schemas.openxmlformats.org/drawingml/2006/main" xmlns:r="http://schemas.openxmlformats.org/officeDocument/2006/relationships" xmlns:p="http://schemas.openxmlformats.org/presentationml/2006/main">
   <p:cSld name="Slide 16">
     <p:spTree>
@@ -8950,11 +9820,11 @@
           <a:bodyPr wrap="square" lIns="0" tIns="0" rIns="0" bIns="0" rtlCol="0" anchor="ctr"/>
           <a:lstStyle/>
           <a:p>
-            <a:pPr indent="0" marL="0">
-              <a:buNone/>
-            </a:pPr>
-            <a:r>
-              <a:rPr lang="en-US" sz="1000" b="1" spc="300" kern="0" dirty="0">
+            <a:pPr marL="0" indent="0">
+              <a:buNone/>
+            </a:pPr>
+            <a:r>
+              <a:rPr lang="en-US" sz="1000" b="1" kern="0" spc="300" dirty="0">
                 <a:solidFill>
                   <a:srgbClr val="D4824A"/>
                 </a:solidFill>
@@ -8968,9 +9838,11 @@
       <p:sp>
         <p:nvSpPr>
           <p:cNvPr id="3" name="Text 1"/>
-          <p:cNvSpPr/>
+          <p:cNvSpPr>
+            <a:spLocks noGrp="1"/>
+          </p:cNvSpPr>
           <p:nvPr>
-            <p:ph idx="101" type="title" hasCustomPrompt="1"/>
+            <p:ph type="title" idx="101" hasCustomPrompt="1"/>
           </p:nvPr>
         </p:nvSpPr>
         <p:spPr>
@@ -8988,7 +9860,7 @@
           <a:bodyPr wrap="square" lIns="0" tIns="0" rIns="0" bIns="0" rtlCol="0" anchor="ctr"/>
           <a:lstStyle/>
           <a:p>
-            <a:pPr algn="l" indent="0" marL="0">
+            <a:pPr marL="0" indent="0" algn="l">
               <a:buNone/>
             </a:pPr>
             <a:r>
@@ -9076,7 +9948,7 @@
           <a:bodyPr wrap="square" lIns="0" tIns="0" rIns="0" bIns="0" rtlCol="0" anchor="ctr"/>
           <a:lstStyle/>
           <a:p>
-            <a:pPr algn="ctr" indent="0" marL="0">
+            <a:pPr marL="0" indent="0" algn="ctr">
               <a:buNone/>
             </a:pPr>
             <a:r>
@@ -9112,7 +9984,7 @@
           <a:bodyPr wrap="square" lIns="0" tIns="0" rIns="0" bIns="0" rtlCol="0" anchor="ctr"/>
           <a:lstStyle/>
           <a:p>
-            <a:pPr algn="ctr" indent="0" marL="0">
+            <a:pPr marL="0" indent="0" algn="ctr">
               <a:buNone/>
             </a:pPr>
             <a:r>
@@ -9148,7 +10020,7 @@
           <a:bodyPr wrap="square" lIns="0" tIns="0" rIns="0" bIns="0" rtlCol="0" anchor="t"/>
           <a:lstStyle/>
           <a:p>
-            <a:pPr algn="ctr" indent="0" marL="0">
+            <a:pPr marL="0" indent="0" algn="ctr">
               <a:buNone/>
             </a:pPr>
             <a:r>
@@ -9162,7 +10034,7 @@
             <a:endParaRPr lang="en-US" sz="1200" dirty="0"/>
           </a:p>
           <a:p>
-            <a:pPr algn="ctr" indent="0" marL="0">
+            <a:pPr marL="0" indent="0" algn="ctr">
               <a:buNone/>
             </a:pPr>
             <a:r>
@@ -9274,7 +10146,7 @@
           <a:bodyPr wrap="square" lIns="0" tIns="0" rIns="0" bIns="0" rtlCol="0" anchor="ctr"/>
           <a:lstStyle/>
           <a:p>
-            <a:pPr algn="ctr" indent="0" marL="0">
+            <a:pPr marL="0" indent="0" algn="ctr">
               <a:buNone/>
             </a:pPr>
             <a:r>
@@ -9310,7 +10182,7 @@
           <a:bodyPr wrap="square" lIns="0" tIns="0" rIns="0" bIns="0" rtlCol="0" anchor="ctr"/>
           <a:lstStyle/>
           <a:p>
-            <a:pPr algn="ctr" indent="0" marL="0">
+            <a:pPr marL="0" indent="0" algn="ctr">
               <a:buNone/>
             </a:pPr>
             <a:r>
@@ -9346,7 +10218,7 @@
           <a:bodyPr wrap="square" lIns="0" tIns="0" rIns="0" bIns="0" rtlCol="0" anchor="t"/>
           <a:lstStyle/>
           <a:p>
-            <a:pPr algn="ctr" indent="0" marL="0">
+            <a:pPr marL="0" indent="0" algn="ctr">
               <a:buNone/>
             </a:pPr>
             <a:r>
@@ -9360,7 +10232,7 @@
             <a:endParaRPr lang="en-US" sz="1200" dirty="0"/>
           </a:p>
           <a:p>
-            <a:pPr algn="ctr" indent="0" marL="0">
+            <a:pPr marL="0" indent="0" algn="ctr">
               <a:buNone/>
             </a:pPr>
             <a:r>
@@ -9472,7 +10344,7 @@
           <a:bodyPr wrap="square" lIns="0" tIns="0" rIns="0" bIns="0" rtlCol="0" anchor="ctr"/>
           <a:lstStyle/>
           <a:p>
-            <a:pPr algn="ctr" indent="0" marL="0">
+            <a:pPr marL="0" indent="0" algn="ctr">
               <a:buNone/>
             </a:pPr>
             <a:r>
@@ -9508,7 +10380,7 @@
           <a:bodyPr wrap="square" lIns="0" tIns="0" rIns="0" bIns="0" rtlCol="0" anchor="ctr"/>
           <a:lstStyle/>
           <a:p>
-            <a:pPr algn="ctr" indent="0" marL="0">
+            <a:pPr marL="0" indent="0" algn="ctr">
               <a:buNone/>
             </a:pPr>
             <a:r>
@@ -9544,7 +10416,7 @@
           <a:bodyPr wrap="square" lIns="0" tIns="0" rIns="0" bIns="0" rtlCol="0" anchor="t"/>
           <a:lstStyle/>
           <a:p>
-            <a:pPr algn="ctr" indent="0" marL="0">
+            <a:pPr marL="0" indent="0" algn="ctr">
               <a:buNone/>
             </a:pPr>
             <a:r>
@@ -9558,7 +10430,7 @@
             <a:endParaRPr lang="en-US" sz="1200" dirty="0"/>
           </a:p>
           <a:p>
-            <a:pPr algn="ctr" indent="0" marL="0">
+            <a:pPr marL="0" indent="0" algn="ctr">
               <a:buNone/>
             </a:pPr>
             <a:r>
@@ -9670,7 +10542,7 @@
           <a:bodyPr wrap="square" lIns="0" tIns="0" rIns="0" bIns="0" rtlCol="0" anchor="ctr"/>
           <a:lstStyle/>
           <a:p>
-            <a:pPr algn="ctr" indent="0" marL="0">
+            <a:pPr marL="0" indent="0" algn="ctr">
               <a:buNone/>
             </a:pPr>
             <a:r>
@@ -9706,7 +10578,7 @@
           <a:bodyPr wrap="square" lIns="0" tIns="0" rIns="0" bIns="0" rtlCol="0" anchor="ctr"/>
           <a:lstStyle/>
           <a:p>
-            <a:pPr algn="ctr" indent="0" marL="0">
+            <a:pPr marL="0" indent="0" algn="ctr">
               <a:buNone/>
             </a:pPr>
             <a:r>
@@ -9742,7 +10614,7 @@
           <a:bodyPr wrap="square" lIns="0" tIns="0" rIns="0" bIns="0" rtlCol="0" anchor="t"/>
           <a:lstStyle/>
           <a:p>
-            <a:pPr algn="ctr" indent="0" marL="0">
+            <a:pPr marL="0" indent="0" algn="ctr">
               <a:buNone/>
             </a:pPr>
             <a:r>
@@ -9756,7 +10628,7 @@
             <a:endParaRPr lang="en-US" sz="1200" dirty="0"/>
           </a:p>
           <a:p>
-            <a:pPr algn="ctr" indent="0" marL="0">
+            <a:pPr marL="0" indent="0" algn="ctr">
               <a:buNone/>
             </a:pPr>
             <a:r>
@@ -9792,7 +10664,7 @@
           <a:bodyPr wrap="square" lIns="0" tIns="0" rIns="0" bIns="0" rtlCol="0" anchor="ctr"/>
           <a:lstStyle/>
           <a:p>
-            <a:pPr indent="0" marL="0">
+            <a:pPr marL="0" indent="0">
               <a:buNone/>
             </a:pPr>
             <a:r>
@@ -9855,20 +10727,17 @@
           <a:bodyPr wrap="square" lIns="0" tIns="0" rIns="0" bIns="0" rtlCol="0" anchor="ctr"/>
           <a:lstStyle/>
           <a:p>
-            <a:pPr indent="0" marL="0">
-              <a:buNone/>
-            </a:pPr>
-            <a:r>
-              <a:rPr lang="en-US" sz="1000" b="1" spc="200" kern="0" dirty="0">
+            <a:pPr marL="0" indent="0">
+              <a:buNone/>
+            </a:pPr>
+            <a:r>
+              <a:rPr lang="en-US" sz="1000" b="1" kern="0" spc="200" dirty="0">
                 <a:solidFill>
                   <a:srgbClr val="D4824A"/>
                 </a:solidFill>
               </a:rPr>
               <a:t>KEY POINT  </a:t>
             </a:r>
-            <a:pPr indent="0" marL="0">
-              <a:buNone/>
-            </a:pPr>
             <a:r>
               <a:rPr lang="en-US" sz="1300" dirty="0">
                 <a:solidFill>
@@ -9883,7 +10752,7 @@
       </p:sp>
       <p:sp>
         <p:nvSpPr>
-          <p:cNvPr id="25" name="Slide Number Placeholder 0"/>
+          <p:cNvPr id="30" name="Slide Number Placeholder 0"/>
           <p:cNvSpPr>
             <a:spLocks noGrp="1"/>
           </p:cNvSpPr>
@@ -9901,7 +10770,7 @@
           </a:prstGeom>
           <a:extLst>
             <a:ext uri="{C572A759-6A51-4108-AA02-DFA0A04FC94B}">
-              <ma14:wrappingTextBoxFlag xmlns:ma14="http://schemas.microsoft.com/office/mac/drawingml/2011/main" val="0"/>
+              <ma14:wrappingTextBoxFlag xmlns:ma14="http://schemas.microsoft.com/office/mac/drawingml/2011/main" xmlns="" val="0"/>
             </a:ext>
           </a:extLst>
         </p:spPr>
@@ -9919,8 +10788,8 @@
           <a:p>
             <a:pPr algn="r"/>
             <a:fld id="{F7021451-1387-4CA6-816F-3879F97B5CBC}" type="slidenum">
-              <a:rPr b="0" lang="en-US"/>
-              <a:t>16</a:t>
+              <a:rPr lang="en-US" b="0"/>
+              <a:t>17</a:t>
             </a:fld>
             <a:endParaRPr lang="en-US"/>
           </a:p>
@@ -9934,7 +10803,7 @@
 </p:sld>
 </file>
 
-<file path=ppt/slides/slide17.xml><?xml version="1.0" encoding="utf-8"?>
+<file path=ppt/slides/slide18.xml><?xml version="1.0" encoding="utf-8"?>
 <p:sld xmlns:a="http://schemas.openxmlformats.org/drawingml/2006/main" xmlns:r="http://schemas.openxmlformats.org/officeDocument/2006/relationships" xmlns:p="http://schemas.openxmlformats.org/presentationml/2006/main">
   <p:cSld name="Slide 17">
     <p:spTree>
@@ -9972,11 +10841,11 @@
           <a:bodyPr wrap="square" lIns="0" tIns="0" rIns="0" bIns="0" rtlCol="0" anchor="ctr"/>
           <a:lstStyle/>
           <a:p>
-            <a:pPr indent="0" marL="0">
-              <a:buNone/>
-            </a:pPr>
-            <a:r>
-              <a:rPr lang="en-US" sz="1000" b="1" spc="300" kern="0" dirty="0">
+            <a:pPr marL="0" indent="0">
+              <a:buNone/>
+            </a:pPr>
+            <a:r>
+              <a:rPr lang="en-US" sz="1000" b="1" kern="0" spc="300" dirty="0">
                 <a:solidFill>
                   <a:srgbClr val="D4824A"/>
                 </a:solidFill>
@@ -9990,9 +10859,11 @@
       <p:sp>
         <p:nvSpPr>
           <p:cNvPr id="3" name="Text 1"/>
-          <p:cNvSpPr/>
+          <p:cNvSpPr>
+            <a:spLocks noGrp="1"/>
+          </p:cNvSpPr>
           <p:nvPr>
-            <p:ph idx="101" type="title" hasCustomPrompt="1"/>
+            <p:ph type="title" idx="101" hasCustomPrompt="1"/>
           </p:nvPr>
         </p:nvSpPr>
         <p:spPr>
@@ -10010,7 +10881,7 @@
           <a:bodyPr wrap="square" lIns="0" tIns="0" rIns="0" bIns="0" rtlCol="0" anchor="ctr"/>
           <a:lstStyle/>
           <a:p>
-            <a:pPr algn="l" indent="0" marL="0">
+            <a:pPr marL="0" indent="0" algn="l">
               <a:buNone/>
             </a:pPr>
             <a:r>
@@ -10073,7 +10944,7 @@
           <a:bodyPr wrap="square" lIns="0" tIns="0" rIns="0" bIns="0" rtlCol="0" anchor="ctr"/>
           <a:lstStyle/>
           <a:p>
-            <a:pPr indent="0" marL="0">
+            <a:pPr marL="0" indent="0">
               <a:buNone/>
             </a:pPr>
             <a:r>
@@ -10160,7 +11031,7 @@
           <a:bodyPr wrap="square" lIns="0" tIns="0" rIns="0" bIns="0" rtlCol="0" anchor="ctr"/>
           <a:lstStyle/>
           <a:p>
-            <a:pPr indent="0" marL="0">
+            <a:pPr marL="0" indent="0">
               <a:buNone/>
             </a:pPr>
             <a:r>
@@ -10223,7 +11094,7 @@
           <a:bodyPr wrap="square" lIns="0" tIns="0" rIns="0" bIns="0" rtlCol="0" anchor="ctr"/>
           <a:lstStyle/>
           <a:p>
-            <a:pPr indent="0" marL="0">
+            <a:pPr marL="0" indent="0">
               <a:buNone/>
             </a:pPr>
             <a:r>
@@ -10310,7 +11181,7 @@
           <a:bodyPr wrap="square" lIns="0" tIns="0" rIns="0" bIns="0" rtlCol="0" anchor="ctr"/>
           <a:lstStyle/>
           <a:p>
-            <a:pPr indent="0" marL="0">
+            <a:pPr marL="0" indent="0">
               <a:buNone/>
             </a:pPr>
             <a:r>
@@ -10373,7 +11244,7 @@
           <a:bodyPr wrap="square" lIns="0" tIns="0" rIns="0" bIns="0" rtlCol="0" anchor="ctr"/>
           <a:lstStyle/>
           <a:p>
-            <a:pPr indent="0" marL="0">
+            <a:pPr marL="0" indent="0">
               <a:buNone/>
             </a:pPr>
             <a:r>
@@ -10460,7 +11331,7 @@
           <a:bodyPr wrap="square" lIns="0" tIns="0" rIns="0" bIns="0" rtlCol="0" anchor="ctr"/>
           <a:lstStyle/>
           <a:p>
-            <a:pPr indent="0" marL="0">
+            <a:pPr marL="0" indent="0">
               <a:buNone/>
             </a:pPr>
             <a:r>
@@ -10523,7 +11394,7 @@
           <a:bodyPr wrap="square" lIns="0" tIns="0" rIns="0" bIns="0" rtlCol="0" anchor="ctr"/>
           <a:lstStyle/>
           <a:p>
-            <a:pPr indent="0" marL="0">
+            <a:pPr marL="0" indent="0">
               <a:buNone/>
             </a:pPr>
             <a:r>
@@ -10610,7 +11481,7 @@
           <a:bodyPr wrap="square" lIns="0" tIns="0" rIns="0" bIns="0" rtlCol="0" anchor="ctr"/>
           <a:lstStyle/>
           <a:p>
-            <a:pPr indent="0" marL="0">
+            <a:pPr marL="0" indent="0">
               <a:buNone/>
             </a:pPr>
             <a:r>
@@ -10645,7 +11516,7 @@
           </a:prstGeom>
           <a:extLst>
             <a:ext uri="{C572A759-6A51-4108-AA02-DFA0A04FC94B}">
-              <ma14:wrappingTextBoxFlag xmlns:ma14="http://schemas.microsoft.com/office/mac/drawingml/2011/main" val="0"/>
+              <ma14:wrappingTextBoxFlag xmlns:ma14="http://schemas.microsoft.com/office/mac/drawingml/2011/main" xmlns="" val="0"/>
             </a:ext>
           </a:extLst>
         </p:spPr>
@@ -10663,8 +11534,8 @@
           <a:p>
             <a:pPr algn="r"/>
             <a:fld id="{F7021451-1387-4CA6-816F-3879F97B5CBC}" type="slidenum">
-              <a:rPr b="0" lang="en-US"/>
-              <a:t>17</a:t>
+              <a:rPr lang="en-US" b="0"/>
+              <a:t>18</a:t>
             </a:fld>
             <a:endParaRPr lang="en-US"/>
           </a:p>
@@ -10678,7 +11549,7 @@
 </p:sld>
 </file>
 
-<file path=ppt/slides/slide18.xml><?xml version="1.0" encoding="utf-8"?>
+<file path=ppt/slides/slide19.xml><?xml version="1.0" encoding="utf-8"?>
 <p:sld xmlns:a="http://schemas.openxmlformats.org/drawingml/2006/main" xmlns:r="http://schemas.openxmlformats.org/officeDocument/2006/relationships" xmlns:p="http://schemas.openxmlformats.org/presentationml/2006/main">
   <p:cSld name="Slide 18">
     <p:spTree>
@@ -10716,11 +11587,11 @@
           <a:bodyPr wrap="square" lIns="0" tIns="0" rIns="0" bIns="0" rtlCol="0" anchor="ctr"/>
           <a:lstStyle/>
           <a:p>
-            <a:pPr indent="0" marL="0">
-              <a:buNone/>
-            </a:pPr>
-            <a:r>
-              <a:rPr lang="en-US" sz="1100" b="1" spc="400" kern="0" dirty="0">
+            <a:pPr marL="0" indent="0">
+              <a:buNone/>
+            </a:pPr>
+            <a:r>
+              <a:rPr lang="en-US" sz="1100" b="1" kern="0" spc="400" dirty="0">
                 <a:solidFill>
                   <a:srgbClr val="D4824A"/>
                 </a:solidFill>
@@ -10752,7 +11623,7 @@
           <a:bodyPr wrap="square" lIns="0" tIns="0" rIns="0" bIns="0" rtlCol="0" anchor="ctr"/>
           <a:lstStyle/>
           <a:p>
-            <a:pPr indent="0" marL="0">
+            <a:pPr marL="0" indent="0">
               <a:buNone/>
             </a:pPr>
             <a:r>
@@ -10840,7 +11711,7 @@
           <a:bodyPr wrap="square" lIns="0" tIns="0" rIns="0" bIns="0" rtlCol="0" anchor="ctr"/>
           <a:lstStyle/>
           <a:p>
-            <a:pPr algn="ctr" indent="0" marL="0">
+            <a:pPr marL="0" indent="0" algn="ctr">
               <a:buNone/>
             </a:pPr>
             <a:r>
@@ -10876,7 +11747,7 @@
           <a:bodyPr wrap="square" lIns="0" tIns="0" rIns="0" bIns="0" rtlCol="0" anchor="ctr"/>
           <a:lstStyle/>
           <a:p>
-            <a:pPr indent="0" marL="0">
+            <a:pPr marL="0" indent="0">
               <a:buNone/>
             </a:pPr>
             <a:r>
@@ -10912,7 +11783,7 @@
           <a:bodyPr wrap="square" lIns="0" tIns="0" rIns="0" bIns="0" rtlCol="0" anchor="t"/>
           <a:lstStyle/>
           <a:p>
-            <a:pPr indent="0" marL="0">
+            <a:pPr marL="0" indent="0">
               <a:buNone/>
             </a:pPr>
             <a:r>
@@ -11000,7 +11871,7 @@
           <a:bodyPr wrap="square" lIns="0" tIns="0" rIns="0" bIns="0" rtlCol="0" anchor="ctr"/>
           <a:lstStyle/>
           <a:p>
-            <a:pPr algn="ctr" indent="0" marL="0">
+            <a:pPr marL="0" indent="0" algn="ctr">
               <a:buNone/>
             </a:pPr>
             <a:r>
@@ -11036,7 +11907,7 @@
           <a:bodyPr wrap="square" lIns="0" tIns="0" rIns="0" bIns="0" rtlCol="0" anchor="ctr"/>
           <a:lstStyle/>
           <a:p>
-            <a:pPr indent="0" marL="0">
+            <a:pPr marL="0" indent="0">
               <a:buNone/>
             </a:pPr>
             <a:r>
@@ -11072,7 +11943,7 @@
           <a:bodyPr wrap="square" lIns="0" tIns="0" rIns="0" bIns="0" rtlCol="0" anchor="t"/>
           <a:lstStyle/>
           <a:p>
-            <a:pPr indent="0" marL="0">
+            <a:pPr marL="0" indent="0">
               <a:buNone/>
             </a:pPr>
             <a:r>
@@ -11160,7 +12031,7 @@
           <a:bodyPr wrap="square" lIns="0" tIns="0" rIns="0" bIns="0" rtlCol="0" anchor="ctr"/>
           <a:lstStyle/>
           <a:p>
-            <a:pPr algn="ctr" indent="0" marL="0">
+            <a:pPr marL="0" indent="0" algn="ctr">
               <a:buNone/>
             </a:pPr>
             <a:r>
@@ -11196,7 +12067,7 @@
           <a:bodyPr wrap="square" lIns="0" tIns="0" rIns="0" bIns="0" rtlCol="0" anchor="ctr"/>
           <a:lstStyle/>
           <a:p>
-            <a:pPr indent="0" marL="0">
+            <a:pPr marL="0" indent="0">
               <a:buNone/>
             </a:pPr>
             <a:r>
@@ -11232,7 +12103,7 @@
           <a:bodyPr wrap="square" lIns="0" tIns="0" rIns="0" bIns="0" rtlCol="0" anchor="t"/>
           <a:lstStyle/>
           <a:p>
-            <a:pPr indent="0" marL="0">
+            <a:pPr marL="0" indent="0">
               <a:buNone/>
             </a:pPr>
             <a:r>
@@ -11293,11 +12164,11 @@
           <a:bodyPr wrap="square" lIns="0" tIns="0" rIns="0" bIns="0" rtlCol="0" anchor="ctr"/>
           <a:lstStyle/>
           <a:p>
-            <a:pPr indent="0" marL="0">
-              <a:buNone/>
-            </a:pPr>
-            <a:r>
-              <a:rPr lang="en-US" sz="1000" b="1" spc="300" kern="0" dirty="0">
+            <a:pPr marL="0" indent="0">
+              <a:buNone/>
+            </a:pPr>
+            <a:r>
+              <a:rPr lang="en-US" sz="1000" b="1" kern="0" spc="300" dirty="0">
                 <a:solidFill>
                   <a:srgbClr val="D4824A"/>
                 </a:solidFill>
@@ -11311,9 +12182,11 @@
       <p:sp>
         <p:nvSpPr>
           <p:cNvPr id="3" name="Text 1"/>
-          <p:cNvSpPr/>
+          <p:cNvSpPr>
+            <a:spLocks noGrp="1"/>
+          </p:cNvSpPr>
           <p:nvPr>
-            <p:ph idx="101" type="title" hasCustomPrompt="1"/>
+            <p:ph type="title" idx="101" hasCustomPrompt="1"/>
           </p:nvPr>
         </p:nvSpPr>
         <p:spPr>
@@ -11331,7 +12204,7 @@
           <a:bodyPr wrap="square" lIns="0" tIns="0" rIns="0" bIns="0" rtlCol="0" anchor="ctr"/>
           <a:lstStyle/>
           <a:p>
-            <a:pPr algn="l" indent="0" marL="0">
+            <a:pPr marL="0" indent="0" algn="l">
               <a:buNone/>
             </a:pPr>
             <a:r>
@@ -11419,7 +12292,7 @@
           <a:bodyPr wrap="square" lIns="0" tIns="0" rIns="0" bIns="0" rtlCol="0" anchor="ctr"/>
           <a:lstStyle/>
           <a:p>
-            <a:pPr algn="ctr" indent="0" marL="0">
+            <a:pPr marL="0" indent="0" algn="ctr">
               <a:buNone/>
             </a:pPr>
             <a:r>
@@ -11455,7 +12328,7 @@
           <a:bodyPr wrap="square" lIns="0" tIns="0" rIns="0" bIns="0" rtlCol="0" anchor="t"/>
           <a:lstStyle/>
           <a:p>
-            <a:pPr indent="0" marL="0">
+            <a:pPr marL="0" indent="0">
               <a:buNone/>
             </a:pPr>
             <a:r>
@@ -11491,7 +12364,7 @@
           <a:bodyPr wrap="square" lIns="0" tIns="0" rIns="0" bIns="0" rtlCol="0" anchor="t"/>
           <a:lstStyle/>
           <a:p>
-            <a:pPr indent="0" marL="0">
+            <a:pPr marL="0" indent="0">
               <a:buNone/>
             </a:pPr>
             <a:r>
@@ -11603,7 +12476,7 @@
           <a:bodyPr wrap="square" lIns="0" tIns="0" rIns="0" bIns="0" rtlCol="0" anchor="ctr"/>
           <a:lstStyle/>
           <a:p>
-            <a:pPr algn="ctr" indent="0" marL="0">
+            <a:pPr marL="0" indent="0" algn="ctr">
               <a:buNone/>
             </a:pPr>
             <a:r>
@@ -11639,7 +12512,7 @@
           <a:bodyPr wrap="square" lIns="0" tIns="0" rIns="0" bIns="0" rtlCol="0" anchor="t"/>
           <a:lstStyle/>
           <a:p>
-            <a:pPr indent="0" marL="0">
+            <a:pPr marL="0" indent="0">
               <a:buNone/>
             </a:pPr>
             <a:r>
@@ -11675,7 +12548,7 @@
           <a:bodyPr wrap="square" lIns="0" tIns="0" rIns="0" bIns="0" rtlCol="0" anchor="t"/>
           <a:lstStyle/>
           <a:p>
-            <a:pPr indent="0" marL="0">
+            <a:pPr marL="0" indent="0">
               <a:buNone/>
             </a:pPr>
             <a:r>
@@ -11787,7 +12660,7 @@
           <a:bodyPr wrap="square" lIns="0" tIns="0" rIns="0" bIns="0" rtlCol="0" anchor="ctr"/>
           <a:lstStyle/>
           <a:p>
-            <a:pPr algn="ctr" indent="0" marL="0">
+            <a:pPr marL="0" indent="0" algn="ctr">
               <a:buNone/>
             </a:pPr>
             <a:r>
@@ -11823,7 +12696,7 @@
           <a:bodyPr wrap="square" lIns="0" tIns="0" rIns="0" bIns="0" rtlCol="0" anchor="t"/>
           <a:lstStyle/>
           <a:p>
-            <a:pPr indent="0" marL="0">
+            <a:pPr marL="0" indent="0">
               <a:buNone/>
             </a:pPr>
             <a:r>
@@ -11859,7 +12732,7 @@
           <a:bodyPr wrap="square" lIns="0" tIns="0" rIns="0" bIns="0" rtlCol="0" anchor="t"/>
           <a:lstStyle/>
           <a:p>
-            <a:pPr indent="0" marL="0">
+            <a:pPr marL="0" indent="0">
               <a:buNone/>
             </a:pPr>
             <a:r>
@@ -11971,7 +12844,7 @@
           <a:bodyPr wrap="square" lIns="0" tIns="0" rIns="0" bIns="0" rtlCol="0" anchor="ctr"/>
           <a:lstStyle/>
           <a:p>
-            <a:pPr algn="ctr" indent="0" marL="0">
+            <a:pPr marL="0" indent="0" algn="ctr">
               <a:buNone/>
             </a:pPr>
             <a:r>
@@ -12007,7 +12880,7 @@
           <a:bodyPr wrap="square" lIns="0" tIns="0" rIns="0" bIns="0" rtlCol="0" anchor="t"/>
           <a:lstStyle/>
           <a:p>
-            <a:pPr indent="0" marL="0">
+            <a:pPr marL="0" indent="0">
               <a:buNone/>
             </a:pPr>
             <a:r>
@@ -12043,7 +12916,7 @@
           <a:bodyPr wrap="square" lIns="0" tIns="0" rIns="0" bIns="0" rtlCol="0" anchor="t"/>
           <a:lstStyle/>
           <a:p>
-            <a:pPr indent="0" marL="0">
+            <a:pPr marL="0" indent="0">
               <a:buNone/>
             </a:pPr>
             <a:r>
@@ -12079,7 +12952,7 @@
           <a:bodyPr wrap="square" lIns="0" tIns="0" rIns="0" bIns="0" rtlCol="0" anchor="ctr"/>
           <a:lstStyle/>
           <a:p>
-            <a:pPr indent="0" marL="0">
+            <a:pPr marL="0" indent="0">
               <a:buNone/>
             </a:pPr>
             <a:r>
@@ -12096,7 +12969,7 @@
       </p:sp>
       <p:sp>
         <p:nvSpPr>
-          <p:cNvPr id="25" name="Slide Number Placeholder 0"/>
+          <p:cNvPr id="28" name="Slide Number Placeholder 0"/>
           <p:cNvSpPr>
             <a:spLocks noGrp="1"/>
           </p:cNvSpPr>
@@ -12114,7 +12987,7 @@
           </a:prstGeom>
           <a:extLst>
             <a:ext uri="{C572A759-6A51-4108-AA02-DFA0A04FC94B}">
-              <ma14:wrappingTextBoxFlag xmlns:ma14="http://schemas.microsoft.com/office/mac/drawingml/2011/main" val="0"/>
+              <ma14:wrappingTextBoxFlag xmlns:ma14="http://schemas.microsoft.com/office/mac/drawingml/2011/main" xmlns="" val="0"/>
             </a:ext>
           </a:extLst>
         </p:spPr>
@@ -12132,7 +13005,7 @@
           <a:p>
             <a:pPr algn="r"/>
             <a:fld id="{F7021451-1387-4CA6-816F-3879F97B5CBC}" type="slidenum">
-              <a:rPr b="0" lang="en-US"/>
+              <a:rPr lang="en-US" b="0"/>
               <a:t>2</a:t>
             </a:fld>
             <a:endParaRPr lang="en-US"/>
@@ -12148,6 +13021,66 @@
 </file>
 
 <file path=ppt/slides/slide3.xml><?xml version="1.0" encoding="utf-8"?>
+<p:sld xmlns:a="http://schemas.openxmlformats.org/drawingml/2006/main" xmlns:r="http://schemas.openxmlformats.org/officeDocument/2006/relationships" xmlns:p="http://schemas.openxmlformats.org/presentationml/2006/main">
+  <p:cSld>
+    <p:spTree>
+      <p:nvGrpSpPr>
+        <p:cNvPr id="1" name=""/>
+        <p:cNvGrpSpPr/>
+        <p:nvPr/>
+      </p:nvGrpSpPr>
+      <p:grpSpPr>
+        <a:xfrm>
+          <a:off x="0" y="0"/>
+          <a:ext cx="0" cy="0"/>
+          <a:chOff x="0" y="0"/>
+          <a:chExt cx="0" cy="0"/>
+        </a:xfrm>
+      </p:grpSpPr>
+      <p:pic>
+        <p:nvPicPr>
+          <p:cNvPr id="6" name="Picture 5">
+            <a:extLst>
+              <a:ext uri="{FF2B5EF4-FFF2-40B4-BE49-F238E27FC236}">
+                <a16:creationId xmlns:a16="http://schemas.microsoft.com/office/drawing/2014/main" id="{4A8EDAA3-4EEB-453C-5316-4EFA8B8D51B4}"/>
+              </a:ext>
+            </a:extLst>
+          </p:cNvPr>
+          <p:cNvPicPr>
+            <a:picLocks noChangeAspect="1"/>
+          </p:cNvPicPr>
+          <p:nvPr/>
+        </p:nvPicPr>
+        <p:blipFill>
+          <a:blip r:embed="rId2"/>
+          <a:stretch>
+            <a:fillRect/>
+          </a:stretch>
+        </p:blipFill>
+        <p:spPr>
+          <a:xfrm>
+            <a:off x="0" y="285750"/>
+            <a:ext cx="9144000" cy="4572000"/>
+          </a:xfrm>
+          <a:prstGeom prst="rect">
+            <a:avLst/>
+          </a:prstGeom>
+        </p:spPr>
+      </p:pic>
+    </p:spTree>
+    <p:extLst>
+      <p:ext uri="{BB962C8B-B14F-4D97-AF65-F5344CB8AC3E}">
+        <p14:creationId xmlns:p14="http://schemas.microsoft.com/office/powerpoint/2010/main" val="3661996025"/>
+      </p:ext>
+    </p:extLst>
+  </p:cSld>
+  <p:clrMapOvr>
+    <a:masterClrMapping/>
+  </p:clrMapOvr>
+</p:sld>
+</file>
+
+<file path=ppt/slides/slide4.xml><?xml version="1.0" encoding="utf-8"?>
 <p:sld xmlns:a="http://schemas.openxmlformats.org/drawingml/2006/main" xmlns:r="http://schemas.openxmlformats.org/officeDocument/2006/relationships" xmlns:p="http://schemas.openxmlformats.org/presentationml/2006/main">
   <p:cSld name="Slide 3">
     <p:spTree>
@@ -12185,11 +13118,11 @@
           <a:bodyPr wrap="square" lIns="0" tIns="0" rIns="0" bIns="0" rtlCol="0" anchor="ctr"/>
           <a:lstStyle/>
           <a:p>
-            <a:pPr indent="0" marL="0">
-              <a:buNone/>
-            </a:pPr>
-            <a:r>
-              <a:rPr lang="en-US" sz="1000" b="1" spc="300" kern="0" dirty="0">
+            <a:pPr marL="0" indent="0">
+              <a:buNone/>
+            </a:pPr>
+            <a:r>
+              <a:rPr lang="en-US" sz="1000" b="1" kern="0" spc="300" dirty="0">
                 <a:solidFill>
                   <a:srgbClr val="D4824A"/>
                 </a:solidFill>
@@ -12203,9 +13136,11 @@
       <p:sp>
         <p:nvSpPr>
           <p:cNvPr id="3" name="Text 1"/>
-          <p:cNvSpPr/>
+          <p:cNvSpPr>
+            <a:spLocks noGrp="1"/>
+          </p:cNvSpPr>
           <p:nvPr>
-            <p:ph idx="101" type="title" hasCustomPrompt="1"/>
+            <p:ph type="title" idx="101" hasCustomPrompt="1"/>
           </p:nvPr>
         </p:nvSpPr>
         <p:spPr>
@@ -12223,7 +13158,7 @@
           <a:bodyPr wrap="square" lIns="0" tIns="0" rIns="0" bIns="0" rtlCol="0" anchor="ctr"/>
           <a:lstStyle/>
           <a:p>
-            <a:pPr algn="l" indent="0" marL="0">
+            <a:pPr marL="0" indent="0" algn="l">
               <a:buNone/>
             </a:pPr>
             <a:r>
@@ -12284,7 +13219,7 @@
           <a:bodyPr wrap="square" lIns="0" tIns="0" rIns="0" bIns="0" rtlCol="0" anchor="ctr"/>
           <a:lstStyle/>
           <a:p>
-            <a:pPr algn="ctr" indent="0" marL="0">
+            <a:pPr marL="0" indent="0" algn="ctr">
               <a:buNone/>
             </a:pPr>
             <a:r>
@@ -12320,7 +13255,7 @@
           <a:bodyPr wrap="square" lIns="0" tIns="0" rIns="0" bIns="0" rtlCol="0" anchor="t"/>
           <a:lstStyle/>
           <a:p>
-            <a:pPr indent="0" marL="0">
+            <a:pPr marL="0" indent="0">
               <a:spcAft>
                 <a:spcPts val="200"/>
               </a:spcAft>
@@ -12337,7 +13272,7 @@
             <a:endParaRPr lang="en-US" sz="1500" dirty="0"/>
           </a:p>
           <a:p>
-            <a:pPr indent="0" marL="0">
+            <a:pPr marL="0" indent="0">
               <a:spcAft>
                 <a:spcPts val="200"/>
               </a:spcAft>
@@ -12401,7 +13336,7 @@
           <a:bodyPr wrap="square" lIns="0" tIns="0" rIns="0" bIns="0" rtlCol="0" anchor="ctr"/>
           <a:lstStyle/>
           <a:p>
-            <a:pPr algn="ctr" indent="0" marL="0">
+            <a:pPr marL="0" indent="0" algn="ctr">
               <a:buNone/>
             </a:pPr>
             <a:r>
@@ -12437,7 +13372,7 @@
           <a:bodyPr wrap="square" lIns="0" tIns="0" rIns="0" bIns="0" rtlCol="0" anchor="t"/>
           <a:lstStyle/>
           <a:p>
-            <a:pPr indent="0" marL="0">
+            <a:pPr marL="0" indent="0">
               <a:spcAft>
                 <a:spcPts val="200"/>
               </a:spcAft>
@@ -12454,7 +13389,7 @@
             <a:endParaRPr lang="en-US" sz="1500" dirty="0"/>
           </a:p>
           <a:p>
-            <a:pPr indent="0" marL="0">
+            <a:pPr marL="0" indent="0">
               <a:spcAft>
                 <a:spcPts val="200"/>
               </a:spcAft>
@@ -12518,7 +13453,7 @@
           <a:bodyPr wrap="square" lIns="0" tIns="0" rIns="0" bIns="0" rtlCol="0" anchor="ctr"/>
           <a:lstStyle/>
           <a:p>
-            <a:pPr algn="ctr" indent="0" marL="0">
+            <a:pPr marL="0" indent="0" algn="ctr">
               <a:buNone/>
             </a:pPr>
             <a:r>
@@ -12554,7 +13489,7 @@
           <a:bodyPr wrap="square" lIns="0" tIns="0" rIns="0" bIns="0" rtlCol="0" anchor="t"/>
           <a:lstStyle/>
           <a:p>
-            <a:pPr indent="0" marL="0">
+            <a:pPr marL="0" indent="0">
               <a:spcAft>
                 <a:spcPts val="200"/>
               </a:spcAft>
@@ -12571,7 +13506,7 @@
             <a:endParaRPr lang="en-US" sz="1500" dirty="0"/>
           </a:p>
           <a:p>
-            <a:pPr indent="0" marL="0">
+            <a:pPr marL="0" indent="0">
               <a:spcAft>
                 <a:spcPts val="200"/>
               </a:spcAft>
@@ -12635,7 +13570,7 @@
           <a:bodyPr wrap="square" lIns="0" tIns="0" rIns="0" bIns="0" rtlCol="0" anchor="ctr"/>
           <a:lstStyle/>
           <a:p>
-            <a:pPr algn="ctr" indent="0" marL="0">
+            <a:pPr marL="0" indent="0" algn="ctr">
               <a:buNone/>
             </a:pPr>
             <a:r>
@@ -12671,7 +13606,7 @@
           <a:bodyPr wrap="square" lIns="0" tIns="0" rIns="0" bIns="0" rtlCol="0" anchor="t"/>
           <a:lstStyle/>
           <a:p>
-            <a:pPr indent="0" marL="0">
+            <a:pPr marL="0" indent="0">
               <a:spcAft>
                 <a:spcPts val="200"/>
               </a:spcAft>
@@ -12688,7 +13623,7 @@
             <a:endParaRPr lang="en-US" sz="1500" dirty="0"/>
           </a:p>
           <a:p>
-            <a:pPr indent="0" marL="0">
+            <a:pPr marL="0" indent="0">
               <a:spcAft>
                 <a:spcPts val="200"/>
               </a:spcAft>
@@ -12754,20 +13689,17 @@
           <a:bodyPr wrap="square" lIns="0" tIns="0" rIns="0" bIns="0" rtlCol="0" anchor="ctr"/>
           <a:lstStyle/>
           <a:p>
-            <a:pPr indent="0" marL="0">
-              <a:buNone/>
-            </a:pPr>
-            <a:r>
-              <a:rPr lang="en-US" sz="1000" b="1" spc="200" kern="0" dirty="0">
+            <a:pPr marL="0" indent="0">
+              <a:buNone/>
+            </a:pPr>
+            <a:r>
+              <a:rPr lang="en-US" sz="1000" b="1" kern="0" spc="200" dirty="0">
                 <a:solidFill>
                   <a:srgbClr val="D4824A"/>
                 </a:solidFill>
               </a:rPr>
               <a:t>KEY POINT  </a:t>
             </a:r>
-            <a:pPr indent="0" marL="0">
-              <a:buNone/>
-            </a:pPr>
             <a:r>
               <a:rPr lang="en-US" sz="1300" dirty="0">
                 <a:solidFill>
@@ -12828,20 +13760,17 @@
           <a:bodyPr wrap="square" lIns="0" tIns="0" rIns="0" bIns="0" rtlCol="0" anchor="ctr"/>
           <a:lstStyle/>
           <a:p>
-            <a:pPr indent="0" marL="0">
-              <a:buNone/>
-            </a:pPr>
-            <a:r>
-              <a:rPr lang="en-US" sz="900" b="1" spc="200" kern="0" dirty="0">
+            <a:pPr marL="0" indent="0">
+              <a:buNone/>
+            </a:pPr>
+            <a:r>
+              <a:rPr lang="en-US" sz="900" b="1" kern="0" spc="200" dirty="0">
                 <a:solidFill>
                   <a:srgbClr val="D4824A"/>
                 </a:solidFill>
               </a:rPr>
               <a:t>EXAMPLE  </a:t>
             </a:r>
-            <a:pPr indent="0" marL="0">
-              <a:buNone/>
-            </a:pPr>
             <a:r>
               <a:rPr lang="en-US" sz="1200" b="1" dirty="0">
                 <a:solidFill>
@@ -12875,7 +13804,7 @@
           <a:bodyPr wrap="square" lIns="0" tIns="0" rIns="0" bIns="0" rtlCol="0" anchor="t"/>
           <a:lstStyle/>
           <a:p>
-            <a:pPr indent="0" marL="0">
+            <a:pPr marL="0" indent="0">
               <a:lnSpc>
                 <a:spcPct val="100000"/>
               </a:lnSpc>
@@ -12895,7 +13824,7 @@
             <a:endParaRPr lang="en-US" sz="1050" dirty="0"/>
           </a:p>
           <a:p>
-            <a:pPr indent="0" marL="0">
+            <a:pPr marL="0" indent="0">
               <a:lnSpc>
                 <a:spcPct val="100000"/>
               </a:lnSpc>
@@ -12915,7 +13844,7 @@
             <a:endParaRPr lang="en-US" sz="1050" dirty="0"/>
           </a:p>
           <a:p>
-            <a:pPr indent="0" marL="0">
+            <a:pPr marL="0" indent="0">
               <a:lnSpc>
                 <a:spcPct val="100000"/>
               </a:lnSpc>
@@ -12935,7 +13864,7 @@
             <a:endParaRPr lang="en-US" sz="1050" dirty="0"/>
           </a:p>
           <a:p>
-            <a:pPr indent="0" marL="0">
+            <a:pPr marL="0" indent="0">
               <a:lnSpc>
                 <a:spcPct val="100000"/>
               </a:lnSpc>
@@ -12955,7 +13884,7 @@
             <a:endParaRPr lang="en-US" sz="1050" dirty="0"/>
           </a:p>
           <a:p>
-            <a:pPr indent="0" marL="0">
+            <a:pPr marL="0" indent="0">
               <a:lnSpc>
                 <a:spcPct val="100000"/>
               </a:lnSpc>
@@ -12975,7 +13904,7 @@
             <a:endParaRPr lang="en-US" sz="1050" dirty="0"/>
           </a:p>
           <a:p>
-            <a:pPr indent="0" marL="0">
+            <a:pPr marL="0" indent="0">
               <a:lnSpc>
                 <a:spcPct val="100000"/>
               </a:lnSpc>
@@ -12995,7 +13924,7 @@
             <a:endParaRPr lang="en-US" sz="1050" dirty="0"/>
           </a:p>
           <a:p>
-            <a:pPr indent="0" marL="0">
+            <a:pPr marL="0" indent="0">
               <a:lnSpc>
                 <a:spcPct val="100000"/>
               </a:lnSpc>
@@ -13015,7 +13944,7 @@
             <a:endParaRPr lang="en-US" sz="1050" dirty="0"/>
           </a:p>
           <a:p>
-            <a:pPr indent="0" marL="0">
+            <a:pPr marL="0" indent="0">
               <a:lnSpc>
                 <a:spcPct val="100000"/>
               </a:lnSpc>
@@ -13035,7 +13964,7 @@
             <a:endParaRPr lang="en-US" sz="1050" dirty="0"/>
           </a:p>
           <a:p>
-            <a:pPr indent="0" marL="0">
+            <a:pPr marL="0" indent="0">
               <a:lnSpc>
                 <a:spcPct val="100000"/>
               </a:lnSpc>
@@ -13055,7 +13984,7 @@
             <a:endParaRPr lang="en-US" sz="1050" dirty="0"/>
           </a:p>
           <a:p>
-            <a:pPr indent="0" marL="0">
+            <a:pPr marL="0" indent="0">
               <a:lnSpc>
                 <a:spcPct val="100000"/>
               </a:lnSpc>
@@ -13064,7 +13993,7 @@
             <a:endParaRPr lang="en-US" sz="1050" dirty="0"/>
           </a:p>
           <a:p>
-            <a:pPr indent="0" marL="0">
+            <a:pPr marL="0" indent="0">
               <a:lnSpc>
                 <a:spcPct val="100000"/>
               </a:lnSpc>
@@ -13084,7 +14013,7 @@
             <a:endParaRPr lang="en-US" sz="1050" dirty="0"/>
           </a:p>
           <a:p>
-            <a:pPr indent="0" marL="0">
+            <a:pPr marL="0" indent="0">
               <a:lnSpc>
                 <a:spcPct val="100000"/>
               </a:lnSpc>
@@ -13125,7 +14054,7 @@
           </a:prstGeom>
           <a:extLst>
             <a:ext uri="{C572A759-6A51-4108-AA02-DFA0A04FC94B}">
-              <ma14:wrappingTextBoxFlag xmlns:ma14="http://schemas.microsoft.com/office/mac/drawingml/2011/main" val="0"/>
+              <ma14:wrappingTextBoxFlag xmlns:ma14="http://schemas.microsoft.com/office/mac/drawingml/2011/main" xmlns="" val="0"/>
             </a:ext>
           </a:extLst>
         </p:spPr>
@@ -13143,8 +14072,8 @@
           <a:p>
             <a:pPr algn="r"/>
             <a:fld id="{F7021451-1387-4CA6-816F-3879F97B5CBC}" type="slidenum">
-              <a:rPr b="0" lang="en-US"/>
-              <a:t>3</a:t>
+              <a:rPr lang="en-US" b="0"/>
+              <a:t>4</a:t>
             </a:fld>
             <a:endParaRPr lang="en-US"/>
           </a:p>
@@ -13158,7 +14087,7 @@
 </p:sld>
 </file>
 
-<file path=ppt/slides/slide4.xml><?xml version="1.0" encoding="utf-8"?>
+<file path=ppt/slides/slide5.xml><?xml version="1.0" encoding="utf-8"?>
 <p:sld xmlns:a="http://schemas.openxmlformats.org/drawingml/2006/main" xmlns:r="http://schemas.openxmlformats.org/officeDocument/2006/relationships" xmlns:p="http://schemas.openxmlformats.org/presentationml/2006/main">
   <p:cSld name="Slide 4">
     <p:spTree>
@@ -13196,11 +14125,11 @@
           <a:bodyPr wrap="square" lIns="0" tIns="0" rIns="0" bIns="0" rtlCol="0" anchor="ctr"/>
           <a:lstStyle/>
           <a:p>
-            <a:pPr indent="0" marL="0">
-              <a:buNone/>
-            </a:pPr>
-            <a:r>
-              <a:rPr lang="en-US" sz="1000" b="1" spc="300" kern="0" dirty="0">
+            <a:pPr marL="0" indent="0">
+              <a:buNone/>
+            </a:pPr>
+            <a:r>
+              <a:rPr lang="en-US" sz="1000" b="1" kern="0" spc="300" dirty="0">
                 <a:solidFill>
                   <a:srgbClr val="D4824A"/>
                 </a:solidFill>
@@ -13214,9 +14143,11 @@
       <p:sp>
         <p:nvSpPr>
           <p:cNvPr id="3" name="Text 1"/>
-          <p:cNvSpPr/>
+          <p:cNvSpPr>
+            <a:spLocks noGrp="1"/>
+          </p:cNvSpPr>
           <p:nvPr>
-            <p:ph idx="101" type="title" hasCustomPrompt="1"/>
+            <p:ph type="title" idx="101" hasCustomPrompt="1"/>
           </p:nvPr>
         </p:nvSpPr>
         <p:spPr>
@@ -13234,7 +14165,7 @@
           <a:bodyPr wrap="square" lIns="0" tIns="0" rIns="0" bIns="0" rtlCol="0" anchor="ctr"/>
           <a:lstStyle/>
           <a:p>
-            <a:pPr algn="l" indent="0" marL="0">
+            <a:pPr marL="0" indent="0" algn="l">
               <a:buNone/>
             </a:pPr>
             <a:r>
@@ -13295,7 +14226,7 @@
           <a:bodyPr wrap="square" lIns="0" tIns="0" rIns="0" bIns="0" rtlCol="0" anchor="ctr"/>
           <a:lstStyle/>
           <a:p>
-            <a:pPr algn="ctr" indent="0" marL="0">
+            <a:pPr marL="0" indent="0" algn="ctr">
               <a:buNone/>
             </a:pPr>
             <a:r>
@@ -13331,7 +14262,7 @@
           <a:bodyPr wrap="square" lIns="0" tIns="0" rIns="0" bIns="0" rtlCol="0" anchor="t"/>
           <a:lstStyle/>
           <a:p>
-            <a:pPr indent="0" marL="0">
+            <a:pPr marL="0" indent="0">
               <a:spcAft>
                 <a:spcPts val="200"/>
               </a:spcAft>
@@ -13348,7 +14279,7 @@
             <a:endParaRPr lang="en-US" sz="1500" dirty="0"/>
           </a:p>
           <a:p>
-            <a:pPr indent="0" marL="0">
+            <a:pPr marL="0" indent="0">
               <a:spcAft>
                 <a:spcPts val="200"/>
               </a:spcAft>
@@ -13412,7 +14343,7 @@
           <a:bodyPr wrap="square" lIns="0" tIns="0" rIns="0" bIns="0" rtlCol="0" anchor="ctr"/>
           <a:lstStyle/>
           <a:p>
-            <a:pPr algn="ctr" indent="0" marL="0">
+            <a:pPr marL="0" indent="0" algn="ctr">
               <a:buNone/>
             </a:pPr>
             <a:r>
@@ -13448,7 +14379,7 @@
           <a:bodyPr wrap="square" lIns="0" tIns="0" rIns="0" bIns="0" rtlCol="0" anchor="t"/>
           <a:lstStyle/>
           <a:p>
-            <a:pPr indent="0" marL="0">
+            <a:pPr marL="0" indent="0">
               <a:spcAft>
                 <a:spcPts val="200"/>
               </a:spcAft>
@@ -13465,7 +14396,7 @@
             <a:endParaRPr lang="en-US" sz="1500" dirty="0"/>
           </a:p>
           <a:p>
-            <a:pPr indent="0" marL="0">
+            <a:pPr marL="0" indent="0">
               <a:spcAft>
                 <a:spcPts val="200"/>
               </a:spcAft>
@@ -13529,7 +14460,7 @@
           <a:bodyPr wrap="square" lIns="0" tIns="0" rIns="0" bIns="0" rtlCol="0" anchor="ctr"/>
           <a:lstStyle/>
           <a:p>
-            <a:pPr algn="ctr" indent="0" marL="0">
+            <a:pPr marL="0" indent="0" algn="ctr">
               <a:buNone/>
             </a:pPr>
             <a:r>
@@ -13565,7 +14496,7 @@
           <a:bodyPr wrap="square" lIns="0" tIns="0" rIns="0" bIns="0" rtlCol="0" anchor="t"/>
           <a:lstStyle/>
           <a:p>
-            <a:pPr indent="0" marL="0">
+            <a:pPr marL="0" indent="0">
               <a:spcAft>
                 <a:spcPts val="200"/>
               </a:spcAft>
@@ -13582,7 +14513,7 @@
             <a:endParaRPr lang="en-US" sz="1500" dirty="0"/>
           </a:p>
           <a:p>
-            <a:pPr indent="0" marL="0">
+            <a:pPr marL="0" indent="0">
               <a:spcAft>
                 <a:spcPts val="200"/>
               </a:spcAft>
@@ -13646,7 +14577,7 @@
           <a:bodyPr wrap="square" lIns="0" tIns="0" rIns="0" bIns="0" rtlCol="0" anchor="ctr"/>
           <a:lstStyle/>
           <a:p>
-            <a:pPr algn="ctr" indent="0" marL="0">
+            <a:pPr marL="0" indent="0" algn="ctr">
               <a:buNone/>
             </a:pPr>
             <a:r>
@@ -13682,7 +14613,7 @@
           <a:bodyPr wrap="square" lIns="0" tIns="0" rIns="0" bIns="0" rtlCol="0" anchor="t"/>
           <a:lstStyle/>
           <a:p>
-            <a:pPr indent="0" marL="0">
+            <a:pPr marL="0" indent="0">
               <a:spcAft>
                 <a:spcPts val="200"/>
               </a:spcAft>
@@ -13699,7 +14630,7 @@
             <a:endParaRPr lang="en-US" sz="1500" dirty="0"/>
           </a:p>
           <a:p>
-            <a:pPr indent="0" marL="0">
+            <a:pPr marL="0" indent="0">
               <a:spcAft>
                 <a:spcPts val="200"/>
               </a:spcAft>
@@ -13765,20 +14696,17 @@
           <a:bodyPr wrap="square" lIns="0" tIns="0" rIns="0" bIns="0" rtlCol="0" anchor="ctr"/>
           <a:lstStyle/>
           <a:p>
-            <a:pPr indent="0" marL="0">
-              <a:buNone/>
-            </a:pPr>
-            <a:r>
-              <a:rPr lang="en-US" sz="1000" b="1" spc="200" kern="0" dirty="0">
+            <a:pPr marL="0" indent="0">
+              <a:buNone/>
+            </a:pPr>
+            <a:r>
+              <a:rPr lang="en-US" sz="1000" b="1" kern="0" spc="200" dirty="0">
                 <a:solidFill>
                   <a:srgbClr val="D4824A"/>
                 </a:solidFill>
               </a:rPr>
               <a:t>KEY POINT  </a:t>
             </a:r>
-            <a:pPr indent="0" marL="0">
-              <a:buNone/>
-            </a:pPr>
             <a:r>
               <a:rPr lang="en-US" sz="1300" dirty="0">
                 <a:solidFill>
@@ -13839,20 +14767,17 @@
           <a:bodyPr wrap="square" lIns="0" tIns="0" rIns="0" bIns="0" rtlCol="0" anchor="ctr"/>
           <a:lstStyle/>
           <a:p>
-            <a:pPr indent="0" marL="0">
-              <a:buNone/>
-            </a:pPr>
-            <a:r>
-              <a:rPr lang="en-US" sz="900" b="1" spc="200" kern="0" dirty="0">
+            <a:pPr marL="0" indent="0">
+              <a:buNone/>
+            </a:pPr>
+            <a:r>
+              <a:rPr lang="en-US" sz="900" b="1" kern="0" spc="200" dirty="0">
                 <a:solidFill>
                   <a:srgbClr val="D4824A"/>
                 </a:solidFill>
               </a:rPr>
               <a:t>EXAMPLE  </a:t>
             </a:r>
-            <a:pPr indent="0" marL="0">
-              <a:buNone/>
-            </a:pPr>
             <a:r>
               <a:rPr lang="en-US" sz="1200" b="1" dirty="0">
                 <a:solidFill>
@@ -13886,7 +14811,7 @@
           <a:bodyPr wrap="square" lIns="0" tIns="0" rIns="0" bIns="0" rtlCol="0" anchor="t"/>
           <a:lstStyle/>
           <a:p>
-            <a:pPr indent="0" marL="0">
+            <a:pPr marL="0" indent="0">
               <a:lnSpc>
                 <a:spcPct val="100000"/>
               </a:lnSpc>
@@ -13906,7 +14831,7 @@
             <a:endParaRPr lang="en-US" sz="1050" dirty="0"/>
           </a:p>
           <a:p>
-            <a:pPr indent="0" marL="0">
+            <a:pPr marL="0" indent="0">
               <a:lnSpc>
                 <a:spcPct val="100000"/>
               </a:lnSpc>
@@ -13926,7 +14851,7 @@
             <a:endParaRPr lang="en-US" sz="1050" dirty="0"/>
           </a:p>
           <a:p>
-            <a:pPr indent="0" marL="0">
+            <a:pPr marL="0" indent="0">
               <a:lnSpc>
                 <a:spcPct val="100000"/>
               </a:lnSpc>
@@ -13946,7 +14871,7 @@
             <a:endParaRPr lang="en-US" sz="1050" dirty="0"/>
           </a:p>
           <a:p>
-            <a:pPr indent="0" marL="0">
+            <a:pPr marL="0" indent="0">
               <a:lnSpc>
                 <a:spcPct val="100000"/>
               </a:lnSpc>
@@ -13966,7 +14891,7 @@
             <a:endParaRPr lang="en-US" sz="1050" dirty="0"/>
           </a:p>
           <a:p>
-            <a:pPr indent="0" marL="0">
+            <a:pPr marL="0" indent="0">
               <a:lnSpc>
                 <a:spcPct val="100000"/>
               </a:lnSpc>
@@ -13986,7 +14911,7 @@
             <a:endParaRPr lang="en-US" sz="1050" dirty="0"/>
           </a:p>
           <a:p>
-            <a:pPr indent="0" marL="0">
+            <a:pPr marL="0" indent="0">
               <a:lnSpc>
                 <a:spcPct val="100000"/>
               </a:lnSpc>
@@ -13995,7 +14920,7 @@
             <a:endParaRPr lang="en-US" sz="1050" dirty="0"/>
           </a:p>
           <a:p>
-            <a:pPr indent="0" marL="0">
+            <a:pPr marL="0" indent="0">
               <a:lnSpc>
                 <a:spcPct val="100000"/>
               </a:lnSpc>
@@ -14015,7 +14940,7 @@
             <a:endParaRPr lang="en-US" sz="1050" dirty="0"/>
           </a:p>
           <a:p>
-            <a:pPr indent="0" marL="0">
+            <a:pPr marL="0" indent="0">
               <a:lnSpc>
                 <a:spcPct val="100000"/>
               </a:lnSpc>
@@ -14035,7 +14960,7 @@
             <a:endParaRPr lang="en-US" sz="1050" dirty="0"/>
           </a:p>
           <a:p>
-            <a:pPr indent="0" marL="0">
+            <a:pPr marL="0" indent="0">
               <a:lnSpc>
                 <a:spcPct val="100000"/>
               </a:lnSpc>
@@ -14055,7 +14980,7 @@
             <a:endParaRPr lang="en-US" sz="1050" dirty="0"/>
           </a:p>
           <a:p>
-            <a:pPr indent="0" marL="0">
+            <a:pPr marL="0" indent="0">
               <a:lnSpc>
                 <a:spcPct val="100000"/>
               </a:lnSpc>
@@ -14064,7 +14989,7 @@
             <a:endParaRPr lang="en-US" sz="1050" dirty="0"/>
           </a:p>
           <a:p>
-            <a:pPr indent="0" marL="0">
+            <a:pPr marL="0" indent="0">
               <a:lnSpc>
                 <a:spcPct val="100000"/>
               </a:lnSpc>
@@ -14084,7 +15009,7 @@
             <a:endParaRPr lang="en-US" sz="1050" dirty="0"/>
           </a:p>
           <a:p>
-            <a:pPr indent="0" marL="0">
+            <a:pPr marL="0" indent="0">
               <a:lnSpc>
                 <a:spcPct val="100000"/>
               </a:lnSpc>
@@ -14104,7 +15029,7 @@
             <a:endParaRPr lang="en-US" sz="1050" dirty="0"/>
           </a:p>
           <a:p>
-            <a:pPr indent="0" marL="0">
+            <a:pPr marL="0" indent="0">
               <a:lnSpc>
                 <a:spcPct val="100000"/>
               </a:lnSpc>
@@ -14124,7 +15049,7 @@
             <a:endParaRPr lang="en-US" sz="1050" dirty="0"/>
           </a:p>
           <a:p>
-            <a:pPr indent="0" marL="0">
+            <a:pPr marL="0" indent="0">
               <a:lnSpc>
                 <a:spcPct val="100000"/>
               </a:lnSpc>
@@ -14165,7 +15090,7 @@
           </a:prstGeom>
           <a:extLst>
             <a:ext uri="{C572A759-6A51-4108-AA02-DFA0A04FC94B}">
-              <ma14:wrappingTextBoxFlag xmlns:ma14="http://schemas.microsoft.com/office/mac/drawingml/2011/main" val="0"/>
+              <ma14:wrappingTextBoxFlag xmlns:ma14="http://schemas.microsoft.com/office/mac/drawingml/2011/main" xmlns="" val="0"/>
             </a:ext>
           </a:extLst>
         </p:spPr>
@@ -14183,8 +15108,8 @@
           <a:p>
             <a:pPr algn="r"/>
             <a:fld id="{F7021451-1387-4CA6-816F-3879F97B5CBC}" type="slidenum">
-              <a:rPr b="0" lang="en-US"/>
-              <a:t>4</a:t>
+              <a:rPr lang="en-US" b="0"/>
+              <a:t>5</a:t>
             </a:fld>
             <a:endParaRPr lang="en-US"/>
           </a:p>
@@ -14198,7 +15123,7 @@
 </p:sld>
 </file>
 
-<file path=ppt/slides/slide5.xml><?xml version="1.0" encoding="utf-8"?>
+<file path=ppt/slides/slide6.xml><?xml version="1.0" encoding="utf-8"?>
 <p:sld xmlns:a="http://schemas.openxmlformats.org/drawingml/2006/main" xmlns:r="http://schemas.openxmlformats.org/officeDocument/2006/relationships" xmlns:p="http://schemas.openxmlformats.org/presentationml/2006/main">
   <p:cSld name="Slide 5">
     <p:spTree>
@@ -14236,11 +15161,11 @@
           <a:bodyPr wrap="square" lIns="0" tIns="0" rIns="0" bIns="0" rtlCol="0" anchor="ctr"/>
           <a:lstStyle/>
           <a:p>
-            <a:pPr indent="0" marL="0">
-              <a:buNone/>
-            </a:pPr>
-            <a:r>
-              <a:rPr lang="en-US" sz="1000" b="1" spc="300" kern="0" dirty="0">
+            <a:pPr marL="0" indent="0">
+              <a:buNone/>
+            </a:pPr>
+            <a:r>
+              <a:rPr lang="en-US" sz="1000" b="1" kern="0" spc="300" dirty="0">
                 <a:solidFill>
                   <a:srgbClr val="D4824A"/>
                 </a:solidFill>
@@ -14254,9 +15179,11 @@
       <p:sp>
         <p:nvSpPr>
           <p:cNvPr id="3" name="Text 1"/>
-          <p:cNvSpPr/>
+          <p:cNvSpPr>
+            <a:spLocks noGrp="1"/>
+          </p:cNvSpPr>
           <p:nvPr>
-            <p:ph idx="101" type="title" hasCustomPrompt="1"/>
+            <p:ph type="title" idx="101" hasCustomPrompt="1"/>
           </p:nvPr>
         </p:nvSpPr>
         <p:spPr>
@@ -14274,7 +15201,7 @@
           <a:bodyPr wrap="square" lIns="0" tIns="0" rIns="0" bIns="0" rtlCol="0" anchor="ctr"/>
           <a:lstStyle/>
           <a:p>
-            <a:pPr algn="l" indent="0" marL="0">
+            <a:pPr marL="0" indent="0" algn="l">
               <a:buNone/>
             </a:pPr>
             <a:r>
@@ -14335,7 +15262,7 @@
           <a:bodyPr wrap="square" lIns="0" tIns="0" rIns="0" bIns="0" rtlCol="0" anchor="ctr"/>
           <a:lstStyle/>
           <a:p>
-            <a:pPr algn="ctr" indent="0" marL="0">
+            <a:pPr marL="0" indent="0" algn="ctr">
               <a:buNone/>
             </a:pPr>
             <a:r>
@@ -14371,7 +15298,7 @@
           <a:bodyPr wrap="square" lIns="0" tIns="0" rIns="0" bIns="0" rtlCol="0" anchor="t"/>
           <a:lstStyle/>
           <a:p>
-            <a:pPr indent="0" marL="0">
+            <a:pPr marL="0" indent="0">
               <a:spcAft>
                 <a:spcPts val="200"/>
               </a:spcAft>
@@ -14388,7 +15315,7 @@
             <a:endParaRPr lang="en-US" sz="1500" dirty="0"/>
           </a:p>
           <a:p>
-            <a:pPr indent="0" marL="0">
+            <a:pPr marL="0" indent="0">
               <a:spcAft>
                 <a:spcPts val="200"/>
               </a:spcAft>
@@ -14452,7 +15379,7 @@
           <a:bodyPr wrap="square" lIns="0" tIns="0" rIns="0" bIns="0" rtlCol="0" anchor="ctr"/>
           <a:lstStyle/>
           <a:p>
-            <a:pPr algn="ctr" indent="0" marL="0">
+            <a:pPr marL="0" indent="0" algn="ctr">
               <a:buNone/>
             </a:pPr>
             <a:r>
@@ -14488,7 +15415,7 @@
           <a:bodyPr wrap="square" lIns="0" tIns="0" rIns="0" bIns="0" rtlCol="0" anchor="t"/>
           <a:lstStyle/>
           <a:p>
-            <a:pPr indent="0" marL="0">
+            <a:pPr marL="0" indent="0">
               <a:spcAft>
                 <a:spcPts val="200"/>
               </a:spcAft>
@@ -14505,7 +15432,7 @@
             <a:endParaRPr lang="en-US" sz="1500" dirty="0"/>
           </a:p>
           <a:p>
-            <a:pPr indent="0" marL="0">
+            <a:pPr marL="0" indent="0">
               <a:spcAft>
                 <a:spcPts val="200"/>
               </a:spcAft>
@@ -14569,7 +15496,7 @@
           <a:bodyPr wrap="square" lIns="0" tIns="0" rIns="0" bIns="0" rtlCol="0" anchor="ctr"/>
           <a:lstStyle/>
           <a:p>
-            <a:pPr algn="ctr" indent="0" marL="0">
+            <a:pPr marL="0" indent="0" algn="ctr">
               <a:buNone/>
             </a:pPr>
             <a:r>
@@ -14605,7 +15532,7 @@
           <a:bodyPr wrap="square" lIns="0" tIns="0" rIns="0" bIns="0" rtlCol="0" anchor="t"/>
           <a:lstStyle/>
           <a:p>
-            <a:pPr indent="0" marL="0">
+            <a:pPr marL="0" indent="0">
               <a:spcAft>
                 <a:spcPts val="200"/>
               </a:spcAft>
@@ -14622,7 +15549,7 @@
             <a:endParaRPr lang="en-US" sz="1500" dirty="0"/>
           </a:p>
           <a:p>
-            <a:pPr indent="0" marL="0">
+            <a:pPr marL="0" indent="0">
               <a:spcAft>
                 <a:spcPts val="200"/>
               </a:spcAft>
@@ -14686,7 +15613,7 @@
           <a:bodyPr wrap="square" lIns="0" tIns="0" rIns="0" bIns="0" rtlCol="0" anchor="ctr"/>
           <a:lstStyle/>
           <a:p>
-            <a:pPr algn="ctr" indent="0" marL="0">
+            <a:pPr marL="0" indent="0" algn="ctr">
               <a:buNone/>
             </a:pPr>
             <a:r>
@@ -14722,7 +15649,7 @@
           <a:bodyPr wrap="square" lIns="0" tIns="0" rIns="0" bIns="0" rtlCol="0" anchor="t"/>
           <a:lstStyle/>
           <a:p>
-            <a:pPr indent="0" marL="0">
+            <a:pPr marL="0" indent="0">
               <a:spcAft>
                 <a:spcPts val="200"/>
               </a:spcAft>
@@ -14739,7 +15666,7 @@
             <a:endParaRPr lang="en-US" sz="1500" dirty="0"/>
           </a:p>
           <a:p>
-            <a:pPr indent="0" marL="0">
+            <a:pPr marL="0" indent="0">
               <a:spcAft>
                 <a:spcPts val="200"/>
               </a:spcAft>
@@ -14805,20 +15732,17 @@
           <a:bodyPr wrap="square" lIns="0" tIns="0" rIns="0" bIns="0" rtlCol="0" anchor="ctr"/>
           <a:lstStyle/>
           <a:p>
-            <a:pPr indent="0" marL="0">
-              <a:buNone/>
-            </a:pPr>
-            <a:r>
-              <a:rPr lang="en-US" sz="1000" b="1" spc="200" kern="0" dirty="0">
+            <a:pPr marL="0" indent="0">
+              <a:buNone/>
+            </a:pPr>
+            <a:r>
+              <a:rPr lang="en-US" sz="1000" b="1" kern="0" spc="200" dirty="0">
                 <a:solidFill>
                   <a:srgbClr val="D4824A"/>
                 </a:solidFill>
               </a:rPr>
               <a:t>KEY POINT  </a:t>
             </a:r>
-            <a:pPr indent="0" marL="0">
-              <a:buNone/>
-            </a:pPr>
             <a:r>
               <a:rPr lang="en-US" sz="1300" dirty="0">
                 <a:solidFill>
@@ -14879,20 +15803,17 @@
           <a:bodyPr wrap="square" lIns="0" tIns="0" rIns="0" bIns="0" rtlCol="0" anchor="ctr"/>
           <a:lstStyle/>
           <a:p>
-            <a:pPr indent="0" marL="0">
-              <a:buNone/>
-            </a:pPr>
-            <a:r>
-              <a:rPr lang="en-US" sz="900" b="1" spc="200" kern="0" dirty="0">
+            <a:pPr marL="0" indent="0">
+              <a:buNone/>
+            </a:pPr>
+            <a:r>
+              <a:rPr lang="en-US" sz="900" b="1" kern="0" spc="200" dirty="0">
                 <a:solidFill>
                   <a:srgbClr val="D4824A"/>
                 </a:solidFill>
               </a:rPr>
               <a:t>EXAMPLE  </a:t>
             </a:r>
-            <a:pPr indent="0" marL="0">
-              <a:buNone/>
-            </a:pPr>
             <a:r>
               <a:rPr lang="en-US" sz="1200" b="1" dirty="0">
                 <a:solidFill>
@@ -14926,7 +15847,7 @@
           <a:bodyPr wrap="square" lIns="0" tIns="0" rIns="0" bIns="0" rtlCol="0" anchor="t"/>
           <a:lstStyle/>
           <a:p>
-            <a:pPr indent="0" marL="0">
+            <a:pPr marL="0" indent="0">
               <a:lnSpc>
                 <a:spcPct val="100000"/>
               </a:lnSpc>
@@ -14946,7 +15867,7 @@
             <a:endParaRPr lang="en-US" sz="1050" dirty="0"/>
           </a:p>
           <a:p>
-            <a:pPr indent="0" marL="0">
+            <a:pPr marL="0" indent="0">
               <a:lnSpc>
                 <a:spcPct val="100000"/>
               </a:lnSpc>
@@ -14966,7 +15887,7 @@
             <a:endParaRPr lang="en-US" sz="1050" dirty="0"/>
           </a:p>
           <a:p>
-            <a:pPr indent="0" marL="0">
+            <a:pPr marL="0" indent="0">
               <a:lnSpc>
                 <a:spcPct val="100000"/>
               </a:lnSpc>
@@ -14986,7 +15907,7 @@
             <a:endParaRPr lang="en-US" sz="1050" dirty="0"/>
           </a:p>
           <a:p>
-            <a:pPr indent="0" marL="0">
+            <a:pPr marL="0" indent="0">
               <a:lnSpc>
                 <a:spcPct val="100000"/>
               </a:lnSpc>
@@ -15006,7 +15927,7 @@
             <a:endParaRPr lang="en-US" sz="1050" dirty="0"/>
           </a:p>
           <a:p>
-            <a:pPr indent="0" marL="0">
+            <a:pPr marL="0" indent="0">
               <a:lnSpc>
                 <a:spcPct val="100000"/>
               </a:lnSpc>
@@ -15026,7 +15947,7 @@
             <a:endParaRPr lang="en-US" sz="1050" dirty="0"/>
           </a:p>
           <a:p>
-            <a:pPr indent="0" marL="0">
+            <a:pPr marL="0" indent="0">
               <a:lnSpc>
                 <a:spcPct val="100000"/>
               </a:lnSpc>
@@ -15046,7 +15967,7 @@
             <a:endParaRPr lang="en-US" sz="1050" dirty="0"/>
           </a:p>
           <a:p>
-            <a:pPr indent="0" marL="0">
+            <a:pPr marL="0" indent="0">
               <a:lnSpc>
                 <a:spcPct val="100000"/>
               </a:lnSpc>
@@ -15066,7 +15987,7 @@
             <a:endParaRPr lang="en-US" sz="1050" dirty="0"/>
           </a:p>
           <a:p>
-            <a:pPr indent="0" marL="0">
+            <a:pPr marL="0" indent="0">
               <a:lnSpc>
                 <a:spcPct val="100000"/>
               </a:lnSpc>
@@ -15075,7 +15996,7 @@
             <a:endParaRPr lang="en-US" sz="1050" dirty="0"/>
           </a:p>
           <a:p>
-            <a:pPr indent="0" marL="0">
+            <a:pPr marL="0" indent="0">
               <a:lnSpc>
                 <a:spcPct val="100000"/>
               </a:lnSpc>
@@ -15095,7 +16016,7 @@
             <a:endParaRPr lang="en-US" sz="1050" dirty="0"/>
           </a:p>
           <a:p>
-            <a:pPr indent="0" marL="0">
+            <a:pPr marL="0" indent="0">
               <a:lnSpc>
                 <a:spcPct val="100000"/>
               </a:lnSpc>
@@ -15115,7 +16036,7 @@
             <a:endParaRPr lang="en-US" sz="1050" dirty="0"/>
           </a:p>
           <a:p>
-            <a:pPr indent="0" marL="0">
+            <a:pPr marL="0" indent="0">
               <a:lnSpc>
                 <a:spcPct val="100000"/>
               </a:lnSpc>
@@ -15135,7 +16056,7 @@
             <a:endParaRPr lang="en-US" sz="1050" dirty="0"/>
           </a:p>
           <a:p>
-            <a:pPr indent="0" marL="0">
+            <a:pPr marL="0" indent="0">
               <a:lnSpc>
                 <a:spcPct val="100000"/>
               </a:lnSpc>
@@ -15144,7 +16065,7 @@
             <a:endParaRPr lang="en-US" sz="1050" dirty="0"/>
           </a:p>
           <a:p>
-            <a:pPr indent="0" marL="0">
+            <a:pPr marL="0" indent="0">
               <a:lnSpc>
                 <a:spcPct val="100000"/>
               </a:lnSpc>
@@ -15164,7 +16085,7 @@
             <a:endParaRPr lang="en-US" sz="1050" dirty="0"/>
           </a:p>
           <a:p>
-            <a:pPr indent="0" marL="0">
+            <a:pPr marL="0" indent="0">
               <a:lnSpc>
                 <a:spcPct val="100000"/>
               </a:lnSpc>
@@ -15205,7 +16126,7 @@
           </a:prstGeom>
           <a:extLst>
             <a:ext uri="{C572A759-6A51-4108-AA02-DFA0A04FC94B}">
-              <ma14:wrappingTextBoxFlag xmlns:ma14="http://schemas.microsoft.com/office/mac/drawingml/2011/main" val="0"/>
+              <ma14:wrappingTextBoxFlag xmlns:ma14="http://schemas.microsoft.com/office/mac/drawingml/2011/main" xmlns="" val="0"/>
             </a:ext>
           </a:extLst>
         </p:spPr>
@@ -15223,8 +16144,8 @@
           <a:p>
             <a:pPr algn="r"/>
             <a:fld id="{F7021451-1387-4CA6-816F-3879F97B5CBC}" type="slidenum">
-              <a:rPr b="0" lang="en-US"/>
-              <a:t>5</a:t>
+              <a:rPr lang="en-US" b="0"/>
+              <a:t>6</a:t>
             </a:fld>
             <a:endParaRPr lang="en-US"/>
           </a:p>
@@ -15238,7 +16159,7 @@
 </p:sld>
 </file>
 
-<file path=ppt/slides/slide6.xml><?xml version="1.0" encoding="utf-8"?>
+<file path=ppt/slides/slide7.xml><?xml version="1.0" encoding="utf-8"?>
 <p:sld xmlns:a="http://schemas.openxmlformats.org/drawingml/2006/main" xmlns:r="http://schemas.openxmlformats.org/officeDocument/2006/relationships" xmlns:p="http://schemas.openxmlformats.org/presentationml/2006/main">
   <p:cSld name="Slide 6">
     <p:spTree>
@@ -15276,11 +16197,11 @@
           <a:bodyPr wrap="square" lIns="0" tIns="0" rIns="0" bIns="0" rtlCol="0" anchor="ctr"/>
           <a:lstStyle/>
           <a:p>
-            <a:pPr indent="0" marL="0">
-              <a:buNone/>
-            </a:pPr>
-            <a:r>
-              <a:rPr lang="en-US" sz="1000" b="1" spc="300" kern="0" dirty="0">
+            <a:pPr marL="0" indent="0">
+              <a:buNone/>
+            </a:pPr>
+            <a:r>
+              <a:rPr lang="en-US" sz="1000" b="1" kern="0" spc="300" dirty="0">
                 <a:solidFill>
                   <a:srgbClr val="D4824A"/>
                 </a:solidFill>
@@ -15294,9 +16215,11 @@
       <p:sp>
         <p:nvSpPr>
           <p:cNvPr id="3" name="Text 1"/>
-          <p:cNvSpPr/>
+          <p:cNvSpPr>
+            <a:spLocks noGrp="1"/>
+          </p:cNvSpPr>
           <p:nvPr>
-            <p:ph idx="101" type="title" hasCustomPrompt="1"/>
+            <p:ph type="title" idx="101" hasCustomPrompt="1"/>
           </p:nvPr>
         </p:nvSpPr>
         <p:spPr>
@@ -15314,7 +16237,7 @@
           <a:bodyPr wrap="square" lIns="0" tIns="0" rIns="0" bIns="0" rtlCol="0" anchor="ctr"/>
           <a:lstStyle/>
           <a:p>
-            <a:pPr algn="l" indent="0" marL="0">
+            <a:pPr marL="0" indent="0" algn="l">
               <a:buNone/>
             </a:pPr>
             <a:r>
@@ -15402,7 +16325,7 @@
           <a:bodyPr wrap="square" lIns="0" tIns="0" rIns="0" bIns="0" rtlCol="0" anchor="ctr"/>
           <a:lstStyle/>
           <a:p>
-            <a:pPr algn="ctr" indent="0" marL="0">
+            <a:pPr marL="0" indent="0" algn="ctr">
               <a:buNone/>
             </a:pPr>
             <a:r>
@@ -15438,7 +16361,7 @@
           <a:bodyPr wrap="square" lIns="0" tIns="0" rIns="0" bIns="0" rtlCol="0" anchor="ctr"/>
           <a:lstStyle/>
           <a:p>
-            <a:pPr algn="ctr" indent="0" marL="0">
+            <a:pPr marL="0" indent="0" algn="ctr">
               <a:buNone/>
             </a:pPr>
             <a:r>
@@ -15474,7 +16397,7 @@
           <a:bodyPr wrap="square" lIns="0" tIns="0" rIns="0" bIns="0" rtlCol="0" anchor="t"/>
           <a:lstStyle/>
           <a:p>
-            <a:pPr algn="ctr" indent="0" marL="0">
+            <a:pPr marL="0" indent="0" algn="ctr">
               <a:buNone/>
             </a:pPr>
             <a:r>
@@ -15586,7 +16509,7 @@
           <a:bodyPr wrap="square" lIns="0" tIns="0" rIns="0" bIns="0" rtlCol="0" anchor="ctr"/>
           <a:lstStyle/>
           <a:p>
-            <a:pPr algn="ctr" indent="0" marL="0">
+            <a:pPr marL="0" indent="0" algn="ctr">
               <a:buNone/>
             </a:pPr>
             <a:r>
@@ -15622,7 +16545,7 @@
           <a:bodyPr wrap="square" lIns="0" tIns="0" rIns="0" bIns="0" rtlCol="0" anchor="ctr"/>
           <a:lstStyle/>
           <a:p>
-            <a:pPr algn="ctr" indent="0" marL="0">
+            <a:pPr marL="0" indent="0" algn="ctr">
               <a:buNone/>
             </a:pPr>
             <a:r>
@@ -15658,7 +16581,7 @@
           <a:bodyPr wrap="square" lIns="0" tIns="0" rIns="0" bIns="0" rtlCol="0" anchor="t"/>
           <a:lstStyle/>
           <a:p>
-            <a:pPr algn="ctr" indent="0" marL="0">
+            <a:pPr marL="0" indent="0" algn="ctr">
               <a:buNone/>
             </a:pPr>
             <a:r>
@@ -15770,7 +16693,7 @@
           <a:bodyPr wrap="square" lIns="0" tIns="0" rIns="0" bIns="0" rtlCol="0" anchor="ctr"/>
           <a:lstStyle/>
           <a:p>
-            <a:pPr algn="ctr" indent="0" marL="0">
+            <a:pPr marL="0" indent="0" algn="ctr">
               <a:buNone/>
             </a:pPr>
             <a:r>
@@ -15806,7 +16729,7 @@
           <a:bodyPr wrap="square" lIns="0" tIns="0" rIns="0" bIns="0" rtlCol="0" anchor="ctr"/>
           <a:lstStyle/>
           <a:p>
-            <a:pPr algn="ctr" indent="0" marL="0">
+            <a:pPr marL="0" indent="0" algn="ctr">
               <a:buNone/>
             </a:pPr>
             <a:r>
@@ -15842,7 +16765,7 @@
           <a:bodyPr wrap="square" lIns="0" tIns="0" rIns="0" bIns="0" rtlCol="0" anchor="t"/>
           <a:lstStyle/>
           <a:p>
-            <a:pPr algn="ctr" indent="0" marL="0">
+            <a:pPr marL="0" indent="0" algn="ctr">
               <a:buNone/>
             </a:pPr>
             <a:r>
@@ -15905,20 +16828,17 @@
           <a:bodyPr wrap="square" lIns="0" tIns="0" rIns="0" bIns="0" rtlCol="0" anchor="ctr"/>
           <a:lstStyle/>
           <a:p>
-            <a:pPr indent="0" marL="0">
-              <a:buNone/>
-            </a:pPr>
-            <a:r>
-              <a:rPr lang="en-US" sz="1000" b="1" spc="200" kern="0" dirty="0">
+            <a:pPr marL="0" indent="0">
+              <a:buNone/>
+            </a:pPr>
+            <a:r>
+              <a:rPr lang="en-US" sz="1000" b="1" kern="0" spc="200" dirty="0">
                 <a:solidFill>
                   <a:srgbClr val="D4824A"/>
                 </a:solidFill>
               </a:rPr>
               <a:t>KEY POINT  </a:t>
             </a:r>
-            <a:pPr indent="0" marL="0">
-              <a:buNone/>
-            </a:pPr>
             <a:r>
               <a:rPr lang="en-US" sz="1300" dirty="0">
                 <a:solidFill>
@@ -15951,7 +16871,7 @@
           </a:prstGeom>
           <a:extLst>
             <a:ext uri="{C572A759-6A51-4108-AA02-DFA0A04FC94B}">
-              <ma14:wrappingTextBoxFlag xmlns:ma14="http://schemas.microsoft.com/office/mac/drawingml/2011/main" val="0"/>
+              <ma14:wrappingTextBoxFlag xmlns:ma14="http://schemas.microsoft.com/office/mac/drawingml/2011/main" xmlns="" val="0"/>
             </a:ext>
           </a:extLst>
         </p:spPr>
@@ -15969,8 +16889,8 @@
           <a:p>
             <a:pPr algn="r"/>
             <a:fld id="{F7021451-1387-4CA6-816F-3879F97B5CBC}" type="slidenum">
-              <a:rPr b="0" lang="en-US"/>
-              <a:t>6</a:t>
+              <a:rPr lang="en-US" b="0"/>
+              <a:t>7</a:t>
             </a:fld>
             <a:endParaRPr lang="en-US"/>
           </a:p>
@@ -15984,7 +16904,7 @@
 </p:sld>
 </file>
 
-<file path=ppt/slides/slide7.xml><?xml version="1.0" encoding="utf-8"?>
+<file path=ppt/slides/slide8.xml><?xml version="1.0" encoding="utf-8"?>
 <p:sld xmlns:a="http://schemas.openxmlformats.org/drawingml/2006/main" xmlns:r="http://schemas.openxmlformats.org/officeDocument/2006/relationships" xmlns:p="http://schemas.openxmlformats.org/presentationml/2006/main">
   <p:cSld name="Slide 7">
     <p:spTree>
@@ -16022,11 +16942,11 @@
           <a:bodyPr wrap="square" lIns="0" tIns="0" rIns="0" bIns="0" rtlCol="0" anchor="ctr"/>
           <a:lstStyle/>
           <a:p>
-            <a:pPr indent="0" marL="0">
-              <a:buNone/>
-            </a:pPr>
-            <a:r>
-              <a:rPr lang="en-US" sz="1000" b="1" spc="300" kern="0" dirty="0">
+            <a:pPr marL="0" indent="0">
+              <a:buNone/>
+            </a:pPr>
+            <a:r>
+              <a:rPr lang="en-US" sz="1000" b="1" kern="0" spc="300" dirty="0">
                 <a:solidFill>
                   <a:srgbClr val="D4824A"/>
                 </a:solidFill>
@@ -16040,9 +16960,11 @@
       <p:sp>
         <p:nvSpPr>
           <p:cNvPr id="3" name="Text 1"/>
-          <p:cNvSpPr/>
+          <p:cNvSpPr>
+            <a:spLocks noGrp="1"/>
+          </p:cNvSpPr>
           <p:nvPr>
-            <p:ph idx="101" type="title" hasCustomPrompt="1"/>
+            <p:ph type="title" idx="101" hasCustomPrompt="1"/>
           </p:nvPr>
         </p:nvSpPr>
         <p:spPr>
@@ -16060,7 +16982,7 @@
           <a:bodyPr wrap="square" lIns="0" tIns="0" rIns="0" bIns="0" rtlCol="0" anchor="ctr"/>
           <a:lstStyle/>
           <a:p>
-            <a:pPr algn="l" indent="0" marL="0">
+            <a:pPr marL="0" indent="0" algn="l">
               <a:buNone/>
             </a:pPr>
             <a:r>
@@ -16121,7 +17043,7 @@
           <a:bodyPr wrap="square" lIns="0" tIns="0" rIns="0" bIns="0" rtlCol="0" anchor="ctr"/>
           <a:lstStyle/>
           <a:p>
-            <a:pPr algn="ctr" indent="0" marL="0">
+            <a:pPr marL="0" indent="0" algn="ctr">
               <a:buNone/>
             </a:pPr>
             <a:r>
@@ -16157,7 +17079,7 @@
           <a:bodyPr wrap="square" lIns="0" tIns="0" rIns="0" bIns="0" rtlCol="0" anchor="t"/>
           <a:lstStyle/>
           <a:p>
-            <a:pPr indent="0" marL="0">
+            <a:pPr marL="0" indent="0">
               <a:spcAft>
                 <a:spcPts val="200"/>
               </a:spcAft>
@@ -16174,7 +17096,7 @@
             <a:endParaRPr lang="en-US" sz="1500" dirty="0"/>
           </a:p>
           <a:p>
-            <a:pPr indent="0" marL="0">
+            <a:pPr marL="0" indent="0">
               <a:spcAft>
                 <a:spcPts val="200"/>
               </a:spcAft>
@@ -16238,7 +17160,7 @@
           <a:bodyPr wrap="square" lIns="0" tIns="0" rIns="0" bIns="0" rtlCol="0" anchor="ctr"/>
           <a:lstStyle/>
           <a:p>
-            <a:pPr algn="ctr" indent="0" marL="0">
+            <a:pPr marL="0" indent="0" algn="ctr">
               <a:buNone/>
             </a:pPr>
             <a:r>
@@ -16274,7 +17196,7 @@
           <a:bodyPr wrap="square" lIns="0" tIns="0" rIns="0" bIns="0" rtlCol="0" anchor="t"/>
           <a:lstStyle/>
           <a:p>
-            <a:pPr indent="0" marL="0">
+            <a:pPr marL="0" indent="0">
               <a:spcAft>
                 <a:spcPts val="200"/>
               </a:spcAft>
@@ -16291,7 +17213,7 @@
             <a:endParaRPr lang="en-US" sz="1500" dirty="0"/>
           </a:p>
           <a:p>
-            <a:pPr indent="0" marL="0">
+            <a:pPr marL="0" indent="0">
               <a:spcAft>
                 <a:spcPts val="200"/>
               </a:spcAft>
@@ -16355,7 +17277,7 @@
           <a:bodyPr wrap="square" lIns="0" tIns="0" rIns="0" bIns="0" rtlCol="0" anchor="ctr"/>
           <a:lstStyle/>
           <a:p>
-            <a:pPr algn="ctr" indent="0" marL="0">
+            <a:pPr marL="0" indent="0" algn="ctr">
               <a:buNone/>
             </a:pPr>
             <a:r>
@@ -16391,7 +17313,7 @@
           <a:bodyPr wrap="square" lIns="0" tIns="0" rIns="0" bIns="0" rtlCol="0" anchor="t"/>
           <a:lstStyle/>
           <a:p>
-            <a:pPr indent="0" marL="0">
+            <a:pPr marL="0" indent="0">
               <a:spcAft>
                 <a:spcPts val="200"/>
               </a:spcAft>
@@ -16408,7 +17330,7 @@
             <a:endParaRPr lang="en-US" sz="1500" dirty="0"/>
           </a:p>
           <a:p>
-            <a:pPr indent="0" marL="0">
+            <a:pPr marL="0" indent="0">
               <a:spcAft>
                 <a:spcPts val="200"/>
               </a:spcAft>
@@ -16472,7 +17394,7 @@
           <a:bodyPr wrap="square" lIns="0" tIns="0" rIns="0" bIns="0" rtlCol="0" anchor="ctr"/>
           <a:lstStyle/>
           <a:p>
-            <a:pPr algn="ctr" indent="0" marL="0">
+            <a:pPr marL="0" indent="0" algn="ctr">
               <a:buNone/>
             </a:pPr>
             <a:r>
@@ -16508,7 +17430,7 @@
           <a:bodyPr wrap="square" lIns="0" tIns="0" rIns="0" bIns="0" rtlCol="0" anchor="t"/>
           <a:lstStyle/>
           <a:p>
-            <a:pPr indent="0" marL="0">
+            <a:pPr marL="0" indent="0">
               <a:spcAft>
                 <a:spcPts val="200"/>
               </a:spcAft>
@@ -16525,7 +17447,7 @@
             <a:endParaRPr lang="en-US" sz="1500" dirty="0"/>
           </a:p>
           <a:p>
-            <a:pPr indent="0" marL="0">
+            <a:pPr marL="0" indent="0">
               <a:spcAft>
                 <a:spcPts val="200"/>
               </a:spcAft>
@@ -16591,20 +17513,17 @@
           <a:bodyPr wrap="square" lIns="0" tIns="0" rIns="0" bIns="0" rtlCol="0" anchor="ctr"/>
           <a:lstStyle/>
           <a:p>
-            <a:pPr indent="0" marL="0">
-              <a:buNone/>
-            </a:pPr>
-            <a:r>
-              <a:rPr lang="en-US" sz="1000" b="1" spc="200" kern="0" dirty="0">
+            <a:pPr marL="0" indent="0">
+              <a:buNone/>
+            </a:pPr>
+            <a:r>
+              <a:rPr lang="en-US" sz="1000" b="1" kern="0" spc="200" dirty="0">
                 <a:solidFill>
                   <a:srgbClr val="D4824A"/>
                 </a:solidFill>
               </a:rPr>
               <a:t>KEY POINT  </a:t>
             </a:r>
-            <a:pPr indent="0" marL="0">
-              <a:buNone/>
-            </a:pPr>
             <a:r>
               <a:rPr lang="en-US" sz="1300" dirty="0">
                 <a:solidFill>
@@ -16665,20 +17584,17 @@
           <a:bodyPr wrap="square" lIns="0" tIns="0" rIns="0" bIns="0" rtlCol="0" anchor="ctr"/>
           <a:lstStyle/>
           <a:p>
-            <a:pPr indent="0" marL="0">
-              <a:buNone/>
-            </a:pPr>
-            <a:r>
-              <a:rPr lang="en-US" sz="900" b="1" spc="200" kern="0" dirty="0">
+            <a:pPr marL="0" indent="0">
+              <a:buNone/>
+            </a:pPr>
+            <a:r>
+              <a:rPr lang="en-US" sz="900" b="1" kern="0" spc="200" dirty="0">
                 <a:solidFill>
                   <a:srgbClr val="D4824A"/>
                 </a:solidFill>
               </a:rPr>
               <a:t>EXAMPLE  </a:t>
             </a:r>
-            <a:pPr indent="0" marL="0">
-              <a:buNone/>
-            </a:pPr>
             <a:r>
               <a:rPr lang="en-US" sz="1200" b="1" dirty="0">
                 <a:solidFill>
@@ -16712,7 +17628,7 @@
           <a:bodyPr wrap="square" lIns="0" tIns="0" rIns="0" bIns="0" rtlCol="0" anchor="t"/>
           <a:lstStyle/>
           <a:p>
-            <a:pPr indent="0" marL="0">
+            <a:pPr marL="0" indent="0">
               <a:lnSpc>
                 <a:spcPct val="100000"/>
               </a:lnSpc>
@@ -16732,7 +17648,7 @@
             <a:endParaRPr lang="en-US" sz="1050" dirty="0"/>
           </a:p>
           <a:p>
-            <a:pPr indent="0" marL="0">
+            <a:pPr marL="0" indent="0">
               <a:lnSpc>
                 <a:spcPct val="100000"/>
               </a:lnSpc>
@@ -16752,7 +17668,7 @@
             <a:endParaRPr lang="en-US" sz="1050" dirty="0"/>
           </a:p>
           <a:p>
-            <a:pPr indent="0" marL="0">
+            <a:pPr marL="0" indent="0">
               <a:lnSpc>
                 <a:spcPct val="100000"/>
               </a:lnSpc>
@@ -16772,7 +17688,7 @@
             <a:endParaRPr lang="en-US" sz="1050" dirty="0"/>
           </a:p>
           <a:p>
-            <a:pPr indent="0" marL="0">
+            <a:pPr marL="0" indent="0">
               <a:lnSpc>
                 <a:spcPct val="100000"/>
               </a:lnSpc>
@@ -16792,7 +17708,7 @@
             <a:endParaRPr lang="en-US" sz="1050" dirty="0"/>
           </a:p>
           <a:p>
-            <a:pPr indent="0" marL="0">
+            <a:pPr marL="0" indent="0">
               <a:lnSpc>
                 <a:spcPct val="100000"/>
               </a:lnSpc>
@@ -16801,7 +17717,7 @@
             <a:endParaRPr lang="en-US" sz="1050" dirty="0"/>
           </a:p>
           <a:p>
-            <a:pPr indent="0" marL="0">
+            <a:pPr marL="0" indent="0">
               <a:lnSpc>
                 <a:spcPct val="100000"/>
               </a:lnSpc>
@@ -16821,7 +17737,7 @@
             <a:endParaRPr lang="en-US" sz="1050" dirty="0"/>
           </a:p>
           <a:p>
-            <a:pPr indent="0" marL="0">
+            <a:pPr marL="0" indent="0">
               <a:lnSpc>
                 <a:spcPct val="100000"/>
               </a:lnSpc>
@@ -16841,7 +17757,7 @@
             <a:endParaRPr lang="en-US" sz="1050" dirty="0"/>
           </a:p>
           <a:p>
-            <a:pPr indent="0" marL="0">
+            <a:pPr marL="0" indent="0">
               <a:lnSpc>
                 <a:spcPct val="100000"/>
               </a:lnSpc>
@@ -16861,7 +17777,7 @@
             <a:endParaRPr lang="en-US" sz="1050" dirty="0"/>
           </a:p>
           <a:p>
-            <a:pPr indent="0" marL="0">
+            <a:pPr marL="0" indent="0">
               <a:lnSpc>
                 <a:spcPct val="100000"/>
               </a:lnSpc>
@@ -16881,7 +17797,7 @@
             <a:endParaRPr lang="en-US" sz="1050" dirty="0"/>
           </a:p>
           <a:p>
-            <a:pPr indent="0" marL="0">
+            <a:pPr marL="0" indent="0">
               <a:lnSpc>
                 <a:spcPct val="100000"/>
               </a:lnSpc>
@@ -16901,7 +17817,7 @@
             <a:endParaRPr lang="en-US" sz="1050" dirty="0"/>
           </a:p>
           <a:p>
-            <a:pPr indent="0" marL="0">
+            <a:pPr marL="0" indent="0">
               <a:lnSpc>
                 <a:spcPct val="100000"/>
               </a:lnSpc>
@@ -16910,7 +17826,7 @@
             <a:endParaRPr lang="en-US" sz="1050" dirty="0"/>
           </a:p>
           <a:p>
-            <a:pPr indent="0" marL="0">
+            <a:pPr marL="0" indent="0">
               <a:lnSpc>
                 <a:spcPct val="100000"/>
               </a:lnSpc>
@@ -16930,7 +17846,7 @@
             <a:endParaRPr lang="en-US" sz="1050" dirty="0"/>
           </a:p>
           <a:p>
-            <a:pPr indent="0" marL="0">
+            <a:pPr marL="0" indent="0">
               <a:lnSpc>
                 <a:spcPct val="100000"/>
               </a:lnSpc>
@@ -16971,7 +17887,7 @@
           </a:prstGeom>
           <a:extLst>
             <a:ext uri="{C572A759-6A51-4108-AA02-DFA0A04FC94B}">
-              <ma14:wrappingTextBoxFlag xmlns:ma14="http://schemas.microsoft.com/office/mac/drawingml/2011/main" val="0"/>
+              <ma14:wrappingTextBoxFlag xmlns:ma14="http://schemas.microsoft.com/office/mac/drawingml/2011/main" xmlns="" val="0"/>
             </a:ext>
           </a:extLst>
         </p:spPr>
@@ -16989,8 +17905,8 @@
           <a:p>
             <a:pPr algn="r"/>
             <a:fld id="{F7021451-1387-4CA6-816F-3879F97B5CBC}" type="slidenum">
-              <a:rPr b="0" lang="en-US"/>
-              <a:t>7</a:t>
+              <a:rPr lang="en-US" b="0"/>
+              <a:t>8</a:t>
             </a:fld>
             <a:endParaRPr lang="en-US"/>
           </a:p>
@@ -17004,7 +17920,7 @@
 </p:sld>
 </file>
 
-<file path=ppt/slides/slide8.xml><?xml version="1.0" encoding="utf-8"?>
+<file path=ppt/slides/slide9.xml><?xml version="1.0" encoding="utf-8"?>
 <p:sld xmlns:a="http://schemas.openxmlformats.org/drawingml/2006/main" xmlns:r="http://schemas.openxmlformats.org/officeDocument/2006/relationships" xmlns:p="http://schemas.openxmlformats.org/presentationml/2006/main">
   <p:cSld name="Slide 8">
     <p:spTree>
@@ -17042,11 +17958,11 @@
           <a:bodyPr wrap="square" lIns="0" tIns="0" rIns="0" bIns="0" rtlCol="0" anchor="ctr"/>
           <a:lstStyle/>
           <a:p>
-            <a:pPr indent="0" marL="0">
-              <a:buNone/>
-            </a:pPr>
-            <a:r>
-              <a:rPr lang="en-US" sz="1000" b="1" spc="300" kern="0" dirty="0">
+            <a:pPr marL="0" indent="0">
+              <a:buNone/>
+            </a:pPr>
+            <a:r>
+              <a:rPr lang="en-US" sz="1000" b="1" kern="0" spc="300" dirty="0">
                 <a:solidFill>
                   <a:srgbClr val="D4824A"/>
                 </a:solidFill>
@@ -17060,9 +17976,11 @@
       <p:sp>
         <p:nvSpPr>
           <p:cNvPr id="3" name="Text 1"/>
-          <p:cNvSpPr/>
+          <p:cNvSpPr>
+            <a:spLocks noGrp="1"/>
+          </p:cNvSpPr>
           <p:nvPr>
-            <p:ph idx="101" type="title" hasCustomPrompt="1"/>
+            <p:ph type="title" idx="101" hasCustomPrompt="1"/>
           </p:nvPr>
         </p:nvSpPr>
         <p:spPr>
@@ -17080,7 +17998,7 @@
           <a:bodyPr wrap="square" lIns="0" tIns="0" rIns="0" bIns="0" rtlCol="0" anchor="ctr"/>
           <a:lstStyle/>
           <a:p>
-            <a:pPr algn="l" indent="0" marL="0">
+            <a:pPr marL="0" indent="0" algn="l">
               <a:buNone/>
             </a:pPr>
             <a:r>
@@ -17143,7 +18061,7 @@
           <a:bodyPr wrap="square" lIns="0" tIns="0" rIns="0" bIns="0" rtlCol="0" anchor="ctr"/>
           <a:lstStyle/>
           <a:p>
-            <a:pPr algn="ctr" indent="0" marL="0">
+            <a:pPr marL="0" indent="0" algn="ctr">
               <a:spcAft>
                 <a:spcPts val="400"/>
               </a:spcAft>
@@ -17160,7 +18078,7 @@
             <a:endParaRPr lang="en-US" sz="1400" dirty="0"/>
           </a:p>
           <a:p>
-            <a:pPr algn="ctr" indent="0" marL="0">
+            <a:pPr marL="0" indent="0" algn="ctr">
               <a:spcAft>
                 <a:spcPts val="400"/>
               </a:spcAft>
@@ -17226,7 +18144,7 @@
           <a:bodyPr wrap="square" lIns="0" tIns="0" rIns="0" bIns="0" rtlCol="0" anchor="ctr"/>
           <a:lstStyle/>
           <a:p>
-            <a:pPr algn="ctr" indent="0" marL="0">
+            <a:pPr marL="0" indent="0" algn="ctr">
               <a:buNone/>
             </a:pPr>
             <a:r>
@@ -17243,7 +18161,7 @@
             <a:endParaRPr lang="en-US" sz="1050" dirty="0"/>
           </a:p>
           <a:p>
-            <a:pPr algn="ctr" indent="0" marL="0">
+            <a:pPr marL="0" indent="0" algn="ctr">
               <a:buNone/>
             </a:pPr>
             <a:r>
@@ -17333,7 +18251,7 @@
           <a:bodyPr wrap="square" lIns="0" tIns="0" rIns="0" bIns="0" rtlCol="0" anchor="ctr"/>
           <a:lstStyle/>
           <a:p>
-            <a:pPr algn="ctr" indent="0" marL="0">
+            <a:pPr marL="0" indent="0" algn="ctr">
               <a:spcAft>
                 <a:spcPts val="400"/>
               </a:spcAft>
@@ -17350,7 +18268,7 @@
             <a:endParaRPr lang="en-US" sz="1400" dirty="0"/>
           </a:p>
           <a:p>
-            <a:pPr algn="ctr" indent="0" marL="0">
+            <a:pPr marL="0" indent="0" algn="ctr">
               <a:spcAft>
                 <a:spcPts val="400"/>
               </a:spcAft>
@@ -17416,7 +18334,7 @@
           <a:bodyPr wrap="square" lIns="0" tIns="0" rIns="0" bIns="0" rtlCol="0" anchor="ctr"/>
           <a:lstStyle/>
           <a:p>
-            <a:pPr algn="ctr" indent="0" marL="0">
+            <a:pPr marL="0" indent="0" algn="ctr">
               <a:buNone/>
             </a:pPr>
             <a:r>
@@ -17433,7 +18351,7 @@
             <a:endParaRPr lang="en-US" sz="1050" dirty="0"/>
           </a:p>
           <a:p>
-            <a:pPr algn="ctr" indent="0" marL="0">
+            <a:pPr marL="0" indent="0" algn="ctr">
               <a:buNone/>
             </a:pPr>
             <a:r>
@@ -17523,7 +18441,7 @@
           <a:bodyPr wrap="square" lIns="0" tIns="0" rIns="0" bIns="0" rtlCol="0" anchor="ctr"/>
           <a:lstStyle/>
           <a:p>
-            <a:pPr algn="ctr" indent="0" marL="0">
+            <a:pPr marL="0" indent="0" algn="ctr">
               <a:spcAft>
                 <a:spcPts val="400"/>
               </a:spcAft>
@@ -17540,7 +18458,7 @@
             <a:endParaRPr lang="en-US" sz="1400" dirty="0"/>
           </a:p>
           <a:p>
-            <a:pPr algn="ctr" indent="0" marL="0">
+            <a:pPr marL="0" indent="0" algn="ctr">
               <a:spcAft>
                 <a:spcPts val="400"/>
               </a:spcAft>
@@ -17606,7 +18524,7 @@
           <a:bodyPr wrap="square" lIns="0" tIns="0" rIns="0" bIns="0" rtlCol="0" anchor="ctr"/>
           <a:lstStyle/>
           <a:p>
-            <a:pPr algn="ctr" indent="0" marL="0">
+            <a:pPr marL="0" indent="0" algn="ctr">
               <a:buNone/>
             </a:pPr>
             <a:r>
@@ -17623,7 +18541,7 @@
             <a:endParaRPr lang="en-US" sz="1050" dirty="0"/>
           </a:p>
           <a:p>
-            <a:pPr algn="ctr" indent="0" marL="0">
+            <a:pPr marL="0" indent="0" algn="ctr">
               <a:buNone/>
             </a:pPr>
             <a:r>
@@ -17713,7 +18631,7 @@
           <a:bodyPr wrap="square" lIns="0" tIns="0" rIns="0" bIns="0" rtlCol="0" anchor="ctr"/>
           <a:lstStyle/>
           <a:p>
-            <a:pPr algn="ctr" indent="0" marL="0">
+            <a:pPr marL="0" indent="0" algn="ctr">
               <a:spcAft>
                 <a:spcPts val="400"/>
               </a:spcAft>
@@ -17730,7 +18648,7 @@
             <a:endParaRPr lang="en-US" sz="1400" dirty="0"/>
           </a:p>
           <a:p>
-            <a:pPr algn="ctr" indent="0" marL="0">
+            <a:pPr marL="0" indent="0" algn="ctr">
               <a:spcAft>
                 <a:spcPts val="400"/>
               </a:spcAft>
@@ -17796,7 +18714,7 @@
           <a:bodyPr wrap="square" lIns="0" tIns="0" rIns="0" bIns="0" rtlCol="0" anchor="ctr"/>
           <a:lstStyle/>
           <a:p>
-            <a:pPr algn="ctr" indent="0" marL="0">
+            <a:pPr marL="0" indent="0" algn="ctr">
               <a:buNone/>
             </a:pPr>
             <a:r>
@@ -17835,7 +18753,7 @@
           <a:bodyPr wrap="square" lIns="0" tIns="0" rIns="0" bIns="0" rtlCol="0" anchor="ctr"/>
           <a:lstStyle/>
           <a:p>
-            <a:pPr indent="0" marL="0">
+            <a:pPr marL="0" indent="0">
               <a:buNone/>
             </a:pPr>
             <a:r>
@@ -17898,20 +18816,17 @@
           <a:bodyPr wrap="square" lIns="0" tIns="0" rIns="0" bIns="0" rtlCol="0" anchor="ctr"/>
           <a:lstStyle/>
           <a:p>
-            <a:pPr indent="0" marL="0">
-              <a:buNone/>
-            </a:pPr>
-            <a:r>
-              <a:rPr lang="en-US" sz="1000" b="1" spc="200" kern="0" dirty="0">
+            <a:pPr marL="0" indent="0">
+              <a:buNone/>
+            </a:pPr>
+            <a:r>
+              <a:rPr lang="en-US" sz="1000" b="1" kern="0" spc="200" dirty="0">
                 <a:solidFill>
                   <a:srgbClr val="D4824A"/>
                 </a:solidFill>
               </a:rPr>
               <a:t>KEY POINT  </a:t>
             </a:r>
-            <a:pPr indent="0" marL="0">
-              <a:buNone/>
-            </a:pPr>
             <a:r>
               <a:rPr lang="en-US" sz="1300" dirty="0">
                 <a:solidFill>
@@ -17926,7 +18841,7 @@
       </p:sp>
       <p:sp>
         <p:nvSpPr>
-          <p:cNvPr id="25" name="Slide Number Placeholder 0"/>
+          <p:cNvPr id="26" name="Slide Number Placeholder 0"/>
           <p:cNvSpPr>
             <a:spLocks noGrp="1"/>
           </p:cNvSpPr>
@@ -17944,7 +18859,7 @@
           </a:prstGeom>
           <a:extLst>
             <a:ext uri="{C572A759-6A51-4108-AA02-DFA0A04FC94B}">
-              <ma14:wrappingTextBoxFlag xmlns:ma14="http://schemas.microsoft.com/office/mac/drawingml/2011/main" val="0"/>
+              <ma14:wrappingTextBoxFlag xmlns:ma14="http://schemas.microsoft.com/office/mac/drawingml/2011/main" xmlns="" val="0"/>
             </a:ext>
           </a:extLst>
         </p:spPr>
@@ -17962,1047 +18877,7 @@
           <a:p>
             <a:pPr algn="r"/>
             <a:fld id="{F7021451-1387-4CA6-816F-3879F97B5CBC}" type="slidenum">
-              <a:rPr b="0" lang="en-US"/>
-              <a:t>8</a:t>
-            </a:fld>
-            <a:endParaRPr lang="en-US"/>
-          </a:p>
-        </p:txBody>
-      </p:sp>
-    </p:spTree>
-  </p:cSld>
-  <p:clrMapOvr>
-    <a:masterClrMapping/>
-  </p:clrMapOvr>
-</p:sld>
-</file>
-
-<file path=ppt/slides/slide9.xml><?xml version="1.0" encoding="utf-8"?>
-<p:sld xmlns:a="http://schemas.openxmlformats.org/drawingml/2006/main" xmlns:r="http://schemas.openxmlformats.org/officeDocument/2006/relationships" xmlns:p="http://schemas.openxmlformats.org/presentationml/2006/main">
-  <p:cSld name="Slide 9">
-    <p:spTree>
-      <p:nvGrpSpPr>
-        <p:cNvPr id="1" name=""/>
-        <p:cNvGrpSpPr/>
-        <p:nvPr/>
-      </p:nvGrpSpPr>
-      <p:grpSpPr>
-        <a:xfrm>
-          <a:off x="0" y="0"/>
-          <a:ext cx="0" cy="0"/>
-          <a:chOff x="0" y="0"/>
-          <a:chExt cx="0" cy="0"/>
-        </a:xfrm>
-      </p:grpSpPr>
-      <p:sp>
-        <p:nvSpPr>
-          <p:cNvPr id="2" name="Text 0"/>
-          <p:cNvSpPr txBox="1"/>
-          <p:nvPr/>
-        </p:nvSpPr>
-        <p:spPr>
-          <a:xfrm>
-            <a:off x="502920" y="201168"/>
-            <a:ext cx="8138160" cy="256032"/>
-          </a:xfrm>
-          <a:prstGeom prst="rect">
-            <a:avLst/>
-          </a:prstGeom>
-          <a:noFill/>
-          <a:ln/>
-        </p:spPr>
-        <p:txBody>
-          <a:bodyPr wrap="square" lIns="0" tIns="0" rIns="0" bIns="0" rtlCol="0" anchor="ctr"/>
-          <a:lstStyle/>
-          <a:p>
-            <a:pPr indent="0" marL="0">
-              <a:buNone/>
-            </a:pPr>
-            <a:r>
-              <a:rPr lang="en-US" sz="1000" b="1" spc="300" kern="0" dirty="0">
-                <a:solidFill>
-                  <a:srgbClr val="D4824A"/>
-                </a:solidFill>
-              </a:rPr>
-              <a:t>FUNCTION CALLING &amp; TOOL USE  ·  2 OF 3</a:t>
-            </a:r>
-            <a:endParaRPr lang="en-US" sz="1000" dirty="0"/>
-          </a:p>
-        </p:txBody>
-      </p:sp>
-      <p:sp>
-        <p:nvSpPr>
-          <p:cNvPr id="3" name="Text 1"/>
-          <p:cNvSpPr/>
-          <p:nvPr>
-            <p:ph idx="101" type="title" hasCustomPrompt="1"/>
-          </p:nvPr>
-        </p:nvSpPr>
-        <p:spPr>
-          <a:xfrm>
-            <a:off x="502920" y="457200"/>
-            <a:ext cx="8138160" cy="594360"/>
-          </a:xfrm>
-          <a:prstGeom prst="rect">
-            <a:avLst/>
-          </a:prstGeom>
-          <a:noFill/>
-          <a:ln/>
-        </p:spPr>
-        <p:txBody>
-          <a:bodyPr wrap="square" lIns="0" tIns="0" rIns="0" bIns="0" rtlCol="0" anchor="ctr"/>
-          <a:lstStyle/>
-          <a:p>
-            <a:pPr algn="l" indent="0" marL="0">
-              <a:buNone/>
-            </a:pPr>
-            <a:r>
-              <a:rPr lang="en-US" sz="2800" b="1" dirty="0">
-                <a:solidFill>
-                  <a:srgbClr val="1B2A4A"/>
-                </a:solidFill>
-              </a:rPr>
-              <a:t>Defining Tools in LangChain</a:t>
-            </a:r>
-            <a:endParaRPr lang="en-US" sz="2800" dirty="0"/>
-          </a:p>
-        </p:txBody>
-      </p:sp>
-      <p:sp>
-        <p:nvSpPr>
-          <p:cNvPr id="4" name="Shape 2"/>
-          <p:cNvSpPr/>
-          <p:nvPr/>
-        </p:nvSpPr>
-        <p:spPr>
-          <a:xfrm>
-            <a:off x="502920" y="1298448"/>
-            <a:ext cx="329184" cy="329184"/>
-          </a:xfrm>
-          <a:prstGeom prst="ellipse">
-            <a:avLst/>
-          </a:prstGeom>
-          <a:solidFill>
-            <a:srgbClr val="1B2A4A"/>
-          </a:solidFill>
-          <a:ln w="12700">
-            <a:solidFill>
-              <a:srgbClr val="1B2A4A"/>
-            </a:solidFill>
-            <a:prstDash val="solid"/>
-          </a:ln>
-        </p:spPr>
-      </p:sp>
-      <p:sp>
-        <p:nvSpPr>
-          <p:cNvPr id="5" name="Text 3"/>
-          <p:cNvSpPr txBox="1"/>
-          <p:nvPr/>
-        </p:nvSpPr>
-        <p:spPr>
-          <a:xfrm>
-            <a:off x="502920" y="1298448"/>
-            <a:ext cx="329184" cy="329184"/>
-          </a:xfrm>
-          <a:prstGeom prst="rect">
-            <a:avLst/>
-          </a:prstGeom>
-          <a:noFill/>
-          <a:ln/>
-        </p:spPr>
-        <p:txBody>
-          <a:bodyPr wrap="square" lIns="0" tIns="0" rIns="0" bIns="0" rtlCol="0" anchor="ctr"/>
-          <a:lstStyle/>
-          <a:p>
-            <a:pPr algn="ctr" indent="0" marL="0">
-              <a:buNone/>
-            </a:pPr>
-            <a:r>
-              <a:rPr lang="en-US" sz="1300" b="1" dirty="0">
-                <a:solidFill>
-                  <a:srgbClr val="FFFFFF"/>
-                </a:solidFill>
-              </a:rPr>
-              <a:t>1</a:t>
-            </a:r>
-            <a:endParaRPr lang="en-US" sz="1300" dirty="0"/>
-          </a:p>
-        </p:txBody>
-      </p:sp>
-      <p:sp>
-        <p:nvSpPr>
-          <p:cNvPr id="6" name="Text 4"/>
-          <p:cNvSpPr txBox="1"/>
-          <p:nvPr/>
-        </p:nvSpPr>
-        <p:spPr>
-          <a:xfrm>
-            <a:off x="978408" y="1243584"/>
-            <a:ext cx="3364992" cy="621792"/>
-          </a:xfrm>
-          <a:prstGeom prst="rect">
-            <a:avLst/>
-          </a:prstGeom>
-          <a:noFill/>
-          <a:ln/>
-        </p:spPr>
-        <p:txBody>
-          <a:bodyPr wrap="square" lIns="0" tIns="0" rIns="0" bIns="0" rtlCol="0" anchor="t"/>
-          <a:lstStyle/>
-          <a:p>
-            <a:pPr indent="0" marL="0">
-              <a:spcAft>
-                <a:spcPts val="200"/>
-              </a:spcAft>
-              <a:buNone/>
-            </a:pPr>
-            <a:r>
-              <a:rPr lang="en-US" sz="1500" b="1" dirty="0">
-                <a:solidFill>
-                  <a:srgbClr val="1B2A4A"/>
-                </a:solidFill>
-              </a:rPr>
-              <a:t>@tool decorator</a:t>
-            </a:r>
-            <a:endParaRPr lang="en-US" sz="1500" dirty="0"/>
-          </a:p>
-          <a:p>
-            <a:pPr indent="0" marL="0">
-              <a:spcAft>
-                <a:spcPts val="200"/>
-              </a:spcAft>
-              <a:buNone/>
-            </a:pPr>
-            <a:r>
-              <a:rPr lang="en-US" sz="1200" dirty="0">
-                <a:solidFill>
-                  <a:srgbClr val="5F6F80"/>
-                </a:solidFill>
-              </a:rPr>
-              <a:t>Simplest: docstring + type hints</a:t>
-            </a:r>
-            <a:endParaRPr lang="en-US" sz="1500" dirty="0"/>
-          </a:p>
-        </p:txBody>
-      </p:sp>
-      <p:sp>
-        <p:nvSpPr>
-          <p:cNvPr id="7" name="Shape 5"/>
-          <p:cNvSpPr/>
-          <p:nvPr/>
-        </p:nvSpPr>
-        <p:spPr>
-          <a:xfrm>
-            <a:off x="502920" y="1920240"/>
-            <a:ext cx="329184" cy="329184"/>
-          </a:xfrm>
-          <a:prstGeom prst="ellipse">
-            <a:avLst/>
-          </a:prstGeom>
-          <a:solidFill>
-            <a:srgbClr val="1B2A4A"/>
-          </a:solidFill>
-          <a:ln w="12700">
-            <a:solidFill>
-              <a:srgbClr val="1B2A4A"/>
-            </a:solidFill>
-            <a:prstDash val="solid"/>
-          </a:ln>
-        </p:spPr>
-      </p:sp>
-      <p:sp>
-        <p:nvSpPr>
-          <p:cNvPr id="8" name="Text 6"/>
-          <p:cNvSpPr txBox="1"/>
-          <p:nvPr/>
-        </p:nvSpPr>
-        <p:spPr>
-          <a:xfrm>
-            <a:off x="502920" y="1920240"/>
-            <a:ext cx="329184" cy="329184"/>
-          </a:xfrm>
-          <a:prstGeom prst="rect">
-            <a:avLst/>
-          </a:prstGeom>
-          <a:noFill/>
-          <a:ln/>
-        </p:spPr>
-        <p:txBody>
-          <a:bodyPr wrap="square" lIns="0" tIns="0" rIns="0" bIns="0" rtlCol="0" anchor="ctr"/>
-          <a:lstStyle/>
-          <a:p>
-            <a:pPr algn="ctr" indent="0" marL="0">
-              <a:buNone/>
-            </a:pPr>
-            <a:r>
-              <a:rPr lang="en-US" sz="1300" b="1" dirty="0">
-                <a:solidFill>
-                  <a:srgbClr val="FFFFFF"/>
-                </a:solidFill>
-              </a:rPr>
-              <a:t>2</a:t>
-            </a:r>
-            <a:endParaRPr lang="en-US" sz="1300" dirty="0"/>
-          </a:p>
-        </p:txBody>
-      </p:sp>
-      <p:sp>
-        <p:nvSpPr>
-          <p:cNvPr id="9" name="Text 7"/>
-          <p:cNvSpPr txBox="1"/>
-          <p:nvPr/>
-        </p:nvSpPr>
-        <p:spPr>
-          <a:xfrm>
-            <a:off x="978408" y="1865376"/>
-            <a:ext cx="3364992" cy="621792"/>
-          </a:xfrm>
-          <a:prstGeom prst="rect">
-            <a:avLst/>
-          </a:prstGeom>
-          <a:noFill/>
-          <a:ln/>
-        </p:spPr>
-        <p:txBody>
-          <a:bodyPr wrap="square" lIns="0" tIns="0" rIns="0" bIns="0" rtlCol="0" anchor="t"/>
-          <a:lstStyle/>
-          <a:p>
-            <a:pPr indent="0" marL="0">
-              <a:spcAft>
-                <a:spcPts val="200"/>
-              </a:spcAft>
-              <a:buNone/>
-            </a:pPr>
-            <a:r>
-              <a:rPr lang="en-US" sz="1500" b="1" dirty="0">
-                <a:solidFill>
-                  <a:srgbClr val="1B2A4A"/>
-                </a:solidFill>
-              </a:rPr>
-              <a:t>StructuredTool.from_function()</a:t>
-            </a:r>
-            <a:endParaRPr lang="en-US" sz="1500" dirty="0"/>
-          </a:p>
-          <a:p>
-            <a:pPr indent="0" marL="0">
-              <a:spcAft>
-                <a:spcPts val="200"/>
-              </a:spcAft>
-              <a:buNone/>
-            </a:pPr>
-            <a:r>
-              <a:rPr lang="en-US" sz="1200" dirty="0">
-                <a:solidFill>
-                  <a:srgbClr val="5F6F80"/>
-                </a:solidFill>
-              </a:rPr>
-              <a:t>Wrap a function, explicit schema</a:t>
-            </a:r>
-            <a:endParaRPr lang="en-US" sz="1500" dirty="0"/>
-          </a:p>
-        </p:txBody>
-      </p:sp>
-      <p:sp>
-        <p:nvSpPr>
-          <p:cNvPr id="10" name="Shape 8"/>
-          <p:cNvSpPr/>
-          <p:nvPr/>
-        </p:nvSpPr>
-        <p:spPr>
-          <a:xfrm>
-            <a:off x="502920" y="2542032"/>
-            <a:ext cx="329184" cy="329184"/>
-          </a:xfrm>
-          <a:prstGeom prst="ellipse">
-            <a:avLst/>
-          </a:prstGeom>
-          <a:solidFill>
-            <a:srgbClr val="1B2A4A"/>
-          </a:solidFill>
-          <a:ln w="12700">
-            <a:solidFill>
-              <a:srgbClr val="1B2A4A"/>
-            </a:solidFill>
-            <a:prstDash val="solid"/>
-          </a:ln>
-        </p:spPr>
-      </p:sp>
-      <p:sp>
-        <p:nvSpPr>
-          <p:cNvPr id="11" name="Text 9"/>
-          <p:cNvSpPr txBox="1"/>
-          <p:nvPr/>
-        </p:nvSpPr>
-        <p:spPr>
-          <a:xfrm>
-            <a:off x="502920" y="2542032"/>
-            <a:ext cx="329184" cy="329184"/>
-          </a:xfrm>
-          <a:prstGeom prst="rect">
-            <a:avLst/>
-          </a:prstGeom>
-          <a:noFill/>
-          <a:ln/>
-        </p:spPr>
-        <p:txBody>
-          <a:bodyPr wrap="square" lIns="0" tIns="0" rIns="0" bIns="0" rtlCol="0" anchor="ctr"/>
-          <a:lstStyle/>
-          <a:p>
-            <a:pPr algn="ctr" indent="0" marL="0">
-              <a:buNone/>
-            </a:pPr>
-            <a:r>
-              <a:rPr lang="en-US" sz="1300" b="1" dirty="0">
-                <a:solidFill>
-                  <a:srgbClr val="FFFFFF"/>
-                </a:solidFill>
-              </a:rPr>
-              <a:t>3</a:t>
-            </a:r>
-            <a:endParaRPr lang="en-US" sz="1300" dirty="0"/>
-          </a:p>
-        </p:txBody>
-      </p:sp>
-      <p:sp>
-        <p:nvSpPr>
-          <p:cNvPr id="12" name="Text 10"/>
-          <p:cNvSpPr txBox="1"/>
-          <p:nvPr/>
-        </p:nvSpPr>
-        <p:spPr>
-          <a:xfrm>
-            <a:off x="978408" y="2487168"/>
-            <a:ext cx="3364992" cy="621792"/>
-          </a:xfrm>
-          <a:prstGeom prst="rect">
-            <a:avLst/>
-          </a:prstGeom>
-          <a:noFill/>
-          <a:ln/>
-        </p:spPr>
-        <p:txBody>
-          <a:bodyPr wrap="square" lIns="0" tIns="0" rIns="0" bIns="0" rtlCol="0" anchor="t"/>
-          <a:lstStyle/>
-          <a:p>
-            <a:pPr indent="0" marL="0">
-              <a:spcAft>
-                <a:spcPts val="200"/>
-              </a:spcAft>
-              <a:buNone/>
-            </a:pPr>
-            <a:r>
-              <a:rPr lang="en-US" sz="1500" b="1" dirty="0">
-                <a:solidFill>
-                  <a:srgbClr val="1B2A4A"/>
-                </a:solidFill>
-              </a:rPr>
-              <a:t>BaseTool subclass</a:t>
-            </a:r>
-            <a:endParaRPr lang="en-US" sz="1500" dirty="0"/>
-          </a:p>
-          <a:p>
-            <a:pPr indent="0" marL="0">
-              <a:spcAft>
-                <a:spcPts val="200"/>
-              </a:spcAft>
-              <a:buNone/>
-            </a:pPr>
-            <a:r>
-              <a:rPr lang="en-US" sz="1200" dirty="0">
-                <a:solidFill>
-                  <a:srgbClr val="5F6F80"/>
-                </a:solidFill>
-              </a:rPr>
-              <a:t>For state, clients, async</a:t>
-            </a:r>
-            <a:endParaRPr lang="en-US" sz="1500" dirty="0"/>
-          </a:p>
-        </p:txBody>
-      </p:sp>
-      <p:sp>
-        <p:nvSpPr>
-          <p:cNvPr id="13" name="Shape 11"/>
-          <p:cNvSpPr/>
-          <p:nvPr/>
-        </p:nvSpPr>
-        <p:spPr>
-          <a:xfrm>
-            <a:off x="502920" y="3163824"/>
-            <a:ext cx="329184" cy="329184"/>
-          </a:xfrm>
-          <a:prstGeom prst="ellipse">
-            <a:avLst/>
-          </a:prstGeom>
-          <a:solidFill>
-            <a:srgbClr val="1B2A4A"/>
-          </a:solidFill>
-          <a:ln w="12700">
-            <a:solidFill>
-              <a:srgbClr val="1B2A4A"/>
-            </a:solidFill>
-            <a:prstDash val="solid"/>
-          </a:ln>
-        </p:spPr>
-      </p:sp>
-      <p:sp>
-        <p:nvSpPr>
-          <p:cNvPr id="14" name="Text 12"/>
-          <p:cNvSpPr txBox="1"/>
-          <p:nvPr/>
-        </p:nvSpPr>
-        <p:spPr>
-          <a:xfrm>
-            <a:off x="502920" y="3163824"/>
-            <a:ext cx="329184" cy="329184"/>
-          </a:xfrm>
-          <a:prstGeom prst="rect">
-            <a:avLst/>
-          </a:prstGeom>
-          <a:noFill/>
-          <a:ln/>
-        </p:spPr>
-        <p:txBody>
-          <a:bodyPr wrap="square" lIns="0" tIns="0" rIns="0" bIns="0" rtlCol="0" anchor="ctr"/>
-          <a:lstStyle/>
-          <a:p>
-            <a:pPr algn="ctr" indent="0" marL="0">
-              <a:buNone/>
-            </a:pPr>
-            <a:r>
-              <a:rPr lang="en-US" sz="1300" b="1" dirty="0">
-                <a:solidFill>
-                  <a:srgbClr val="FFFFFF"/>
-                </a:solidFill>
-              </a:rPr>
-              <a:t>4</a:t>
-            </a:r>
-            <a:endParaRPr lang="en-US" sz="1300" dirty="0"/>
-          </a:p>
-        </p:txBody>
-      </p:sp>
-      <p:sp>
-        <p:nvSpPr>
-          <p:cNvPr id="15" name="Text 13"/>
-          <p:cNvSpPr txBox="1"/>
-          <p:nvPr/>
-        </p:nvSpPr>
-        <p:spPr>
-          <a:xfrm>
-            <a:off x="978408" y="3108960"/>
-            <a:ext cx="3364992" cy="621792"/>
-          </a:xfrm>
-          <a:prstGeom prst="rect">
-            <a:avLst/>
-          </a:prstGeom>
-          <a:noFill/>
-          <a:ln/>
-        </p:spPr>
-        <p:txBody>
-          <a:bodyPr wrap="square" lIns="0" tIns="0" rIns="0" bIns="0" rtlCol="0" anchor="t"/>
-          <a:lstStyle/>
-          <a:p>
-            <a:pPr indent="0" marL="0">
-              <a:spcAft>
-                <a:spcPts val="200"/>
-              </a:spcAft>
-              <a:buNone/>
-            </a:pPr>
-            <a:r>
-              <a:rPr lang="en-US" sz="1500" b="1" dirty="0">
-                <a:solidFill>
-                  <a:srgbClr val="1B2A4A"/>
-                </a:solidFill>
-              </a:rPr>
-              <a:t>llm.bind_tools([...])</a:t>
-            </a:r>
-            <a:endParaRPr lang="en-US" sz="1500" dirty="0"/>
-          </a:p>
-          <a:p>
-            <a:pPr indent="0" marL="0">
-              <a:spcAft>
-                <a:spcPts val="200"/>
-              </a:spcAft>
-              <a:buNone/>
-            </a:pPr>
-            <a:r>
-              <a:rPr lang="en-US" sz="1200" dirty="0">
-                <a:solidFill>
-                  <a:srgbClr val="5F6F80"/>
-                </a:solidFill>
-              </a:rPr>
-              <a:t>Hand the tools to the model</a:t>
-            </a:r>
-            <a:endParaRPr lang="en-US" sz="1500" dirty="0"/>
-          </a:p>
-        </p:txBody>
-      </p:sp>
-      <p:sp>
-        <p:nvSpPr>
-          <p:cNvPr id="16" name="Shape 14"/>
-          <p:cNvSpPr/>
-          <p:nvPr/>
-        </p:nvSpPr>
-        <p:spPr>
-          <a:xfrm>
-            <a:off x="502920" y="3913632"/>
-            <a:ext cx="3840480" cy="658368"/>
-          </a:xfrm>
-          <a:prstGeom prst="roundRect">
-            <a:avLst>
-              <a:gd name="adj" fmla="val 11111"/>
-            </a:avLst>
-          </a:prstGeom>
-          <a:solidFill>
-            <a:srgbClr val="FBEFE6"/>
-          </a:solidFill>
-          <a:ln w="12700">
-            <a:solidFill>
-              <a:srgbClr val="FBEFE6"/>
-            </a:solidFill>
-            <a:prstDash val="solid"/>
-          </a:ln>
-        </p:spPr>
-      </p:sp>
-      <p:sp>
-        <p:nvSpPr>
-          <p:cNvPr id="17" name="Text 15"/>
-          <p:cNvSpPr txBox="1"/>
-          <p:nvPr/>
-        </p:nvSpPr>
-        <p:spPr>
-          <a:xfrm>
-            <a:off x="667512" y="3913632"/>
-            <a:ext cx="3511296" cy="658368"/>
-          </a:xfrm>
-          <a:prstGeom prst="rect">
-            <a:avLst/>
-          </a:prstGeom>
-          <a:noFill/>
-          <a:ln/>
-        </p:spPr>
-        <p:txBody>
-          <a:bodyPr wrap="square" lIns="0" tIns="0" rIns="0" bIns="0" rtlCol="0" anchor="ctr"/>
-          <a:lstStyle/>
-          <a:p>
-            <a:pPr indent="0" marL="0">
-              <a:buNone/>
-            </a:pPr>
-            <a:r>
-              <a:rPr lang="en-US" sz="1000" b="1" spc="200" kern="0" dirty="0">
-                <a:solidFill>
-                  <a:srgbClr val="D4824A"/>
-                </a:solidFill>
-              </a:rPr>
-              <a:t>KEY POINT  </a:t>
-            </a:r>
-            <a:pPr indent="0" marL="0">
-              <a:buNone/>
-            </a:pPr>
-            <a:r>
-              <a:rPr lang="en-US" sz="1300" dirty="0">
-                <a:solidFill>
-                  <a:srgbClr val="1B2A4A"/>
-                </a:solidFill>
-              </a:rPr>
-              <a:t>Start with @tool. The docstring is how the model knows when to use it.</a:t>
-            </a:r>
-            <a:endParaRPr lang="en-US" sz="1000" dirty="0"/>
-          </a:p>
-        </p:txBody>
-      </p:sp>
-      <p:sp>
-        <p:nvSpPr>
-          <p:cNvPr id="18" name="Shape 16"/>
-          <p:cNvSpPr/>
-          <p:nvPr/>
-        </p:nvSpPr>
-        <p:spPr>
-          <a:xfrm>
-            <a:off x="4572000" y="1188720"/>
-            <a:ext cx="4069080" cy="3383280"/>
-          </a:xfrm>
-          <a:prstGeom prst="roundRect">
-            <a:avLst>
-              <a:gd name="adj" fmla="val 2162"/>
-            </a:avLst>
-          </a:prstGeom>
-          <a:solidFill>
-            <a:srgbClr val="1B2A4A"/>
-          </a:solidFill>
-          <a:ln w="12700">
-            <a:solidFill>
-              <a:srgbClr val="1B2A4A"/>
-            </a:solidFill>
-            <a:prstDash val="solid"/>
-          </a:ln>
-        </p:spPr>
-      </p:sp>
-      <p:sp>
-        <p:nvSpPr>
-          <p:cNvPr id="19" name="Text 17"/>
-          <p:cNvSpPr txBox="1"/>
-          <p:nvPr/>
-        </p:nvSpPr>
-        <p:spPr>
-          <a:xfrm>
-            <a:off x="4773168" y="1316736"/>
-            <a:ext cx="3666744" cy="292608"/>
-          </a:xfrm>
-          <a:prstGeom prst="rect">
-            <a:avLst/>
-          </a:prstGeom>
-          <a:noFill/>
-          <a:ln/>
-        </p:spPr>
-        <p:txBody>
-          <a:bodyPr wrap="square" lIns="0" tIns="0" rIns="0" bIns="0" rtlCol="0" anchor="ctr"/>
-          <a:lstStyle/>
-          <a:p>
-            <a:pPr indent="0" marL="0">
-              <a:buNone/>
-            </a:pPr>
-            <a:r>
-              <a:rPr lang="en-US" sz="900" b="1" spc="200" kern="0" dirty="0">
-                <a:solidFill>
-                  <a:srgbClr val="D4824A"/>
-                </a:solidFill>
-              </a:rPr>
-              <a:t>EXAMPLE  </a:t>
-            </a:r>
-            <a:pPr indent="0" marL="0">
-              <a:buNone/>
-            </a:pPr>
-            <a:r>
-              <a:rPr lang="en-US" sz="1200" b="1" dirty="0">
-                <a:solidFill>
-                  <a:srgbClr val="FFFFFF"/>
-                </a:solidFill>
-              </a:rPr>
-              <a:t>Defining tools (demo 07)</a:t>
-            </a:r>
-            <a:endParaRPr lang="en-US" sz="900" dirty="0"/>
-          </a:p>
-        </p:txBody>
-      </p:sp>
-      <p:sp>
-        <p:nvSpPr>
-          <p:cNvPr id="20" name="Text 18"/>
-          <p:cNvSpPr txBox="1"/>
-          <p:nvPr/>
-        </p:nvSpPr>
-        <p:spPr>
-          <a:xfrm>
-            <a:off x="4773168" y="1700784"/>
-            <a:ext cx="3703320" cy="2743200"/>
-          </a:xfrm>
-          <a:prstGeom prst="rect">
-            <a:avLst/>
-          </a:prstGeom>
-          <a:noFill/>
-          <a:ln/>
-        </p:spPr>
-        <p:txBody>
-          <a:bodyPr wrap="square" lIns="0" tIns="0" rIns="0" bIns="0" rtlCol="0" anchor="t"/>
-          <a:lstStyle/>
-          <a:p>
-            <a:pPr indent="0" marL="0">
-              <a:lnSpc>
-                <a:spcPct val="100000"/>
-              </a:lnSpc>
-              <a:buNone/>
-            </a:pPr>
-            <a:r>
-              <a:rPr lang="en-US" sz="1050" dirty="0">
-                <a:solidFill>
-                  <a:srgbClr val="E6EDF5"/>
-                </a:solidFill>
-                <a:latin typeface="Consolas" pitchFamily="34" charset="0"/>
-                <a:ea typeface="Consolas" pitchFamily="34" charset="-122"/>
-                <a:cs typeface="Consolas" pitchFamily="34" charset="-120"/>
-              </a:rPr>
-              <a:t># 1. @tool decorator</a:t>
-            </a:r>
-            <a:endParaRPr lang="en-US" sz="1050" dirty="0"/>
-          </a:p>
-          <a:p>
-            <a:pPr indent="0" marL="0">
-              <a:lnSpc>
-                <a:spcPct val="100000"/>
-              </a:lnSpc>
-              <a:buNone/>
-            </a:pPr>
-            <a:r>
-              <a:rPr lang="en-US" sz="1050" dirty="0">
-                <a:solidFill>
-                  <a:srgbClr val="E6EDF5"/>
-                </a:solidFill>
-                <a:latin typeface="Consolas" pitchFamily="34" charset="0"/>
-                <a:ea typeface="Consolas" pitchFamily="34" charset="-122"/>
-                <a:cs typeface="Consolas" pitchFamily="34" charset="-120"/>
-              </a:rPr>
-              <a:t>@tool</a:t>
-            </a:r>
-            <a:endParaRPr lang="en-US" sz="1050" dirty="0"/>
-          </a:p>
-          <a:p>
-            <a:pPr indent="0" marL="0">
-              <a:lnSpc>
-                <a:spcPct val="100000"/>
-              </a:lnSpc>
-              <a:buNone/>
-            </a:pPr>
-            <a:r>
-              <a:rPr lang="en-US" sz="1050" dirty="0">
-                <a:solidFill>
-                  <a:srgbClr val="E6EDF5"/>
-                </a:solidFill>
-                <a:latin typeface="Consolas" pitchFamily="34" charset="0"/>
-                <a:ea typeface="Consolas" pitchFamily="34" charset="-122"/>
-                <a:cs typeface="Consolas" pitchFamily="34" charset="-120"/>
-              </a:rPr>
-              <a:t>def get_stock_price(ticker: str) -&gt; str:</a:t>
-            </a:r>
-            <a:endParaRPr lang="en-US" sz="1050" dirty="0"/>
-          </a:p>
-          <a:p>
-            <a:pPr indent="0" marL="0">
-              <a:lnSpc>
-                <a:spcPct val="100000"/>
-              </a:lnSpc>
-              <a:buNone/>
-            </a:pPr>
-            <a:r>
-              <a:rPr lang="en-US" sz="1050" dirty="0">
-                <a:solidFill>
-                  <a:srgbClr val="E6EDF5"/>
-                </a:solidFill>
-                <a:latin typeface="Consolas" pitchFamily="34" charset="0"/>
-                <a:ea typeface="Consolas" pitchFamily="34" charset="-122"/>
-                <a:cs typeface="Consolas" pitchFamily="34" charset="-120"/>
-              </a:rPr>
-              <a:t>    """Price for a ticker like AAPL."""</a:t>
-            </a:r>
-            <a:endParaRPr lang="en-US" sz="1050" dirty="0"/>
-          </a:p>
-          <a:p>
-            <a:pPr indent="0" marL="0">
-              <a:lnSpc>
-                <a:spcPct val="100000"/>
-              </a:lnSpc>
-              <a:buNone/>
-            </a:pPr>
-            <a:r>
-              <a:rPr lang="en-US" sz="1050" dirty="0">
-                <a:solidFill>
-                  <a:srgbClr val="E6EDF5"/>
-                </a:solidFill>
-                <a:latin typeface="Consolas" pitchFamily="34" charset="0"/>
-                <a:ea typeface="Consolas" pitchFamily="34" charset="-122"/>
-                <a:cs typeface="Consolas" pitchFamily="34" charset="-120"/>
-              </a:rPr>
-              <a:t>    return fetch_price(ticker)</a:t>
-            </a:r>
-            <a:endParaRPr lang="en-US" sz="1050" dirty="0"/>
-          </a:p>
-          <a:p>
-            <a:pPr indent="0" marL="0">
-              <a:lnSpc>
-                <a:spcPct val="100000"/>
-              </a:lnSpc>
-              <a:buNone/>
-            </a:pPr>
-            <a:endParaRPr lang="en-US" sz="1050" dirty="0"/>
-          </a:p>
-          <a:p>
-            <a:pPr indent="0" marL="0">
-              <a:lnSpc>
-                <a:spcPct val="100000"/>
-              </a:lnSpc>
-              <a:buNone/>
-            </a:pPr>
-            <a:r>
-              <a:rPr lang="en-US" sz="1050" dirty="0">
-                <a:solidFill>
-                  <a:srgbClr val="E6EDF5"/>
-                </a:solidFill>
-                <a:latin typeface="Consolas" pitchFamily="34" charset="0"/>
-                <a:ea typeface="Consolas" pitchFamily="34" charset="-122"/>
-                <a:cs typeface="Consolas" pitchFamily="34" charset="-120"/>
-              </a:rPr>
-              <a:t># 2. StructuredTool: explicit schema</a:t>
-            </a:r>
-            <a:endParaRPr lang="en-US" sz="1050" dirty="0"/>
-          </a:p>
-          <a:p>
-            <a:pPr indent="0" marL="0">
-              <a:lnSpc>
-                <a:spcPct val="100000"/>
-              </a:lnSpc>
-              <a:buNone/>
-            </a:pPr>
-            <a:r>
-              <a:rPr lang="en-US" sz="1050" dirty="0">
-                <a:solidFill>
-                  <a:srgbClr val="E6EDF5"/>
-                </a:solidFill>
-                <a:latin typeface="Consolas" pitchFamily="34" charset="0"/>
-                <a:ea typeface="Consolas" pitchFamily="34" charset="-122"/>
-                <a:cs typeface="Consolas" pitchFamily="34" charset="-120"/>
-              </a:rPr>
-              <a:t>search = StructuredTool.from_function(</a:t>
-            </a:r>
-            <a:endParaRPr lang="en-US" sz="1050" dirty="0"/>
-          </a:p>
-          <a:p>
-            <a:pPr indent="0" marL="0">
-              <a:lnSpc>
-                <a:spcPct val="100000"/>
-              </a:lnSpc>
-              <a:buNone/>
-            </a:pPr>
-            <a:r>
-              <a:rPr lang="en-US" sz="1050" dirty="0">
-                <a:solidFill>
-                  <a:srgbClr val="E6EDF5"/>
-                </a:solidFill>
-                <a:latin typeface="Consolas" pitchFamily="34" charset="0"/>
-                <a:ea typeface="Consolas" pitchFamily="34" charset="-122"/>
-                <a:cs typeface="Consolas" pitchFamily="34" charset="-120"/>
-              </a:rPr>
-              <a:t>    func=run_search, name="web_search",</a:t>
-            </a:r>
-            <a:endParaRPr lang="en-US" sz="1050" dirty="0"/>
-          </a:p>
-          <a:p>
-            <a:pPr indent="0" marL="0">
-              <a:lnSpc>
-                <a:spcPct val="100000"/>
-              </a:lnSpc>
-              <a:buNone/>
-            </a:pPr>
-            <a:r>
-              <a:rPr lang="en-US" sz="1050" dirty="0">
-                <a:solidFill>
-                  <a:srgbClr val="E6EDF5"/>
-                </a:solidFill>
-                <a:latin typeface="Consolas" pitchFamily="34" charset="0"/>
-                <a:ea typeface="Consolas" pitchFamily="34" charset="-122"/>
-                <a:cs typeface="Consolas" pitchFamily="34" charset="-120"/>
-              </a:rPr>
-              <a:t>    args_schema=SearchArgs)</a:t>
-            </a:r>
-            <a:endParaRPr lang="en-US" sz="1050" dirty="0"/>
-          </a:p>
-          <a:p>
-            <a:pPr indent="0" marL="0">
-              <a:lnSpc>
-                <a:spcPct val="100000"/>
-              </a:lnSpc>
-              <a:buNone/>
-            </a:pPr>
-            <a:endParaRPr lang="en-US" sz="1050" dirty="0"/>
-          </a:p>
-          <a:p>
-            <a:pPr indent="0" marL="0">
-              <a:lnSpc>
-                <a:spcPct val="100000"/>
-              </a:lnSpc>
-              <a:buNone/>
-            </a:pPr>
-            <a:r>
-              <a:rPr lang="en-US" sz="1050" dirty="0">
-                <a:solidFill>
-                  <a:srgbClr val="E6EDF5"/>
-                </a:solidFill>
-                <a:latin typeface="Consolas" pitchFamily="34" charset="0"/>
-                <a:ea typeface="Consolas" pitchFamily="34" charset="-122"/>
-                <a:cs typeface="Consolas" pitchFamily="34" charset="-120"/>
-              </a:rPr>
-              <a:t># Bind tools to the model</a:t>
-            </a:r>
-            <a:endParaRPr lang="en-US" sz="1050" dirty="0"/>
-          </a:p>
-          <a:p>
-            <a:pPr indent="0" marL="0">
-              <a:lnSpc>
-                <a:spcPct val="100000"/>
-              </a:lnSpc>
-              <a:buNone/>
-            </a:pPr>
-            <a:r>
-              <a:rPr lang="en-US" sz="1050" dirty="0">
-                <a:solidFill>
-                  <a:srgbClr val="E6EDF5"/>
-                </a:solidFill>
-                <a:latin typeface="Consolas" pitchFamily="34" charset="0"/>
-                <a:ea typeface="Consolas" pitchFamily="34" charset="-122"/>
-                <a:cs typeface="Consolas" pitchFamily="34" charset="-120"/>
-              </a:rPr>
-              <a:t>llm_tools = llm.bind_tools(</a:t>
-            </a:r>
-            <a:endParaRPr lang="en-US" sz="1050" dirty="0"/>
-          </a:p>
-          <a:p>
-            <a:pPr indent="0" marL="0">
-              <a:lnSpc>
-                <a:spcPct val="100000"/>
-              </a:lnSpc>
-              <a:buNone/>
-            </a:pPr>
-            <a:r>
-              <a:rPr lang="en-US" sz="1050" dirty="0">
-                <a:solidFill>
-                  <a:srgbClr val="E6EDF5"/>
-                </a:solidFill>
-                <a:latin typeface="Consolas" pitchFamily="34" charset="0"/>
-                <a:ea typeface="Consolas" pitchFamily="34" charset="-122"/>
-                <a:cs typeface="Consolas" pitchFamily="34" charset="-120"/>
-              </a:rPr>
-              <a:t>    [get_stock_price, search])</a:t>
-            </a:r>
-            <a:endParaRPr lang="en-US" sz="1050" dirty="0"/>
-          </a:p>
-        </p:txBody>
-      </p:sp>
-      <p:sp>
-        <p:nvSpPr>
-          <p:cNvPr id="25" name="Slide Number Placeholder 0"/>
-          <p:cNvSpPr>
-            <a:spLocks noGrp="1"/>
-          </p:cNvSpPr>
-          <p:nvPr>
-            <p:ph type="sldNum" sz="quarter" idx="4294967295"/>
-          </p:nvPr>
-        </p:nvSpPr>
-        <p:spPr>
-          <a:xfrm>
-            <a:off x="8229600" y="4800600"/>
-            <a:ext cx="411480" cy="228600"/>
-          </a:xfrm>
-          <a:prstGeom prst="rect">
-            <a:avLst/>
-          </a:prstGeom>
-          <a:extLst>
-            <a:ext uri="{C572A759-6A51-4108-AA02-DFA0A04FC94B}">
-              <ma14:wrappingTextBoxFlag xmlns:ma14="http://schemas.microsoft.com/office/mac/drawingml/2011/main" val="0"/>
-            </a:ext>
-          </a:extLst>
-        </p:spPr>
-        <p:txBody>
-          <a:bodyPr/>
-          <a:lstStyle>
-            <a:lvl1pPr>
-              <a:defRPr sz="900">
-                <a:solidFill>
-                  <a:srgbClr val="A0B0C0"/>
-                </a:solidFill>
-              </a:defRPr>
-            </a:lvl1pPr>
-          </a:lstStyle>
-          <a:p>
-            <a:pPr algn="r"/>
-            <a:fld id="{F7021451-1387-4CA6-816F-3879F97B5CBC}" type="slidenum">
-              <a:rPr b="0" lang="en-US"/>
+              <a:rPr lang="en-US" b="0"/>
               <a:t>9</a:t>
             </a:fld>
             <a:endParaRPr lang="en-US"/>
@@ -19310,4 +19185,299 @@
     </a:ext>
   </a:extLst>
 </a:theme>
+</file>
+
+<file path=ppt/theme/theme2.xml><?xml version="1.0" encoding="utf-8"?>
+<a:theme xmlns:a="http://schemas.openxmlformats.org/drawingml/2006/main" name="Office Theme">
+  <a:themeElements>
+    <a:clrScheme name="Office">
+      <a:dk1>
+        <a:sysClr val="windowText" lastClr="000000"/>
+      </a:dk1>
+      <a:lt1>
+        <a:sysClr val="window" lastClr="FFFFFF"/>
+      </a:lt1>
+      <a:dk2>
+        <a:srgbClr val="44546A"/>
+      </a:dk2>
+      <a:lt2>
+        <a:srgbClr val="E7E6E6"/>
+      </a:lt2>
+      <a:accent1>
+        <a:srgbClr val="4472C4"/>
+      </a:accent1>
+      <a:accent2>
+        <a:srgbClr val="ED7D31"/>
+      </a:accent2>
+      <a:accent3>
+        <a:srgbClr val="A5A5A5"/>
+      </a:accent3>
+      <a:accent4>
+        <a:srgbClr val="FFC000"/>
+      </a:accent4>
+      <a:accent5>
+        <a:srgbClr val="5B9BD5"/>
+      </a:accent5>
+      <a:accent6>
+        <a:srgbClr val="70AD47"/>
+      </a:accent6>
+      <a:hlink>
+        <a:srgbClr val="0563C1"/>
+      </a:hlink>
+      <a:folHlink>
+        <a:srgbClr val="954F72"/>
+      </a:folHlink>
+    </a:clrScheme>
+    <a:fontScheme name="Office">
+      <a:majorFont>
+        <a:latin typeface="Calibri Light" panose="020F0302020204030204"/>
+        <a:ea typeface=""/>
+        <a:cs typeface=""/>
+        <a:font script="Jpan" typeface="游ゴシック Light"/>
+        <a:font script="Hang" typeface="맑은 고딕"/>
+        <a:font script="Hans" typeface="等线 Light"/>
+        <a:font script="Hant" typeface="新細明體"/>
+        <a:font script="Arab" typeface="Times New Roman"/>
+        <a:font script="Hebr" typeface="Times New Roman"/>
+        <a:font script="Thai" typeface="Angsana New"/>
+        <a:font script="Ethi" typeface="Nyala"/>
+        <a:font script="Beng" typeface="Vrinda"/>
+        <a:font script="Gujr" typeface="Shruti"/>
+        <a:font script="Khmr" typeface="MoolBoran"/>
+        <a:font script="Knda" typeface="Tunga"/>
+        <a:font script="Guru" typeface="Raavi"/>
+        <a:font script="Cans" typeface="Euphemia"/>
+        <a:font script="Cher" typeface="Plantagenet Cherokee"/>
+        <a:font script="Yiii" typeface="Microsoft Yi Baiti"/>
+        <a:font script="Tibt" typeface="Microsoft Himalaya"/>
+        <a:font script="Thaa" typeface="MV Boli"/>
+        <a:font script="Deva" typeface="Mangal"/>
+        <a:font script="Telu" typeface="Gautami"/>
+        <a:font script="Taml" typeface="Latha"/>
+        <a:font script="Syrc" typeface="Estrangelo Edessa"/>
+        <a:font script="Orya" typeface="Kalinga"/>
+        <a:font script="Mlym" typeface="Kartika"/>
+        <a:font script="Laoo" typeface="DokChampa"/>
+        <a:font script="Sinh" typeface="Iskoola Pota"/>
+        <a:font script="Mong" typeface="Mongolian Baiti"/>
+        <a:font script="Viet" typeface="Times New Roman"/>
+        <a:font script="Uigh" typeface="Microsoft Uighur"/>
+        <a:font script="Geor" typeface="Sylfaen"/>
+        <a:font script="Armn" typeface="Arial"/>
+        <a:font script="Bugi" typeface="Leelawadee UI"/>
+        <a:font script="Bopo" typeface="Microsoft JhengHei"/>
+        <a:font script="Java" typeface="Javanese Text"/>
+        <a:font script="Lisu" typeface="Segoe UI"/>
+        <a:font script="Mymr" typeface="Myanmar Text"/>
+        <a:font script="Nkoo" typeface="Ebrima"/>
+        <a:font script="Olck" typeface="Nirmala UI"/>
+        <a:font script="Osma" typeface="Ebrima"/>
+        <a:font script="Phag" typeface="Phagspa"/>
+        <a:font script="Syrn" typeface="Estrangelo Edessa"/>
+        <a:font script="Syrj" typeface="Estrangelo Edessa"/>
+        <a:font script="Syre" typeface="Estrangelo Edessa"/>
+        <a:font script="Sora" typeface="Nirmala UI"/>
+        <a:font script="Tale" typeface="Microsoft Tai Le"/>
+        <a:font script="Talu" typeface="Microsoft New Tai Lue"/>
+        <a:font script="Tfng" typeface="Ebrima"/>
+      </a:majorFont>
+      <a:minorFont>
+        <a:latin typeface="Calibri" panose="020F0502020204030204"/>
+        <a:ea typeface=""/>
+        <a:cs typeface=""/>
+        <a:font script="Jpan" typeface="游ゴシック"/>
+        <a:font script="Hang" typeface="맑은 고딕"/>
+        <a:font script="Hans" typeface="等线"/>
+        <a:font script="Hant" typeface="新細明體"/>
+        <a:font script="Arab" typeface="Arial"/>
+        <a:font script="Hebr" typeface="Arial"/>
+        <a:font script="Thai" typeface="Cordia New"/>
+        <a:font script="Ethi" typeface="Nyala"/>
+        <a:font script="Beng" typeface="Vrinda"/>
+        <a:font script="Gujr" typeface="Shruti"/>
+        <a:font script="Khmr" typeface="DaunPenh"/>
+        <a:font script="Knda" typeface="Tunga"/>
+        <a:font script="Guru" typeface="Raavi"/>
+        <a:font script="Cans" typeface="Euphemia"/>
+        <a:font script="Cher" typeface="Plantagenet Cherokee"/>
+        <a:font script="Yiii" typeface="Microsoft Yi Baiti"/>
+        <a:font script="Tibt" typeface="Microsoft Himalaya"/>
+        <a:font script="Thaa" typeface="MV Boli"/>
+        <a:font script="Deva" typeface="Mangal"/>
+        <a:font script="Telu" typeface="Gautami"/>
+        <a:font script="Taml" typeface="Latha"/>
+        <a:font script="Syrc" typeface="Estrangelo Edessa"/>
+        <a:font script="Orya" typeface="Kalinga"/>
+        <a:font script="Mlym" typeface="Kartika"/>
+        <a:font script="Laoo" typeface="DokChampa"/>
+        <a:font script="Sinh" typeface="Iskoola Pota"/>
+        <a:font script="Mong" typeface="Mongolian Baiti"/>
+        <a:font script="Viet" typeface="Arial"/>
+        <a:font script="Uigh" typeface="Microsoft Uighur"/>
+        <a:font script="Geor" typeface="Sylfaen"/>
+        <a:font script="Armn" typeface="Arial"/>
+        <a:font script="Bugi" typeface="Leelawadee UI"/>
+        <a:font script="Bopo" typeface="Microsoft JhengHei"/>
+        <a:font script="Java" typeface="Javanese Text"/>
+        <a:font script="Lisu" typeface="Segoe UI"/>
+        <a:font script="Mymr" typeface="Myanmar Text"/>
+        <a:font script="Nkoo" typeface="Ebrima"/>
+        <a:font script="Olck" typeface="Nirmala UI"/>
+        <a:font script="Osma" typeface="Ebrima"/>
+        <a:font script="Phag" typeface="Phagspa"/>
+        <a:font script="Syrn" typeface="Estrangelo Edessa"/>
+        <a:font script="Syrj" typeface="Estrangelo Edessa"/>
+        <a:font script="Syre" typeface="Estrangelo Edessa"/>
+        <a:font script="Sora" typeface="Nirmala UI"/>
+        <a:font script="Tale" typeface="Microsoft Tai Le"/>
+        <a:font script="Talu" typeface="Microsoft New Tai Lue"/>
+        <a:font script="Tfng" typeface="Ebrima"/>
+      </a:minorFont>
+    </a:fontScheme>
+    <a:fmtScheme name="Office">
+      <a:fillStyleLst>
+        <a:solidFill>
+          <a:schemeClr val="phClr"/>
+        </a:solidFill>
+        <a:gradFill rotWithShape="1">
+          <a:gsLst>
+            <a:gs pos="0">
+              <a:schemeClr val="phClr">
+                <a:lumMod val="110000"/>
+                <a:satMod val="105000"/>
+                <a:tint val="67000"/>
+              </a:schemeClr>
+            </a:gs>
+            <a:gs pos="50000">
+              <a:schemeClr val="phClr">
+                <a:lumMod val="105000"/>
+                <a:satMod val="103000"/>
+                <a:tint val="73000"/>
+              </a:schemeClr>
+            </a:gs>
+            <a:gs pos="100000">
+              <a:schemeClr val="phClr">
+                <a:lumMod val="105000"/>
+                <a:satMod val="109000"/>
+                <a:tint val="81000"/>
+              </a:schemeClr>
+            </a:gs>
+          </a:gsLst>
+          <a:lin ang="5400000" scaled="0"/>
+        </a:gradFill>
+        <a:gradFill rotWithShape="1">
+          <a:gsLst>
+            <a:gs pos="0">
+              <a:schemeClr val="phClr">
+                <a:satMod val="103000"/>
+                <a:lumMod val="102000"/>
+                <a:tint val="94000"/>
+              </a:schemeClr>
+            </a:gs>
+            <a:gs pos="50000">
+              <a:schemeClr val="phClr">
+                <a:satMod val="110000"/>
+                <a:lumMod val="100000"/>
+                <a:shade val="100000"/>
+              </a:schemeClr>
+            </a:gs>
+            <a:gs pos="100000">
+              <a:schemeClr val="phClr">
+                <a:lumMod val="99000"/>
+                <a:satMod val="120000"/>
+                <a:shade val="78000"/>
+              </a:schemeClr>
+            </a:gs>
+          </a:gsLst>
+          <a:lin ang="5400000" scaled="0"/>
+        </a:gradFill>
+      </a:fillStyleLst>
+      <a:lnStyleLst>
+        <a:ln w="6350" cap="flat" cmpd="sng" algn="ctr">
+          <a:solidFill>
+            <a:schemeClr val="phClr"/>
+          </a:solidFill>
+          <a:prstDash val="solid"/>
+          <a:miter lim="800000"/>
+        </a:ln>
+        <a:ln w="12700" cap="flat" cmpd="sng" algn="ctr">
+          <a:solidFill>
+            <a:schemeClr val="phClr"/>
+          </a:solidFill>
+          <a:prstDash val="solid"/>
+          <a:miter lim="800000"/>
+        </a:ln>
+        <a:ln w="19050" cap="flat" cmpd="sng" algn="ctr">
+          <a:solidFill>
+            <a:schemeClr val="phClr"/>
+          </a:solidFill>
+          <a:prstDash val="solid"/>
+          <a:miter lim="800000"/>
+        </a:ln>
+      </a:lnStyleLst>
+      <a:effectStyleLst>
+        <a:effectStyle>
+          <a:effectLst/>
+        </a:effectStyle>
+        <a:effectStyle>
+          <a:effectLst/>
+        </a:effectStyle>
+        <a:effectStyle>
+          <a:effectLst>
+            <a:outerShdw blurRad="57150" dist="19050" dir="5400000" algn="ctr" rotWithShape="0">
+              <a:srgbClr val="000000">
+                <a:alpha val="63000"/>
+              </a:srgbClr>
+            </a:outerShdw>
+          </a:effectLst>
+        </a:effectStyle>
+      </a:effectStyleLst>
+      <a:bgFillStyleLst>
+        <a:solidFill>
+          <a:schemeClr val="phClr"/>
+        </a:solidFill>
+        <a:solidFill>
+          <a:schemeClr val="phClr">
+            <a:tint val="95000"/>
+            <a:satMod val="170000"/>
+          </a:schemeClr>
+        </a:solidFill>
+        <a:gradFill rotWithShape="1">
+          <a:gsLst>
+            <a:gs pos="0">
+              <a:schemeClr val="phClr">
+                <a:tint val="93000"/>
+                <a:satMod val="150000"/>
+                <a:shade val="98000"/>
+                <a:lumMod val="102000"/>
+              </a:schemeClr>
+            </a:gs>
+            <a:gs pos="50000">
+              <a:schemeClr val="phClr">
+                <a:tint val="98000"/>
+                <a:satMod val="130000"/>
+                <a:shade val="90000"/>
+                <a:lumMod val="103000"/>
+              </a:schemeClr>
+            </a:gs>
+            <a:gs pos="100000">
+              <a:schemeClr val="phClr">
+                <a:shade val="63000"/>
+                <a:satMod val="120000"/>
+              </a:schemeClr>
+            </a:gs>
+          </a:gsLst>
+          <a:lin ang="5400000" scaled="0"/>
+        </a:gradFill>
+      </a:bgFillStyleLst>
+    </a:fmtScheme>
+  </a:themeElements>
+  <a:objectDefaults/>
+  <a:extraClrSchemeLst/>
+  <a:extLst>
+    <a:ext uri="{05A4C25C-085E-4340-85A3-A5531E510DB2}">
+      <thm15:themeFamily xmlns:thm15="http://schemas.microsoft.com/office/thememl/2012/main" name="Office Theme" id="{62F939B6-93AF-4DB8-9C6B-D6C7DFDC589F}" vid="{4A3C46E8-61CC-4603-A589-7422A47A8E4A}"/>
+    </a:ext>
+  </a:extLst>
+</a:theme>
 </file>